--- a/slides/17-XAI.pptx
+++ b/slides/17-XAI.pptx
@@ -5,11 +5,24 @@
     <p:sldMasterId id="2147483660" r:id="rId1"/>
   </p:sldMasterIdLst>
   <p:notesMasterIdLst>
-    <p:notesMasterId r:id="rId4"/>
+    <p:notesMasterId r:id="rId17"/>
   </p:notesMasterIdLst>
   <p:sldIdLst>
     <p:sldId id="256" r:id="rId2"/>
     <p:sldId id="257" r:id="rId3"/>
+    <p:sldId id="258" r:id="rId4"/>
+    <p:sldId id="259" r:id="rId5"/>
+    <p:sldId id="260" r:id="rId6"/>
+    <p:sldId id="261" r:id="rId7"/>
+    <p:sldId id="262" r:id="rId8"/>
+    <p:sldId id="263" r:id="rId9"/>
+    <p:sldId id="264" r:id="rId10"/>
+    <p:sldId id="265" r:id="rId11"/>
+    <p:sldId id="266" r:id="rId12"/>
+    <p:sldId id="267" r:id="rId13"/>
+    <p:sldId id="268" r:id="rId14"/>
+    <p:sldId id="270" r:id="rId15"/>
+    <p:sldId id="271" r:id="rId16"/>
   </p:sldIdLst>
   <p:sldSz cx="12192000" cy="6858000"/>
   <p:notesSz cx="6858000" cy="9144000"/>
@@ -198,7 +211,7 @@
           <a:p>
             <a:fld id="{2CD22518-F7FE-2E40-9C60-793856882CE6}" type="datetimeFigureOut">
               <a:rPr lang="en-US" smtClean="0"/>
-              <a:t>2/25/26</a:t>
+              <a:t>2/26/26</a:t>
             </a:fld>
             <a:endParaRPr lang="en-US"/>
           </a:p>
@@ -549,6 +562,710 @@
 </p:notes>
 </file>
 
+<file path=ppt/notesSlides/notesSlide10.xml><?xml version="1.0" encoding="utf-8"?>
+<p:notes xmlns:a="http://schemas.openxmlformats.org/drawingml/2006/main" xmlns:r="http://schemas.openxmlformats.org/officeDocument/2006/relationships" xmlns:p="http://schemas.openxmlformats.org/presentationml/2006/main">
+  <p:cSld>
+    <p:spTree>
+      <p:nvGrpSpPr>
+        <p:cNvPr id="1" name="">
+          <a:extLst>
+            <a:ext uri="{FF2B5EF4-FFF2-40B4-BE49-F238E27FC236}">
+              <a16:creationId xmlns:a16="http://schemas.microsoft.com/office/drawing/2014/main" id="{9CF28610-7449-0EC6-CD07-0B75E4E05597}"/>
+            </a:ext>
+          </a:extLst>
+        </p:cNvPr>
+        <p:cNvGrpSpPr/>
+        <p:nvPr/>
+      </p:nvGrpSpPr>
+      <p:grpSpPr>
+        <a:xfrm>
+          <a:off x="0" y="0"/>
+          <a:ext cx="0" cy="0"/>
+          <a:chOff x="0" y="0"/>
+          <a:chExt cx="0" cy="0"/>
+        </a:xfrm>
+      </p:grpSpPr>
+      <p:sp>
+        <p:nvSpPr>
+          <p:cNvPr id="2" name="Slide Image Placeholder 1">
+            <a:extLst>
+              <a:ext uri="{FF2B5EF4-FFF2-40B4-BE49-F238E27FC236}">
+                <a16:creationId xmlns:a16="http://schemas.microsoft.com/office/drawing/2014/main" id="{CA0797B9-78D3-CE90-B5C8-81FAC1A04473}"/>
+              </a:ext>
+            </a:extLst>
+          </p:cNvPr>
+          <p:cNvSpPr>
+            <a:spLocks noGrp="1" noRot="1" noChangeAspect="1"/>
+          </p:cNvSpPr>
+          <p:nvPr>
+            <p:ph type="sldImg"/>
+          </p:nvPr>
+        </p:nvSpPr>
+        <p:spPr/>
+      </p:sp>
+      <p:sp>
+        <p:nvSpPr>
+          <p:cNvPr id="3" name="Notes Placeholder 2">
+            <a:extLst>
+              <a:ext uri="{FF2B5EF4-FFF2-40B4-BE49-F238E27FC236}">
+                <a16:creationId xmlns:a16="http://schemas.microsoft.com/office/drawing/2014/main" id="{537245A2-5926-0E2D-B3CC-9C8D78C3CC9D}"/>
+              </a:ext>
+            </a:extLst>
+          </p:cNvPr>
+          <p:cNvSpPr>
+            <a:spLocks noGrp="1"/>
+          </p:cNvSpPr>
+          <p:nvPr>
+            <p:ph type="body" idx="1"/>
+          </p:nvPr>
+        </p:nvSpPr>
+        <p:spPr/>
+        <p:txBody>
+          <a:bodyPr/>
+          <a:lstStyle/>
+          <a:p>
+            <a:r>
+              <a:rPr lang="en-US" dirty="0"/>
+              <a:t>VisEvol14 is a VA dashboard designed to facilitate hyperparameter search using evolutionary optimization [cf., Figure 3(3)]. By using multiple coordinated views, the dashboard enables users to create new hyperparameter sets and preserve robust ones within a majority-voting ensemble. Examining the effects of adding or removing algorithms and models in a majority-voting ensemble from various perspectives, along with monitoring the crossover and mutation processes, provides users with clarity on selecting hyperparameters for a single model or complex ensembles that require a balance of performance and diversity</a:t>
+            </a:r>
+          </a:p>
+        </p:txBody>
+      </p:sp>
+      <p:sp>
+        <p:nvSpPr>
+          <p:cNvPr id="4" name="Slide Number Placeholder 3">
+            <a:extLst>
+              <a:ext uri="{FF2B5EF4-FFF2-40B4-BE49-F238E27FC236}">
+                <a16:creationId xmlns:a16="http://schemas.microsoft.com/office/drawing/2014/main" id="{2E80B6DA-6E60-9796-0983-E290C953CC6F}"/>
+              </a:ext>
+            </a:extLst>
+          </p:cNvPr>
+          <p:cNvSpPr>
+            <a:spLocks noGrp="1"/>
+          </p:cNvSpPr>
+          <p:nvPr>
+            <p:ph type="sldNum" sz="quarter" idx="5"/>
+          </p:nvPr>
+        </p:nvSpPr>
+        <p:spPr/>
+        <p:txBody>
+          <a:bodyPr/>
+          <a:lstStyle/>
+          <a:p>
+            <a:fld id="{362CD335-F0CB-D347-B8A5-7AB70F34C34F}" type="slidenum">
+              <a:rPr lang="en-US" smtClean="0"/>
+              <a:t>10</a:t>
+            </a:fld>
+            <a:endParaRPr lang="en-US"/>
+          </a:p>
+        </p:txBody>
+      </p:sp>
+    </p:spTree>
+    <p:extLst>
+      <p:ext uri="{BB962C8B-B14F-4D97-AF65-F5344CB8AC3E}">
+        <p14:creationId xmlns:p14="http://schemas.microsoft.com/office/powerpoint/2010/main" val="2031644220"/>
+      </p:ext>
+    </p:extLst>
+  </p:cSld>
+  <p:clrMapOvr>
+    <a:masterClrMapping/>
+  </p:clrMapOvr>
+</p:notes>
+</file>
+
+<file path=ppt/notesSlides/notesSlide11.xml><?xml version="1.0" encoding="utf-8"?>
+<p:notes xmlns:a="http://schemas.openxmlformats.org/drawingml/2006/main" xmlns:r="http://schemas.openxmlformats.org/officeDocument/2006/relationships" xmlns:p="http://schemas.openxmlformats.org/presentationml/2006/main">
+  <p:cSld>
+    <p:spTree>
+      <p:nvGrpSpPr>
+        <p:cNvPr id="1" name="">
+          <a:extLst>
+            <a:ext uri="{FF2B5EF4-FFF2-40B4-BE49-F238E27FC236}">
+              <a16:creationId xmlns:a16="http://schemas.microsoft.com/office/drawing/2014/main" id="{171942AA-1BA1-2A89-BEB4-7A91669C9A5C}"/>
+            </a:ext>
+          </a:extLst>
+        </p:cNvPr>
+        <p:cNvGrpSpPr/>
+        <p:nvPr/>
+      </p:nvGrpSpPr>
+      <p:grpSpPr>
+        <a:xfrm>
+          <a:off x="0" y="0"/>
+          <a:ext cx="0" cy="0"/>
+          <a:chOff x="0" y="0"/>
+          <a:chExt cx="0" cy="0"/>
+        </a:xfrm>
+      </p:grpSpPr>
+      <p:sp>
+        <p:nvSpPr>
+          <p:cNvPr id="2" name="Slide Image Placeholder 1">
+            <a:extLst>
+              <a:ext uri="{FF2B5EF4-FFF2-40B4-BE49-F238E27FC236}">
+                <a16:creationId xmlns:a16="http://schemas.microsoft.com/office/drawing/2014/main" id="{C54A0A89-DB2F-115B-8815-CF4C0B51EA6E}"/>
+              </a:ext>
+            </a:extLst>
+          </p:cNvPr>
+          <p:cNvSpPr>
+            <a:spLocks noGrp="1" noRot="1" noChangeAspect="1"/>
+          </p:cNvSpPr>
+          <p:nvPr>
+            <p:ph type="sldImg"/>
+          </p:nvPr>
+        </p:nvSpPr>
+        <p:spPr/>
+      </p:sp>
+      <p:sp>
+        <p:nvSpPr>
+          <p:cNvPr id="3" name="Notes Placeholder 2">
+            <a:extLst>
+              <a:ext uri="{FF2B5EF4-FFF2-40B4-BE49-F238E27FC236}">
+                <a16:creationId xmlns:a16="http://schemas.microsoft.com/office/drawing/2014/main" id="{3EEF4260-BAEC-30A3-3AA2-DB287CCFEF55}"/>
+              </a:ext>
+            </a:extLst>
+          </p:cNvPr>
+          <p:cNvSpPr>
+            <a:spLocks noGrp="1"/>
+          </p:cNvSpPr>
+          <p:nvPr>
+            <p:ph type="body" idx="1"/>
+          </p:nvPr>
+        </p:nvSpPr>
+        <p:spPr/>
+        <p:txBody>
+          <a:bodyPr/>
+          <a:lstStyle/>
+          <a:p>
+            <a:r>
+              <a:rPr lang="en-US" dirty="0"/>
+              <a:t>t-SNE is a widely used method for visualizing multidimensional data, with numerous successful applications across various fields. However, interpreting t-SNE projections can be challenging and, at times, misleading, which can undermine the reliability of the results. Gaining insight into the workings of t-SNE and the underlying causes of specific patterns in its output can be particularly difficult, especially for those unfamiliar with dimensionality reduction techniques</a:t>
+            </a:r>
+          </a:p>
+          <a:p>
+            <a:endParaRPr lang="en-US" dirty="0"/>
+          </a:p>
+          <a:p>
+            <a:r>
+              <a:rPr lang="en-US" dirty="0"/>
+              <a:t>t-viSNE15 is a VA dashboard designed for exploring t-SNE projections visually [cf., Figure 3(4)]. By partially unveiling the inner workings of the t-SNE algorithm, the author empowers users to evaluate the quality of the projections and gain insights into the algorithm’s decision-making process when forming clusters. The author also reveals typically overlooked information from within the algorithm, such as point densities, and highlight</a:t>
+            </a:r>
+          </a:p>
+          <a:p>
+            <a:endParaRPr lang="en-US" dirty="0"/>
+          </a:p>
+          <a:p>
+            <a:r>
+              <a:rPr lang="en-US" dirty="0"/>
+              <a:t>DeforestVis16 is a VA dashboard designed to employ decision stumps (single-level decision trees) derived from the AdaBoost algorithm, which are inherently interpretable, to create surrogate models that approximate the behavior of a target model [see Figure 3(5)]. The dashboard’s linked views enable users to iteratively balance complexity and fidelity while reducing the precision (measured in decimal places) used in decision thresholds without compromising accuracy. Moreover, </a:t>
+            </a:r>
+            <a:r>
+              <a:rPr lang="en-US" dirty="0" err="1"/>
+              <a:t>DeforestVis</a:t>
+            </a:r>
+            <a:r>
+              <a:rPr lang="en-US" dirty="0"/>
+              <a:t> allows users to explore decision stumps in various ways, such as evaluating their purity and impact, and it summarizes the surrogate model’s behavior by aggregating the predictive outcomes and influence of all decision stumps associated with each data feature. Users can modify rules and compare them at both local and global levels</a:t>
+            </a:r>
+          </a:p>
+        </p:txBody>
+      </p:sp>
+      <p:sp>
+        <p:nvSpPr>
+          <p:cNvPr id="4" name="Slide Number Placeholder 3">
+            <a:extLst>
+              <a:ext uri="{FF2B5EF4-FFF2-40B4-BE49-F238E27FC236}">
+                <a16:creationId xmlns:a16="http://schemas.microsoft.com/office/drawing/2014/main" id="{25056DAA-2983-63CB-7077-F15F83F21C04}"/>
+              </a:ext>
+            </a:extLst>
+          </p:cNvPr>
+          <p:cNvSpPr>
+            <a:spLocks noGrp="1"/>
+          </p:cNvSpPr>
+          <p:nvPr>
+            <p:ph type="sldNum" sz="quarter" idx="5"/>
+          </p:nvPr>
+        </p:nvSpPr>
+        <p:spPr/>
+        <p:txBody>
+          <a:bodyPr/>
+          <a:lstStyle/>
+          <a:p>
+            <a:fld id="{362CD335-F0CB-D347-B8A5-7AB70F34C34F}" type="slidenum">
+              <a:rPr lang="en-US" smtClean="0"/>
+              <a:t>11</a:t>
+            </a:fld>
+            <a:endParaRPr lang="en-US"/>
+          </a:p>
+        </p:txBody>
+      </p:sp>
+    </p:spTree>
+    <p:extLst>
+      <p:ext uri="{BB962C8B-B14F-4D97-AF65-F5344CB8AC3E}">
+        <p14:creationId xmlns:p14="http://schemas.microsoft.com/office/powerpoint/2010/main" val="1825211177"/>
+      </p:ext>
+    </p:extLst>
+  </p:cSld>
+  <p:clrMapOvr>
+    <a:masterClrMapping/>
+  </p:clrMapOvr>
+</p:notes>
+</file>
+
+<file path=ppt/notesSlides/notesSlide12.xml><?xml version="1.0" encoding="utf-8"?>
+<p:notes xmlns:a="http://schemas.openxmlformats.org/drawingml/2006/main" xmlns:r="http://schemas.openxmlformats.org/officeDocument/2006/relationships" xmlns:p="http://schemas.openxmlformats.org/presentationml/2006/main">
+  <p:cSld>
+    <p:spTree>
+      <p:nvGrpSpPr>
+        <p:cNvPr id="1" name="">
+          <a:extLst>
+            <a:ext uri="{FF2B5EF4-FFF2-40B4-BE49-F238E27FC236}">
+              <a16:creationId xmlns:a16="http://schemas.microsoft.com/office/drawing/2014/main" id="{DE07F9DE-F7DC-7BC1-0EBB-F01B80E918EF}"/>
+            </a:ext>
+          </a:extLst>
+        </p:cNvPr>
+        <p:cNvGrpSpPr/>
+        <p:nvPr/>
+      </p:nvGrpSpPr>
+      <p:grpSpPr>
+        <a:xfrm>
+          <a:off x="0" y="0"/>
+          <a:ext cx="0" cy="0"/>
+          <a:chOff x="0" y="0"/>
+          <a:chExt cx="0" cy="0"/>
+        </a:xfrm>
+      </p:grpSpPr>
+      <p:sp>
+        <p:nvSpPr>
+          <p:cNvPr id="2" name="Slide Image Placeholder 1">
+            <a:extLst>
+              <a:ext uri="{FF2B5EF4-FFF2-40B4-BE49-F238E27FC236}">
+                <a16:creationId xmlns:a16="http://schemas.microsoft.com/office/drawing/2014/main" id="{E0706C87-ABE8-586B-F00A-4C9603F3E011}"/>
+              </a:ext>
+            </a:extLst>
+          </p:cNvPr>
+          <p:cNvSpPr>
+            <a:spLocks noGrp="1" noRot="1" noChangeAspect="1"/>
+          </p:cNvSpPr>
+          <p:nvPr>
+            <p:ph type="sldImg"/>
+          </p:nvPr>
+        </p:nvSpPr>
+        <p:spPr/>
+      </p:sp>
+      <p:sp>
+        <p:nvSpPr>
+          <p:cNvPr id="3" name="Notes Placeholder 2">
+            <a:extLst>
+              <a:ext uri="{FF2B5EF4-FFF2-40B4-BE49-F238E27FC236}">
+                <a16:creationId xmlns:a16="http://schemas.microsoft.com/office/drawing/2014/main" id="{D87F4683-74AA-89D8-27B7-43FAB038AC78}"/>
+              </a:ext>
+            </a:extLst>
+          </p:cNvPr>
+          <p:cNvSpPr>
+            <a:spLocks noGrp="1"/>
+          </p:cNvSpPr>
+          <p:nvPr>
+            <p:ph type="body" idx="1"/>
+          </p:nvPr>
+        </p:nvSpPr>
+        <p:spPr/>
+        <p:txBody>
+          <a:bodyPr/>
+          <a:lstStyle/>
+          <a:p>
+            <a:r>
+              <a:rPr lang="en-US" dirty="0"/>
+              <a:t>Bagging and boosting are widely used ensemble techniques in AI that generate multiple individual decision trees. Because of their ensemble nature, these methods often achieve better predictive performance compared to single decision trees or other AI models. However, each decision tree creates numerous decision paths, increasing the model’s complexity and limiting its application in fields requiring reliable and explainable outcomes. Therefore, as the number of decisions increases, the interpretability of algorithms, such as random forest and AdaBoost, diminishes</a:t>
+            </a:r>
+          </a:p>
+          <a:p>
+            <a:endParaRPr lang="en-US" dirty="0"/>
+          </a:p>
+          <a:p>
+            <a:r>
+              <a:rPr lang="en-US" dirty="0"/>
+              <a:t>VisRuler17 is a VA dashboard that enables users to examine a range of rules derived from bagged and boosted decision trees in order to reach a consensus on the final decision for each case [cf., Figure 3(6)]. The dashboard’s multiple coordinated views support the selection of various high-performance models, analysis of feature contributions, management of multiple decisions, exploration of global decisions, and facilitation of case-based reasoning</a:t>
+            </a:r>
+          </a:p>
+        </p:txBody>
+      </p:sp>
+      <p:sp>
+        <p:nvSpPr>
+          <p:cNvPr id="4" name="Slide Number Placeholder 3">
+            <a:extLst>
+              <a:ext uri="{FF2B5EF4-FFF2-40B4-BE49-F238E27FC236}">
+                <a16:creationId xmlns:a16="http://schemas.microsoft.com/office/drawing/2014/main" id="{BEED94F0-CC51-4F16-07CC-6C018235E129}"/>
+              </a:ext>
+            </a:extLst>
+          </p:cNvPr>
+          <p:cNvSpPr>
+            <a:spLocks noGrp="1"/>
+          </p:cNvSpPr>
+          <p:nvPr>
+            <p:ph type="sldNum" sz="quarter" idx="5"/>
+          </p:nvPr>
+        </p:nvSpPr>
+        <p:spPr/>
+        <p:txBody>
+          <a:bodyPr/>
+          <a:lstStyle/>
+          <a:p>
+            <a:fld id="{362CD335-F0CB-D347-B8A5-7AB70F34C34F}" type="slidenum">
+              <a:rPr lang="en-US" smtClean="0"/>
+              <a:t>12</a:t>
+            </a:fld>
+            <a:endParaRPr lang="en-US"/>
+          </a:p>
+        </p:txBody>
+      </p:sp>
+    </p:spTree>
+    <p:extLst>
+      <p:ext uri="{BB962C8B-B14F-4D97-AF65-F5344CB8AC3E}">
+        <p14:creationId xmlns:p14="http://schemas.microsoft.com/office/powerpoint/2010/main" val="2791687921"/>
+      </p:ext>
+    </p:extLst>
+  </p:cSld>
+  <p:clrMapOvr>
+    <a:masterClrMapping/>
+  </p:clrMapOvr>
+</p:notes>
+</file>
+
+<file path=ppt/notesSlides/notesSlide13.xml><?xml version="1.0" encoding="utf-8"?>
+<p:notes xmlns:a="http://schemas.openxmlformats.org/drawingml/2006/main" xmlns:r="http://schemas.openxmlformats.org/officeDocument/2006/relationships" xmlns:p="http://schemas.openxmlformats.org/presentationml/2006/main">
+  <p:cSld>
+    <p:spTree>
+      <p:nvGrpSpPr>
+        <p:cNvPr id="1" name="">
+          <a:extLst>
+            <a:ext uri="{FF2B5EF4-FFF2-40B4-BE49-F238E27FC236}">
+              <a16:creationId xmlns:a16="http://schemas.microsoft.com/office/drawing/2014/main" id="{A75A6BD8-4692-CDBE-966F-BE8106BF69BD}"/>
+            </a:ext>
+          </a:extLst>
+        </p:cNvPr>
+        <p:cNvGrpSpPr/>
+        <p:nvPr/>
+      </p:nvGrpSpPr>
+      <p:grpSpPr>
+        <a:xfrm>
+          <a:off x="0" y="0"/>
+          <a:ext cx="0" cy="0"/>
+          <a:chOff x="0" y="0"/>
+          <a:chExt cx="0" cy="0"/>
+        </a:xfrm>
+      </p:grpSpPr>
+      <p:sp>
+        <p:nvSpPr>
+          <p:cNvPr id="2" name="Slide Image Placeholder 1">
+            <a:extLst>
+              <a:ext uri="{FF2B5EF4-FFF2-40B4-BE49-F238E27FC236}">
+                <a16:creationId xmlns:a16="http://schemas.microsoft.com/office/drawing/2014/main" id="{6B03E374-0456-BE55-F225-2DCA452BD5A1}"/>
+              </a:ext>
+            </a:extLst>
+          </p:cNvPr>
+          <p:cNvSpPr>
+            <a:spLocks noGrp="1" noRot="1" noChangeAspect="1"/>
+          </p:cNvSpPr>
+          <p:nvPr>
+            <p:ph type="sldImg"/>
+          </p:nvPr>
+        </p:nvSpPr>
+        <p:spPr/>
+      </p:sp>
+      <p:sp>
+        <p:nvSpPr>
+          <p:cNvPr id="3" name="Notes Placeholder 2">
+            <a:extLst>
+              <a:ext uri="{FF2B5EF4-FFF2-40B4-BE49-F238E27FC236}">
+                <a16:creationId xmlns:a16="http://schemas.microsoft.com/office/drawing/2014/main" id="{DBA0D0E2-EB94-B8AF-710C-FAB3F1EF5CB1}"/>
+              </a:ext>
+            </a:extLst>
+          </p:cNvPr>
+          <p:cNvSpPr>
+            <a:spLocks noGrp="1"/>
+          </p:cNvSpPr>
+          <p:nvPr>
+            <p:ph type="body" idx="1"/>
+          </p:nvPr>
+        </p:nvSpPr>
+        <p:spPr/>
+        <p:txBody>
+          <a:bodyPr/>
+          <a:lstStyle/>
+          <a:p>
+            <a:r>
+              <a:rPr lang="en-US" dirty="0"/>
+              <a:t>Stacking is an ensemble method that integrates various base models, organized in at least one layer, and uses a metamodel to aggregate their predictions. While it can significantly improve the predictive accuracy of AI, creating a model stack from the ground up often involves a time-consuming trial-and-error process. This difficulty arises due to the vast range of possible solutions, including varying sets of data instances and features for training, a wide selection of algorithms, and different parameter settings (i.e., models) that yield different performances based on various metrics.</a:t>
+            </a:r>
+          </a:p>
+          <a:p>
+            <a:endParaRPr lang="en-US" dirty="0"/>
+          </a:p>
+          <a:p>
+            <a:r>
+              <a:rPr lang="en-US" dirty="0"/>
+              <a:t>StackGenVis18 is a VA dashboard designed for aligning data, algorithms, and models in stacking ensemble [cf., Figure 3(7)]. Through multiple coordinated views, users can create an effective stacking ensemble from scratch. By exploring the algorithms, data, and models from various perspectives and monitoring the training process, users can confidently determine the next steps in developing complex stacks of models, requiring a combination of both the highest performing and the most diverse individual AI models.</a:t>
+            </a:r>
+          </a:p>
+        </p:txBody>
+      </p:sp>
+      <p:sp>
+        <p:nvSpPr>
+          <p:cNvPr id="4" name="Slide Number Placeholder 3">
+            <a:extLst>
+              <a:ext uri="{FF2B5EF4-FFF2-40B4-BE49-F238E27FC236}">
+                <a16:creationId xmlns:a16="http://schemas.microsoft.com/office/drawing/2014/main" id="{0DADA9C3-20F4-115A-96ED-5B439D469C9F}"/>
+              </a:ext>
+            </a:extLst>
+          </p:cNvPr>
+          <p:cNvSpPr>
+            <a:spLocks noGrp="1"/>
+          </p:cNvSpPr>
+          <p:nvPr>
+            <p:ph type="sldNum" sz="quarter" idx="5"/>
+          </p:nvPr>
+        </p:nvSpPr>
+        <p:spPr/>
+        <p:txBody>
+          <a:bodyPr/>
+          <a:lstStyle/>
+          <a:p>
+            <a:fld id="{362CD335-F0CB-D347-B8A5-7AB70F34C34F}" type="slidenum">
+              <a:rPr lang="en-US" smtClean="0"/>
+              <a:t>13</a:t>
+            </a:fld>
+            <a:endParaRPr lang="en-US"/>
+          </a:p>
+        </p:txBody>
+      </p:sp>
+    </p:spTree>
+    <p:extLst>
+      <p:ext uri="{BB962C8B-B14F-4D97-AF65-F5344CB8AC3E}">
+        <p14:creationId xmlns:p14="http://schemas.microsoft.com/office/powerpoint/2010/main" val="1450521595"/>
+      </p:ext>
+    </p:extLst>
+  </p:cSld>
+  <p:clrMapOvr>
+    <a:masterClrMapping/>
+  </p:clrMapOvr>
+</p:notes>
+</file>
+
+<file path=ppt/notesSlides/notesSlide14.xml><?xml version="1.0" encoding="utf-8"?>
+<p:notes xmlns:a="http://schemas.openxmlformats.org/drawingml/2006/main" xmlns:r="http://schemas.openxmlformats.org/officeDocument/2006/relationships" xmlns:p="http://schemas.openxmlformats.org/presentationml/2006/main">
+  <p:cSld>
+    <p:spTree>
+      <p:nvGrpSpPr>
+        <p:cNvPr id="1" name="">
+          <a:extLst>
+            <a:ext uri="{FF2B5EF4-FFF2-40B4-BE49-F238E27FC236}">
+              <a16:creationId xmlns:a16="http://schemas.microsoft.com/office/drawing/2014/main" id="{8F3B6A4A-44CF-9A43-AD3E-F7298149DD53}"/>
+            </a:ext>
+          </a:extLst>
+        </p:cNvPr>
+        <p:cNvGrpSpPr/>
+        <p:nvPr/>
+      </p:nvGrpSpPr>
+      <p:grpSpPr>
+        <a:xfrm>
+          <a:off x="0" y="0"/>
+          <a:ext cx="0" cy="0"/>
+          <a:chOff x="0" y="0"/>
+          <a:chExt cx="0" cy="0"/>
+        </a:xfrm>
+      </p:grpSpPr>
+      <p:sp>
+        <p:nvSpPr>
+          <p:cNvPr id="2" name="Slide Image Placeholder 1">
+            <a:extLst>
+              <a:ext uri="{FF2B5EF4-FFF2-40B4-BE49-F238E27FC236}">
+                <a16:creationId xmlns:a16="http://schemas.microsoft.com/office/drawing/2014/main" id="{2F3349E0-6A9E-5041-B197-014044D7A6C9}"/>
+              </a:ext>
+            </a:extLst>
+          </p:cNvPr>
+          <p:cNvSpPr>
+            <a:spLocks noGrp="1" noRot="1" noChangeAspect="1"/>
+          </p:cNvSpPr>
+          <p:nvPr>
+            <p:ph type="sldImg"/>
+          </p:nvPr>
+        </p:nvSpPr>
+        <p:spPr/>
+      </p:sp>
+      <p:sp>
+        <p:nvSpPr>
+          <p:cNvPr id="3" name="Notes Placeholder 2">
+            <a:extLst>
+              <a:ext uri="{FF2B5EF4-FFF2-40B4-BE49-F238E27FC236}">
+                <a16:creationId xmlns:a16="http://schemas.microsoft.com/office/drawing/2014/main" id="{6ADFD6D8-A398-3CC6-4A89-A9C5A209CD4C}"/>
+              </a:ext>
+            </a:extLst>
+          </p:cNvPr>
+          <p:cNvSpPr>
+            <a:spLocks noGrp="1"/>
+          </p:cNvSpPr>
+          <p:nvPr>
+            <p:ph type="body" idx="1"/>
+          </p:nvPr>
+        </p:nvSpPr>
+        <p:spPr/>
+        <p:txBody>
+          <a:bodyPr/>
+          <a:lstStyle/>
+          <a:p>
+            <a:endParaRPr lang="en-US" dirty="0"/>
+          </a:p>
+        </p:txBody>
+      </p:sp>
+      <p:sp>
+        <p:nvSpPr>
+          <p:cNvPr id="4" name="Slide Number Placeholder 3">
+            <a:extLst>
+              <a:ext uri="{FF2B5EF4-FFF2-40B4-BE49-F238E27FC236}">
+                <a16:creationId xmlns:a16="http://schemas.microsoft.com/office/drawing/2014/main" id="{132D3FE6-FB4B-EDF4-3966-8638B5736530}"/>
+              </a:ext>
+            </a:extLst>
+          </p:cNvPr>
+          <p:cNvSpPr>
+            <a:spLocks noGrp="1"/>
+          </p:cNvSpPr>
+          <p:nvPr>
+            <p:ph type="sldNum" sz="quarter" idx="5"/>
+          </p:nvPr>
+        </p:nvSpPr>
+        <p:spPr/>
+        <p:txBody>
+          <a:bodyPr/>
+          <a:lstStyle/>
+          <a:p>
+            <a:fld id="{362CD335-F0CB-D347-B8A5-7AB70F34C34F}" type="slidenum">
+              <a:rPr lang="en-US" smtClean="0"/>
+              <a:t>14</a:t>
+            </a:fld>
+            <a:endParaRPr lang="en-US"/>
+          </a:p>
+        </p:txBody>
+      </p:sp>
+    </p:spTree>
+    <p:extLst>
+      <p:ext uri="{BB962C8B-B14F-4D97-AF65-F5344CB8AC3E}">
+        <p14:creationId xmlns:p14="http://schemas.microsoft.com/office/powerpoint/2010/main" val="985741984"/>
+      </p:ext>
+    </p:extLst>
+  </p:cSld>
+  <p:clrMapOvr>
+    <a:masterClrMapping/>
+  </p:clrMapOvr>
+</p:notes>
+</file>
+
+<file path=ppt/notesSlides/notesSlide15.xml><?xml version="1.0" encoding="utf-8"?>
+<p:notes xmlns:a="http://schemas.openxmlformats.org/drawingml/2006/main" xmlns:r="http://schemas.openxmlformats.org/officeDocument/2006/relationships" xmlns:p="http://schemas.openxmlformats.org/presentationml/2006/main">
+  <p:cSld>
+    <p:spTree>
+      <p:nvGrpSpPr>
+        <p:cNvPr id="1" name="">
+          <a:extLst>
+            <a:ext uri="{FF2B5EF4-FFF2-40B4-BE49-F238E27FC236}">
+              <a16:creationId xmlns:a16="http://schemas.microsoft.com/office/drawing/2014/main" id="{3DF1AB97-3219-B6DE-1760-1F5947385BE6}"/>
+            </a:ext>
+          </a:extLst>
+        </p:cNvPr>
+        <p:cNvGrpSpPr/>
+        <p:nvPr/>
+      </p:nvGrpSpPr>
+      <p:grpSpPr>
+        <a:xfrm>
+          <a:off x="0" y="0"/>
+          <a:ext cx="0" cy="0"/>
+          <a:chOff x="0" y="0"/>
+          <a:chExt cx="0" cy="0"/>
+        </a:xfrm>
+      </p:grpSpPr>
+      <p:sp>
+        <p:nvSpPr>
+          <p:cNvPr id="2" name="Slide Image Placeholder 1">
+            <a:extLst>
+              <a:ext uri="{FF2B5EF4-FFF2-40B4-BE49-F238E27FC236}">
+                <a16:creationId xmlns:a16="http://schemas.microsoft.com/office/drawing/2014/main" id="{B80B9E2A-A459-E3C1-49AC-682B26F3EA84}"/>
+              </a:ext>
+            </a:extLst>
+          </p:cNvPr>
+          <p:cNvSpPr>
+            <a:spLocks noGrp="1" noRot="1" noChangeAspect="1"/>
+          </p:cNvSpPr>
+          <p:nvPr>
+            <p:ph type="sldImg"/>
+          </p:nvPr>
+        </p:nvSpPr>
+        <p:spPr/>
+      </p:sp>
+      <p:sp>
+        <p:nvSpPr>
+          <p:cNvPr id="3" name="Notes Placeholder 2">
+            <a:extLst>
+              <a:ext uri="{FF2B5EF4-FFF2-40B4-BE49-F238E27FC236}">
+                <a16:creationId xmlns:a16="http://schemas.microsoft.com/office/drawing/2014/main" id="{CEF725AE-8FDD-7EB6-F75A-985424C42D6B}"/>
+              </a:ext>
+            </a:extLst>
+          </p:cNvPr>
+          <p:cNvSpPr>
+            <a:spLocks noGrp="1"/>
+          </p:cNvSpPr>
+          <p:nvPr>
+            <p:ph type="body" idx="1"/>
+          </p:nvPr>
+        </p:nvSpPr>
+        <p:spPr/>
+        <p:txBody>
+          <a:bodyPr/>
+          <a:lstStyle/>
+          <a:p>
+            <a:endParaRPr lang="en-US" dirty="0"/>
+          </a:p>
+        </p:txBody>
+      </p:sp>
+      <p:sp>
+        <p:nvSpPr>
+          <p:cNvPr id="4" name="Slide Number Placeholder 3">
+            <a:extLst>
+              <a:ext uri="{FF2B5EF4-FFF2-40B4-BE49-F238E27FC236}">
+                <a16:creationId xmlns:a16="http://schemas.microsoft.com/office/drawing/2014/main" id="{68FDFEF7-9D1F-4484-E2EA-A999ADA455AE}"/>
+              </a:ext>
+            </a:extLst>
+          </p:cNvPr>
+          <p:cNvSpPr>
+            <a:spLocks noGrp="1"/>
+          </p:cNvSpPr>
+          <p:nvPr>
+            <p:ph type="sldNum" sz="quarter" idx="5"/>
+          </p:nvPr>
+        </p:nvSpPr>
+        <p:spPr/>
+        <p:txBody>
+          <a:bodyPr/>
+          <a:lstStyle/>
+          <a:p>
+            <a:fld id="{362CD335-F0CB-D347-B8A5-7AB70F34C34F}" type="slidenum">
+              <a:rPr lang="en-US" smtClean="0"/>
+              <a:t>15</a:t>
+            </a:fld>
+            <a:endParaRPr lang="en-US"/>
+          </a:p>
+        </p:txBody>
+      </p:sp>
+    </p:spTree>
+    <p:extLst>
+      <p:ext uri="{BB962C8B-B14F-4D97-AF65-F5344CB8AC3E}">
+        <p14:creationId xmlns:p14="http://schemas.microsoft.com/office/powerpoint/2010/main" val="1441236721"/>
+      </p:ext>
+    </p:extLst>
+  </p:cSld>
+  <p:clrMapOvr>
+    <a:masterClrMapping/>
+  </p:clrMapOvr>
+</p:notes>
+</file>
+
 <file path=ppt/notesSlides/notesSlide2.xml><?xml version="1.0" encoding="utf-8"?>
 <p:notes xmlns:a="http://schemas.openxmlformats.org/drawingml/2006/main" xmlns:r="http://schemas.openxmlformats.org/officeDocument/2006/relationships" xmlns:p="http://schemas.openxmlformats.org/presentationml/2006/main">
   <p:cSld>
@@ -624,6 +1341,824 @@
     <p:extLst>
       <p:ext uri="{BB962C8B-B14F-4D97-AF65-F5344CB8AC3E}">
         <p14:creationId xmlns:p14="http://schemas.microsoft.com/office/powerpoint/2010/main" val="2344972887"/>
+      </p:ext>
+    </p:extLst>
+  </p:cSld>
+  <p:clrMapOvr>
+    <a:masterClrMapping/>
+  </p:clrMapOvr>
+</p:notes>
+</file>
+
+<file path=ppt/notesSlides/notesSlide3.xml><?xml version="1.0" encoding="utf-8"?>
+<p:notes xmlns:a="http://schemas.openxmlformats.org/drawingml/2006/main" xmlns:r="http://schemas.openxmlformats.org/officeDocument/2006/relationships" xmlns:p="http://schemas.openxmlformats.org/presentationml/2006/main">
+  <p:cSld>
+    <p:spTree>
+      <p:nvGrpSpPr>
+        <p:cNvPr id="1" name="">
+          <a:extLst>
+            <a:ext uri="{FF2B5EF4-FFF2-40B4-BE49-F238E27FC236}">
+              <a16:creationId xmlns:a16="http://schemas.microsoft.com/office/drawing/2014/main" id="{5E7173CF-89CD-DBBE-6CF7-DD4D7934B298}"/>
+            </a:ext>
+          </a:extLst>
+        </p:cNvPr>
+        <p:cNvGrpSpPr/>
+        <p:nvPr/>
+      </p:nvGrpSpPr>
+      <p:grpSpPr>
+        <a:xfrm>
+          <a:off x="0" y="0"/>
+          <a:ext cx="0" cy="0"/>
+          <a:chOff x="0" y="0"/>
+          <a:chExt cx="0" cy="0"/>
+        </a:xfrm>
+      </p:grpSpPr>
+      <p:sp>
+        <p:nvSpPr>
+          <p:cNvPr id="2" name="Slide Image Placeholder 1">
+            <a:extLst>
+              <a:ext uri="{FF2B5EF4-FFF2-40B4-BE49-F238E27FC236}">
+                <a16:creationId xmlns:a16="http://schemas.microsoft.com/office/drawing/2014/main" id="{3F00C27B-8BB5-5C04-EB95-A8F5D6F32261}"/>
+              </a:ext>
+            </a:extLst>
+          </p:cNvPr>
+          <p:cNvSpPr>
+            <a:spLocks noGrp="1" noRot="1" noChangeAspect="1"/>
+          </p:cNvSpPr>
+          <p:nvPr>
+            <p:ph type="sldImg"/>
+          </p:nvPr>
+        </p:nvSpPr>
+        <p:spPr/>
+      </p:sp>
+      <p:sp>
+        <p:nvSpPr>
+          <p:cNvPr id="3" name="Notes Placeholder 2">
+            <a:extLst>
+              <a:ext uri="{FF2B5EF4-FFF2-40B4-BE49-F238E27FC236}">
+                <a16:creationId xmlns:a16="http://schemas.microsoft.com/office/drawing/2014/main" id="{0109D962-B12D-1C4C-8EDF-27A38CE4F142}"/>
+              </a:ext>
+            </a:extLst>
+          </p:cNvPr>
+          <p:cNvSpPr>
+            <a:spLocks noGrp="1"/>
+          </p:cNvSpPr>
+          <p:nvPr>
+            <p:ph type="body" idx="1"/>
+          </p:nvPr>
+        </p:nvSpPr>
+        <p:spPr/>
+        <p:txBody>
+          <a:bodyPr/>
+          <a:lstStyle/>
+          <a:p>
+            <a:endParaRPr lang="en-US" dirty="0"/>
+          </a:p>
+        </p:txBody>
+      </p:sp>
+      <p:sp>
+        <p:nvSpPr>
+          <p:cNvPr id="4" name="Slide Number Placeholder 3">
+            <a:extLst>
+              <a:ext uri="{FF2B5EF4-FFF2-40B4-BE49-F238E27FC236}">
+                <a16:creationId xmlns:a16="http://schemas.microsoft.com/office/drawing/2014/main" id="{23A44C81-543B-7259-D452-A44D3B4D7C91}"/>
+              </a:ext>
+            </a:extLst>
+          </p:cNvPr>
+          <p:cNvSpPr>
+            <a:spLocks noGrp="1"/>
+          </p:cNvSpPr>
+          <p:nvPr>
+            <p:ph type="sldNum" sz="quarter" idx="5"/>
+          </p:nvPr>
+        </p:nvSpPr>
+        <p:spPr/>
+        <p:txBody>
+          <a:bodyPr/>
+          <a:lstStyle/>
+          <a:p>
+            <a:fld id="{362CD335-F0CB-D347-B8A5-7AB70F34C34F}" type="slidenum">
+              <a:rPr lang="en-US" smtClean="0"/>
+              <a:t>3</a:t>
+            </a:fld>
+            <a:endParaRPr lang="en-US"/>
+          </a:p>
+        </p:txBody>
+      </p:sp>
+    </p:spTree>
+    <p:extLst>
+      <p:ext uri="{BB962C8B-B14F-4D97-AF65-F5344CB8AC3E}">
+        <p14:creationId xmlns:p14="http://schemas.microsoft.com/office/powerpoint/2010/main" val="3545765030"/>
+      </p:ext>
+    </p:extLst>
+  </p:cSld>
+  <p:clrMapOvr>
+    <a:masterClrMapping/>
+  </p:clrMapOvr>
+</p:notes>
+</file>
+
+<file path=ppt/notesSlides/notesSlide4.xml><?xml version="1.0" encoding="utf-8"?>
+<p:notes xmlns:a="http://schemas.openxmlformats.org/drawingml/2006/main" xmlns:r="http://schemas.openxmlformats.org/officeDocument/2006/relationships" xmlns:p="http://schemas.openxmlformats.org/presentationml/2006/main">
+  <p:cSld>
+    <p:spTree>
+      <p:nvGrpSpPr>
+        <p:cNvPr id="1" name="">
+          <a:extLst>
+            <a:ext uri="{FF2B5EF4-FFF2-40B4-BE49-F238E27FC236}">
+              <a16:creationId xmlns:a16="http://schemas.microsoft.com/office/drawing/2014/main" id="{616C50D1-3DF5-A913-D62C-7D977212288D}"/>
+            </a:ext>
+          </a:extLst>
+        </p:cNvPr>
+        <p:cNvGrpSpPr/>
+        <p:nvPr/>
+      </p:nvGrpSpPr>
+      <p:grpSpPr>
+        <a:xfrm>
+          <a:off x="0" y="0"/>
+          <a:ext cx="0" cy="0"/>
+          <a:chOff x="0" y="0"/>
+          <a:chExt cx="0" cy="0"/>
+        </a:xfrm>
+      </p:grpSpPr>
+      <p:sp>
+        <p:nvSpPr>
+          <p:cNvPr id="2" name="Slide Image Placeholder 1">
+            <a:extLst>
+              <a:ext uri="{FF2B5EF4-FFF2-40B4-BE49-F238E27FC236}">
+                <a16:creationId xmlns:a16="http://schemas.microsoft.com/office/drawing/2014/main" id="{6D2E6735-6967-621B-AED7-733349EC4630}"/>
+              </a:ext>
+            </a:extLst>
+          </p:cNvPr>
+          <p:cNvSpPr>
+            <a:spLocks noGrp="1" noRot="1" noChangeAspect="1"/>
+          </p:cNvSpPr>
+          <p:nvPr>
+            <p:ph type="sldImg"/>
+          </p:nvPr>
+        </p:nvSpPr>
+        <p:spPr/>
+      </p:sp>
+      <p:sp>
+        <p:nvSpPr>
+          <p:cNvPr id="3" name="Notes Placeholder 2">
+            <a:extLst>
+              <a:ext uri="{FF2B5EF4-FFF2-40B4-BE49-F238E27FC236}">
+                <a16:creationId xmlns:a16="http://schemas.microsoft.com/office/drawing/2014/main" id="{37F34A64-A61A-2C38-F6DF-B93861A461C7}"/>
+              </a:ext>
+            </a:extLst>
+          </p:cNvPr>
+          <p:cNvSpPr>
+            <a:spLocks noGrp="1"/>
+          </p:cNvSpPr>
+          <p:nvPr>
+            <p:ph type="body" idx="1"/>
+          </p:nvPr>
+        </p:nvSpPr>
+        <p:spPr/>
+        <p:txBody>
+          <a:bodyPr/>
+          <a:lstStyle/>
+          <a:p>
+            <a:r>
+              <a:rPr lang="en-US" dirty="0"/>
+              <a:t>Housing </a:t>
+            </a:r>
+          </a:p>
+          <a:p>
+            <a:r>
+              <a:rPr lang="en-US" dirty="0"/>
+              <a:t>Career opportunities</a:t>
+            </a:r>
+          </a:p>
+          <a:p>
+            <a:r>
+              <a:rPr lang="en-US" dirty="0"/>
+              <a:t>healthcare</a:t>
+            </a:r>
+          </a:p>
+          <a:p>
+            <a:r>
+              <a:rPr lang="en-US" dirty="0"/>
+              <a:t>credit </a:t>
+            </a:r>
+          </a:p>
+          <a:p>
+            <a:r>
+              <a:rPr lang="en-US" dirty="0"/>
+              <a:t>education </a:t>
+            </a:r>
+          </a:p>
+          <a:p>
+            <a:r>
+              <a:rPr lang="en-US" dirty="0"/>
+              <a:t>legalities </a:t>
+            </a:r>
+          </a:p>
+          <a:p>
+            <a:r>
+              <a:rPr lang="en-US" dirty="0"/>
+              <a:t>police surveillance </a:t>
+            </a:r>
+          </a:p>
+          <a:p>
+            <a:endParaRPr lang="en-US" dirty="0"/>
+          </a:p>
+        </p:txBody>
+      </p:sp>
+      <p:sp>
+        <p:nvSpPr>
+          <p:cNvPr id="4" name="Slide Number Placeholder 3">
+            <a:extLst>
+              <a:ext uri="{FF2B5EF4-FFF2-40B4-BE49-F238E27FC236}">
+                <a16:creationId xmlns:a16="http://schemas.microsoft.com/office/drawing/2014/main" id="{DB8224B4-9CC3-4F2E-0198-81CB9868128E}"/>
+              </a:ext>
+            </a:extLst>
+          </p:cNvPr>
+          <p:cNvSpPr>
+            <a:spLocks noGrp="1"/>
+          </p:cNvSpPr>
+          <p:nvPr>
+            <p:ph type="sldNum" sz="quarter" idx="5"/>
+          </p:nvPr>
+        </p:nvSpPr>
+        <p:spPr/>
+        <p:txBody>
+          <a:bodyPr/>
+          <a:lstStyle/>
+          <a:p>
+            <a:fld id="{362CD335-F0CB-D347-B8A5-7AB70F34C34F}" type="slidenum">
+              <a:rPr lang="en-US" smtClean="0"/>
+              <a:t>4</a:t>
+            </a:fld>
+            <a:endParaRPr lang="en-US"/>
+          </a:p>
+        </p:txBody>
+      </p:sp>
+    </p:spTree>
+    <p:extLst>
+      <p:ext uri="{BB962C8B-B14F-4D97-AF65-F5344CB8AC3E}">
+        <p14:creationId xmlns:p14="http://schemas.microsoft.com/office/powerpoint/2010/main" val="2134722974"/>
+      </p:ext>
+    </p:extLst>
+  </p:cSld>
+  <p:clrMapOvr>
+    <a:masterClrMapping/>
+  </p:clrMapOvr>
+</p:notes>
+</file>
+
+<file path=ppt/notesSlides/notesSlide5.xml><?xml version="1.0" encoding="utf-8"?>
+<p:notes xmlns:a="http://schemas.openxmlformats.org/drawingml/2006/main" xmlns:r="http://schemas.openxmlformats.org/officeDocument/2006/relationships" xmlns:p="http://schemas.openxmlformats.org/presentationml/2006/main">
+  <p:cSld>
+    <p:spTree>
+      <p:nvGrpSpPr>
+        <p:cNvPr id="1" name="">
+          <a:extLst>
+            <a:ext uri="{FF2B5EF4-FFF2-40B4-BE49-F238E27FC236}">
+              <a16:creationId xmlns:a16="http://schemas.microsoft.com/office/drawing/2014/main" id="{22EE1E6A-D72B-0441-746A-599E5818A8C6}"/>
+            </a:ext>
+          </a:extLst>
+        </p:cNvPr>
+        <p:cNvGrpSpPr/>
+        <p:nvPr/>
+      </p:nvGrpSpPr>
+      <p:grpSpPr>
+        <a:xfrm>
+          <a:off x="0" y="0"/>
+          <a:ext cx="0" cy="0"/>
+          <a:chOff x="0" y="0"/>
+          <a:chExt cx="0" cy="0"/>
+        </a:xfrm>
+      </p:grpSpPr>
+      <p:sp>
+        <p:nvSpPr>
+          <p:cNvPr id="2" name="Slide Image Placeholder 1">
+            <a:extLst>
+              <a:ext uri="{FF2B5EF4-FFF2-40B4-BE49-F238E27FC236}">
+                <a16:creationId xmlns:a16="http://schemas.microsoft.com/office/drawing/2014/main" id="{78BEF2AE-FAD6-B3B8-0119-D3FD5797C7DC}"/>
+              </a:ext>
+            </a:extLst>
+          </p:cNvPr>
+          <p:cNvSpPr>
+            <a:spLocks noGrp="1" noRot="1" noChangeAspect="1"/>
+          </p:cNvSpPr>
+          <p:nvPr>
+            <p:ph type="sldImg"/>
+          </p:nvPr>
+        </p:nvSpPr>
+        <p:spPr/>
+      </p:sp>
+      <p:sp>
+        <p:nvSpPr>
+          <p:cNvPr id="3" name="Notes Placeholder 2">
+            <a:extLst>
+              <a:ext uri="{FF2B5EF4-FFF2-40B4-BE49-F238E27FC236}">
+                <a16:creationId xmlns:a16="http://schemas.microsoft.com/office/drawing/2014/main" id="{5E92CE7D-CCBE-5211-5326-AF9156EC362D}"/>
+              </a:ext>
+            </a:extLst>
+          </p:cNvPr>
+          <p:cNvSpPr>
+            <a:spLocks noGrp="1"/>
+          </p:cNvSpPr>
+          <p:nvPr>
+            <p:ph type="body" idx="1"/>
+          </p:nvPr>
+        </p:nvSpPr>
+        <p:spPr/>
+        <p:txBody>
+          <a:bodyPr/>
+          <a:lstStyle/>
+          <a:p>
+            <a:endParaRPr lang="en-US" dirty="0"/>
+          </a:p>
+        </p:txBody>
+      </p:sp>
+      <p:sp>
+        <p:nvSpPr>
+          <p:cNvPr id="4" name="Slide Number Placeholder 3">
+            <a:extLst>
+              <a:ext uri="{FF2B5EF4-FFF2-40B4-BE49-F238E27FC236}">
+                <a16:creationId xmlns:a16="http://schemas.microsoft.com/office/drawing/2014/main" id="{38733AE2-9453-1394-056B-FB1816BF0CC4}"/>
+              </a:ext>
+            </a:extLst>
+          </p:cNvPr>
+          <p:cNvSpPr>
+            <a:spLocks noGrp="1"/>
+          </p:cNvSpPr>
+          <p:nvPr>
+            <p:ph type="sldNum" sz="quarter" idx="5"/>
+          </p:nvPr>
+        </p:nvSpPr>
+        <p:spPr/>
+        <p:txBody>
+          <a:bodyPr/>
+          <a:lstStyle/>
+          <a:p>
+            <a:fld id="{362CD335-F0CB-D347-B8A5-7AB70F34C34F}" type="slidenum">
+              <a:rPr lang="en-US" smtClean="0"/>
+              <a:t>5</a:t>
+            </a:fld>
+            <a:endParaRPr lang="en-US"/>
+          </a:p>
+        </p:txBody>
+      </p:sp>
+    </p:spTree>
+    <p:extLst>
+      <p:ext uri="{BB962C8B-B14F-4D97-AF65-F5344CB8AC3E}">
+        <p14:creationId xmlns:p14="http://schemas.microsoft.com/office/powerpoint/2010/main" val="1967929224"/>
+      </p:ext>
+    </p:extLst>
+  </p:cSld>
+  <p:clrMapOvr>
+    <a:masterClrMapping/>
+  </p:clrMapOvr>
+</p:notes>
+</file>
+
+<file path=ppt/notesSlides/notesSlide6.xml><?xml version="1.0" encoding="utf-8"?>
+<p:notes xmlns:a="http://schemas.openxmlformats.org/drawingml/2006/main" xmlns:r="http://schemas.openxmlformats.org/officeDocument/2006/relationships" xmlns:p="http://schemas.openxmlformats.org/presentationml/2006/main">
+  <p:cSld>
+    <p:spTree>
+      <p:nvGrpSpPr>
+        <p:cNvPr id="1" name="">
+          <a:extLst>
+            <a:ext uri="{FF2B5EF4-FFF2-40B4-BE49-F238E27FC236}">
+              <a16:creationId xmlns:a16="http://schemas.microsoft.com/office/drawing/2014/main" id="{11878F07-EA9B-AD5A-BFE8-EE155E5BDA23}"/>
+            </a:ext>
+          </a:extLst>
+        </p:cNvPr>
+        <p:cNvGrpSpPr/>
+        <p:nvPr/>
+      </p:nvGrpSpPr>
+      <p:grpSpPr>
+        <a:xfrm>
+          <a:off x="0" y="0"/>
+          <a:ext cx="0" cy="0"/>
+          <a:chOff x="0" y="0"/>
+          <a:chExt cx="0" cy="0"/>
+        </a:xfrm>
+      </p:grpSpPr>
+      <p:sp>
+        <p:nvSpPr>
+          <p:cNvPr id="2" name="Slide Image Placeholder 1">
+            <a:extLst>
+              <a:ext uri="{FF2B5EF4-FFF2-40B4-BE49-F238E27FC236}">
+                <a16:creationId xmlns:a16="http://schemas.microsoft.com/office/drawing/2014/main" id="{31D7B123-3616-68CD-92FB-B10A83EF3099}"/>
+              </a:ext>
+            </a:extLst>
+          </p:cNvPr>
+          <p:cNvSpPr>
+            <a:spLocks noGrp="1" noRot="1" noChangeAspect="1"/>
+          </p:cNvSpPr>
+          <p:nvPr>
+            <p:ph type="sldImg"/>
+          </p:nvPr>
+        </p:nvSpPr>
+        <p:spPr/>
+      </p:sp>
+      <p:sp>
+        <p:nvSpPr>
+          <p:cNvPr id="3" name="Notes Placeholder 2">
+            <a:extLst>
+              <a:ext uri="{FF2B5EF4-FFF2-40B4-BE49-F238E27FC236}">
+                <a16:creationId xmlns:a16="http://schemas.microsoft.com/office/drawing/2014/main" id="{2FE85477-1DD2-7F28-4AEF-B5E0091DFE58}"/>
+              </a:ext>
+            </a:extLst>
+          </p:cNvPr>
+          <p:cNvSpPr>
+            <a:spLocks noGrp="1"/>
+          </p:cNvSpPr>
+          <p:nvPr>
+            <p:ph type="body" idx="1"/>
+          </p:nvPr>
+        </p:nvSpPr>
+        <p:spPr/>
+        <p:txBody>
+          <a:bodyPr/>
+          <a:lstStyle/>
+          <a:p>
+            <a:r>
+              <a:rPr lang="en-US" dirty="0"/>
+              <a:t>Increasing drastically as time passes </a:t>
+            </a:r>
+          </a:p>
+        </p:txBody>
+      </p:sp>
+      <p:sp>
+        <p:nvSpPr>
+          <p:cNvPr id="4" name="Slide Number Placeholder 3">
+            <a:extLst>
+              <a:ext uri="{FF2B5EF4-FFF2-40B4-BE49-F238E27FC236}">
+                <a16:creationId xmlns:a16="http://schemas.microsoft.com/office/drawing/2014/main" id="{6AE6DADB-93AF-5C78-B8D9-A977DD2EEE5B}"/>
+              </a:ext>
+            </a:extLst>
+          </p:cNvPr>
+          <p:cNvSpPr>
+            <a:spLocks noGrp="1"/>
+          </p:cNvSpPr>
+          <p:nvPr>
+            <p:ph type="sldNum" sz="quarter" idx="5"/>
+          </p:nvPr>
+        </p:nvSpPr>
+        <p:spPr/>
+        <p:txBody>
+          <a:bodyPr/>
+          <a:lstStyle/>
+          <a:p>
+            <a:fld id="{362CD335-F0CB-D347-B8A5-7AB70F34C34F}" type="slidenum">
+              <a:rPr lang="en-US" smtClean="0"/>
+              <a:t>6</a:t>
+            </a:fld>
+            <a:endParaRPr lang="en-US"/>
+          </a:p>
+        </p:txBody>
+      </p:sp>
+    </p:spTree>
+    <p:extLst>
+      <p:ext uri="{BB962C8B-B14F-4D97-AF65-F5344CB8AC3E}">
+        <p14:creationId xmlns:p14="http://schemas.microsoft.com/office/powerpoint/2010/main" val="3108381100"/>
+      </p:ext>
+    </p:extLst>
+  </p:cSld>
+  <p:clrMapOvr>
+    <a:masterClrMapping/>
+  </p:clrMapOvr>
+</p:notes>
+</file>
+
+<file path=ppt/notesSlides/notesSlide7.xml><?xml version="1.0" encoding="utf-8"?>
+<p:notes xmlns:a="http://schemas.openxmlformats.org/drawingml/2006/main" xmlns:r="http://schemas.openxmlformats.org/officeDocument/2006/relationships" xmlns:p="http://schemas.openxmlformats.org/presentationml/2006/main">
+  <p:cSld>
+    <p:spTree>
+      <p:nvGrpSpPr>
+        <p:cNvPr id="1" name="">
+          <a:extLst>
+            <a:ext uri="{FF2B5EF4-FFF2-40B4-BE49-F238E27FC236}">
+              <a16:creationId xmlns:a16="http://schemas.microsoft.com/office/drawing/2014/main" id="{89C8F378-6AAC-D8CD-02D3-D44FEFB40EF3}"/>
+            </a:ext>
+          </a:extLst>
+        </p:cNvPr>
+        <p:cNvGrpSpPr/>
+        <p:nvPr/>
+      </p:nvGrpSpPr>
+      <p:grpSpPr>
+        <a:xfrm>
+          <a:off x="0" y="0"/>
+          <a:ext cx="0" cy="0"/>
+          <a:chOff x="0" y="0"/>
+          <a:chExt cx="0" cy="0"/>
+        </a:xfrm>
+      </p:grpSpPr>
+      <p:sp>
+        <p:nvSpPr>
+          <p:cNvPr id="2" name="Slide Image Placeholder 1">
+            <a:extLst>
+              <a:ext uri="{FF2B5EF4-FFF2-40B4-BE49-F238E27FC236}">
+                <a16:creationId xmlns:a16="http://schemas.microsoft.com/office/drawing/2014/main" id="{6AAA523B-E528-D297-6D8A-31EED3100C0F}"/>
+              </a:ext>
+            </a:extLst>
+          </p:cNvPr>
+          <p:cNvSpPr>
+            <a:spLocks noGrp="1" noRot="1" noChangeAspect="1"/>
+          </p:cNvSpPr>
+          <p:nvPr>
+            <p:ph type="sldImg"/>
+          </p:nvPr>
+        </p:nvSpPr>
+        <p:spPr/>
+      </p:sp>
+      <p:sp>
+        <p:nvSpPr>
+          <p:cNvPr id="3" name="Notes Placeholder 2">
+            <a:extLst>
+              <a:ext uri="{FF2B5EF4-FFF2-40B4-BE49-F238E27FC236}">
+                <a16:creationId xmlns:a16="http://schemas.microsoft.com/office/drawing/2014/main" id="{F0D7CB17-DBFA-0A9E-161D-3E0CFCD83229}"/>
+              </a:ext>
+            </a:extLst>
+          </p:cNvPr>
+          <p:cNvSpPr>
+            <a:spLocks noGrp="1"/>
+          </p:cNvSpPr>
+          <p:nvPr>
+            <p:ph type="body" idx="1"/>
+          </p:nvPr>
+        </p:nvSpPr>
+        <p:spPr/>
+        <p:txBody>
+          <a:bodyPr/>
+          <a:lstStyle/>
+          <a:p>
+            <a:r>
+              <a:rPr lang="en-US" dirty="0"/>
+              <a:t>The red boxes present a typical AI pipeline with four trust components in green. Lastly, the vivid yellow nodes refer to the research objectives (O1–O4) associated with the related results</a:t>
+            </a:r>
+          </a:p>
+        </p:txBody>
+      </p:sp>
+      <p:sp>
+        <p:nvSpPr>
+          <p:cNvPr id="4" name="Slide Number Placeholder 3">
+            <a:extLst>
+              <a:ext uri="{FF2B5EF4-FFF2-40B4-BE49-F238E27FC236}">
+                <a16:creationId xmlns:a16="http://schemas.microsoft.com/office/drawing/2014/main" id="{02CDCD0A-6DCB-8472-7977-CF2A2B4006EB}"/>
+              </a:ext>
+            </a:extLst>
+          </p:cNvPr>
+          <p:cNvSpPr>
+            <a:spLocks noGrp="1"/>
+          </p:cNvSpPr>
+          <p:nvPr>
+            <p:ph type="sldNum" sz="quarter" idx="5"/>
+          </p:nvPr>
+        </p:nvSpPr>
+        <p:spPr/>
+        <p:txBody>
+          <a:bodyPr/>
+          <a:lstStyle/>
+          <a:p>
+            <a:fld id="{362CD335-F0CB-D347-B8A5-7AB70F34C34F}" type="slidenum">
+              <a:rPr lang="en-US" smtClean="0"/>
+              <a:t>7</a:t>
+            </a:fld>
+            <a:endParaRPr lang="en-US"/>
+          </a:p>
+        </p:txBody>
+      </p:sp>
+    </p:spTree>
+    <p:extLst>
+      <p:ext uri="{BB962C8B-B14F-4D97-AF65-F5344CB8AC3E}">
+        <p14:creationId xmlns:p14="http://schemas.microsoft.com/office/powerpoint/2010/main" val="2298121987"/>
+      </p:ext>
+    </p:extLst>
+  </p:cSld>
+  <p:clrMapOvr>
+    <a:masterClrMapping/>
+  </p:clrMapOvr>
+</p:notes>
+</file>
+
+<file path=ppt/notesSlides/notesSlide8.xml><?xml version="1.0" encoding="utf-8"?>
+<p:notes xmlns:a="http://schemas.openxmlformats.org/drawingml/2006/main" xmlns:r="http://schemas.openxmlformats.org/officeDocument/2006/relationships" xmlns:p="http://schemas.openxmlformats.org/presentationml/2006/main">
+  <p:cSld>
+    <p:spTree>
+      <p:nvGrpSpPr>
+        <p:cNvPr id="1" name="">
+          <a:extLst>
+            <a:ext uri="{FF2B5EF4-FFF2-40B4-BE49-F238E27FC236}">
+              <a16:creationId xmlns:a16="http://schemas.microsoft.com/office/drawing/2014/main" id="{C78EAB64-AFB3-B1FC-2E18-F79D192D3597}"/>
+            </a:ext>
+          </a:extLst>
+        </p:cNvPr>
+        <p:cNvGrpSpPr/>
+        <p:nvPr/>
+      </p:nvGrpSpPr>
+      <p:grpSpPr>
+        <a:xfrm>
+          <a:off x="0" y="0"/>
+          <a:ext cx="0" cy="0"/>
+          <a:chOff x="0" y="0"/>
+          <a:chExt cx="0" cy="0"/>
+        </a:xfrm>
+      </p:grpSpPr>
+      <p:sp>
+        <p:nvSpPr>
+          <p:cNvPr id="2" name="Slide Image Placeholder 1">
+            <a:extLst>
+              <a:ext uri="{FF2B5EF4-FFF2-40B4-BE49-F238E27FC236}">
+                <a16:creationId xmlns:a16="http://schemas.microsoft.com/office/drawing/2014/main" id="{46D881DA-8241-5C1B-E65F-E47A0EE9A237}"/>
+              </a:ext>
+            </a:extLst>
+          </p:cNvPr>
+          <p:cNvSpPr>
+            <a:spLocks noGrp="1" noRot="1" noChangeAspect="1"/>
+          </p:cNvSpPr>
+          <p:nvPr>
+            <p:ph type="sldImg"/>
+          </p:nvPr>
+        </p:nvSpPr>
+        <p:spPr/>
+      </p:sp>
+      <p:sp>
+        <p:nvSpPr>
+          <p:cNvPr id="3" name="Notes Placeholder 2">
+            <a:extLst>
+              <a:ext uri="{FF2B5EF4-FFF2-40B4-BE49-F238E27FC236}">
+                <a16:creationId xmlns:a16="http://schemas.microsoft.com/office/drawing/2014/main" id="{F94C1A85-4DB6-D8B5-1513-35DE28F34506}"/>
+              </a:ext>
+            </a:extLst>
+          </p:cNvPr>
+          <p:cNvSpPr>
+            <a:spLocks noGrp="1"/>
+          </p:cNvSpPr>
+          <p:nvPr>
+            <p:ph type="body" idx="1"/>
+          </p:nvPr>
+        </p:nvSpPr>
+        <p:spPr/>
+        <p:txBody>
+          <a:bodyPr/>
+          <a:lstStyle/>
+          <a:p>
+            <a:r>
+              <a:rPr lang="en-US" dirty="0"/>
+              <a:t>HardVis12 is a VA dashboard designed to address instance hardness by employing highly configurable </a:t>
+            </a:r>
+            <a:r>
+              <a:rPr lang="en-US" dirty="0" err="1"/>
+              <a:t>undersampling</a:t>
+            </a:r>
+            <a:r>
+              <a:rPr lang="en-US" dirty="0"/>
+              <a:t> and oversampling methods [cf., Figure 3(1)]. The dashboard provides multiple coordinated views, enabling users to determine the optimal distribution of data types iteratively, selectively remove safe-to-discard samples, and interactively oversample others as needed. It also supports the analysis of algorithmic recommendations by using diverse visual cues to validate the safety of proposed removals or additions. This VA approach makes the entire process transparent by being effective in tackling instance hardness and class imbalance problems</a:t>
+            </a:r>
+          </a:p>
+        </p:txBody>
+      </p:sp>
+      <p:sp>
+        <p:nvSpPr>
+          <p:cNvPr id="4" name="Slide Number Placeholder 3">
+            <a:extLst>
+              <a:ext uri="{FF2B5EF4-FFF2-40B4-BE49-F238E27FC236}">
+                <a16:creationId xmlns:a16="http://schemas.microsoft.com/office/drawing/2014/main" id="{D9616D30-3019-69AB-9155-50CC54E87C91}"/>
+              </a:ext>
+            </a:extLst>
+          </p:cNvPr>
+          <p:cNvSpPr>
+            <a:spLocks noGrp="1"/>
+          </p:cNvSpPr>
+          <p:nvPr>
+            <p:ph type="sldNum" sz="quarter" idx="5"/>
+          </p:nvPr>
+        </p:nvSpPr>
+        <p:spPr/>
+        <p:txBody>
+          <a:bodyPr/>
+          <a:lstStyle/>
+          <a:p>
+            <a:fld id="{362CD335-F0CB-D347-B8A5-7AB70F34C34F}" type="slidenum">
+              <a:rPr lang="en-US" smtClean="0"/>
+              <a:t>8</a:t>
+            </a:fld>
+            <a:endParaRPr lang="en-US"/>
+          </a:p>
+        </p:txBody>
+      </p:sp>
+    </p:spTree>
+    <p:extLst>
+      <p:ext uri="{BB962C8B-B14F-4D97-AF65-F5344CB8AC3E}">
+        <p14:creationId xmlns:p14="http://schemas.microsoft.com/office/powerpoint/2010/main" val="2690455875"/>
+      </p:ext>
+    </p:extLst>
+  </p:cSld>
+  <p:clrMapOvr>
+    <a:masterClrMapping/>
+  </p:clrMapOvr>
+</p:notes>
+</file>
+
+<file path=ppt/notesSlides/notesSlide9.xml><?xml version="1.0" encoding="utf-8"?>
+<p:notes xmlns:a="http://schemas.openxmlformats.org/drawingml/2006/main" xmlns:r="http://schemas.openxmlformats.org/officeDocument/2006/relationships" xmlns:p="http://schemas.openxmlformats.org/presentationml/2006/main">
+  <p:cSld>
+    <p:spTree>
+      <p:nvGrpSpPr>
+        <p:cNvPr id="1" name="">
+          <a:extLst>
+            <a:ext uri="{FF2B5EF4-FFF2-40B4-BE49-F238E27FC236}">
+              <a16:creationId xmlns:a16="http://schemas.microsoft.com/office/drawing/2014/main" id="{ADC89FE4-0FC6-5E0C-68A5-9179F4813119}"/>
+            </a:ext>
+          </a:extLst>
+        </p:cNvPr>
+        <p:cNvGrpSpPr/>
+        <p:nvPr/>
+      </p:nvGrpSpPr>
+      <p:grpSpPr>
+        <a:xfrm>
+          <a:off x="0" y="0"/>
+          <a:ext cx="0" cy="0"/>
+          <a:chOff x="0" y="0"/>
+          <a:chExt cx="0" cy="0"/>
+        </a:xfrm>
+      </p:grpSpPr>
+      <p:sp>
+        <p:nvSpPr>
+          <p:cNvPr id="2" name="Slide Image Placeholder 1">
+            <a:extLst>
+              <a:ext uri="{FF2B5EF4-FFF2-40B4-BE49-F238E27FC236}">
+                <a16:creationId xmlns:a16="http://schemas.microsoft.com/office/drawing/2014/main" id="{2AF5EEB7-4AE2-4AD1-99E0-6587B897CE98}"/>
+              </a:ext>
+            </a:extLst>
+          </p:cNvPr>
+          <p:cNvSpPr>
+            <a:spLocks noGrp="1" noRot="1" noChangeAspect="1"/>
+          </p:cNvSpPr>
+          <p:nvPr>
+            <p:ph type="sldImg"/>
+          </p:nvPr>
+        </p:nvSpPr>
+        <p:spPr/>
+      </p:sp>
+      <p:sp>
+        <p:nvSpPr>
+          <p:cNvPr id="3" name="Notes Placeholder 2">
+            <a:extLst>
+              <a:ext uri="{FF2B5EF4-FFF2-40B4-BE49-F238E27FC236}">
+                <a16:creationId xmlns:a16="http://schemas.microsoft.com/office/drawing/2014/main" id="{1F9E2134-3D04-B831-DFDF-6C60430F9F79}"/>
+              </a:ext>
+            </a:extLst>
+          </p:cNvPr>
+          <p:cNvSpPr>
+            <a:spLocks noGrp="1"/>
+          </p:cNvSpPr>
+          <p:nvPr>
+            <p:ph type="body" idx="1"/>
+          </p:nvPr>
+        </p:nvSpPr>
+        <p:spPr/>
+        <p:txBody>
+          <a:bodyPr/>
+          <a:lstStyle/>
+          <a:p>
+            <a:r>
+              <a:rPr lang="en-US" dirty="0"/>
+              <a:t>FeatureEnVi13 is a VA dashboard designed to support users in engineering features through stepwise feature selection and semiautomatic feature extraction methods [cf., Figure 3(2)]. The dashboard employs multiple coordinated views to assist users in selecting, transforming, and creating new features as part of a highly iterative workflow. By examining the impact of features using various statistical metrics and automated feature selection techniques, users can enhance predictive performance, minimize computational resource requirements, and shorten training time. This VA approach increases adaptability and transparency by improving the feature engineering process.</a:t>
+            </a:r>
+          </a:p>
+        </p:txBody>
+      </p:sp>
+      <p:sp>
+        <p:nvSpPr>
+          <p:cNvPr id="4" name="Slide Number Placeholder 3">
+            <a:extLst>
+              <a:ext uri="{FF2B5EF4-FFF2-40B4-BE49-F238E27FC236}">
+                <a16:creationId xmlns:a16="http://schemas.microsoft.com/office/drawing/2014/main" id="{EAACF4DE-6502-AF1E-8328-961BAAFDAFF6}"/>
+              </a:ext>
+            </a:extLst>
+          </p:cNvPr>
+          <p:cNvSpPr>
+            <a:spLocks noGrp="1"/>
+          </p:cNvSpPr>
+          <p:nvPr>
+            <p:ph type="sldNum" sz="quarter" idx="5"/>
+          </p:nvPr>
+        </p:nvSpPr>
+        <p:spPr/>
+        <p:txBody>
+          <a:bodyPr/>
+          <a:lstStyle/>
+          <a:p>
+            <a:fld id="{362CD335-F0CB-D347-B8A5-7AB70F34C34F}" type="slidenum">
+              <a:rPr lang="en-US" smtClean="0"/>
+              <a:t>9</a:t>
+            </a:fld>
+            <a:endParaRPr lang="en-US"/>
+          </a:p>
+        </p:txBody>
+      </p:sp>
+    </p:spTree>
+    <p:extLst>
+      <p:ext uri="{BB962C8B-B14F-4D97-AF65-F5344CB8AC3E}">
+        <p14:creationId xmlns:p14="http://schemas.microsoft.com/office/powerpoint/2010/main" val="1348997184"/>
       </p:ext>
     </p:extLst>
   </p:cSld>
@@ -886,7 +2421,7 @@
             <a:fld id="{B61BEF0D-F0BB-DE4B-95CE-6DB70DBA9567}" type="datetimeFigureOut">
               <a:rPr lang="en-US" smtClean="0"/>
               <a:pPr/>
-              <a:t>2/25/26</a:t>
+              <a:t>2/26/26</a:t>
             </a:fld>
             <a:endParaRPr lang="en-US" dirty="0"/>
           </a:p>
@@ -1150,7 +2685,7 @@
             <a:fld id="{B61BEF0D-F0BB-DE4B-95CE-6DB70DBA9567}" type="datetimeFigureOut">
               <a:rPr lang="en-US" smtClean="0"/>
               <a:pPr/>
-              <a:t>2/25/26</a:t>
+              <a:t>2/26/26</a:t>
             </a:fld>
             <a:endParaRPr lang="en-US" dirty="0"/>
           </a:p>
@@ -1387,7 +2922,7 @@
             <a:fld id="{B61BEF0D-F0BB-DE4B-95CE-6DB70DBA9567}" type="datetimeFigureOut">
               <a:rPr lang="en-US" smtClean="0"/>
               <a:pPr/>
-              <a:t>2/25/26</a:t>
+              <a:t>2/26/26</a:t>
             </a:fld>
             <a:endParaRPr lang="en-US" dirty="0"/>
           </a:p>
@@ -1636,7 +3171,7 @@
             <a:fld id="{B61BEF0D-F0BB-DE4B-95CE-6DB70DBA9567}" type="datetimeFigureOut">
               <a:rPr lang="en-US" smtClean="0"/>
               <a:pPr/>
-              <a:t>2/25/26</a:t>
+              <a:t>2/26/26</a:t>
             </a:fld>
             <a:endParaRPr lang="en-US" dirty="0"/>
           </a:p>
@@ -1945,7 +3480,7 @@
             <a:fld id="{B61BEF0D-F0BB-DE4B-95CE-6DB70DBA9567}" type="datetimeFigureOut">
               <a:rPr lang="en-US" smtClean="0"/>
               <a:pPr/>
-              <a:t>2/25/26</a:t>
+              <a:t>2/26/26</a:t>
             </a:fld>
             <a:endParaRPr lang="en-US" dirty="0"/>
           </a:p>
@@ -2256,7 +3791,7 @@
             <a:fld id="{B61BEF0D-F0BB-DE4B-95CE-6DB70DBA9567}" type="datetimeFigureOut">
               <a:rPr lang="en-US" smtClean="0"/>
               <a:pPr/>
-              <a:t>2/25/26</a:t>
+              <a:t>2/26/26</a:t>
             </a:fld>
             <a:endParaRPr lang="en-US" dirty="0"/>
           </a:p>
@@ -2680,7 +4215,7 @@
             <a:fld id="{B61BEF0D-F0BB-DE4B-95CE-6DB70DBA9567}" type="datetimeFigureOut">
               <a:rPr lang="en-US" smtClean="0"/>
               <a:pPr/>
-              <a:t>2/25/26</a:t>
+              <a:t>2/26/26</a:t>
             </a:fld>
             <a:endParaRPr lang="en-US" dirty="0"/>
           </a:p>
@@ -2777,7 +4312,7 @@
             <a:fld id="{B61BEF0D-F0BB-DE4B-95CE-6DB70DBA9567}" type="datetimeFigureOut">
               <a:rPr lang="en-US" smtClean="0"/>
               <a:pPr/>
-              <a:t>2/25/26</a:t>
+              <a:t>2/26/26</a:t>
             </a:fld>
             <a:endParaRPr lang="en-US" dirty="0"/>
           </a:p>
@@ -2941,7 +4476,7 @@
             <a:fld id="{B61BEF0D-F0BB-DE4B-95CE-6DB70DBA9567}" type="datetimeFigureOut">
               <a:rPr lang="en-US" smtClean="0"/>
               <a:pPr/>
-              <a:t>2/25/26</a:t>
+              <a:t>2/26/26</a:t>
             </a:fld>
             <a:endParaRPr lang="en-US" dirty="0"/>
           </a:p>
@@ -3321,7 +4856,7 @@
             <a:fld id="{B61BEF0D-F0BB-DE4B-95CE-6DB70DBA9567}" type="datetimeFigureOut">
               <a:rPr lang="en-US" smtClean="0"/>
               <a:pPr/>
-              <a:t>2/25/26</a:t>
+              <a:t>2/26/26</a:t>
             </a:fld>
             <a:endParaRPr lang="en-US" dirty="0"/>
           </a:p>
@@ -3612,7 +5147,7 @@
             <a:fld id="{B61BEF0D-F0BB-DE4B-95CE-6DB70DBA9567}" type="datetimeFigureOut">
               <a:rPr lang="en-US" smtClean="0"/>
               <a:pPr/>
-              <a:t>2/25/26</a:t>
+              <a:t>2/26/26</a:t>
             </a:fld>
             <a:endParaRPr lang="en-US" dirty="0"/>
           </a:p>
@@ -3825,7 +5360,7 @@
             <a:fld id="{B61BEF0D-F0BB-DE4B-95CE-6DB70DBA9567}" type="datetimeFigureOut">
               <a:rPr lang="en-US" smtClean="0"/>
               <a:pPr/>
-              <a:t>2/25/26</a:t>
+              <a:t>2/26/26</a:t>
             </a:fld>
             <a:endParaRPr lang="en-US" dirty="0"/>
           </a:p>
@@ -4519,6 +6054,1197 @@
 </p:sld>
 </file>
 
+<file path=ppt/slides/slide10.xml><?xml version="1.0" encoding="utf-8"?>
+<p:sld xmlns:a="http://schemas.openxmlformats.org/drawingml/2006/main" xmlns:r="http://schemas.openxmlformats.org/officeDocument/2006/relationships" xmlns:p="http://schemas.openxmlformats.org/presentationml/2006/main">
+  <p:cSld>
+    <p:spTree>
+      <p:nvGrpSpPr>
+        <p:cNvPr id="1" name="">
+          <a:extLst>
+            <a:ext uri="{FF2B5EF4-FFF2-40B4-BE49-F238E27FC236}">
+              <a16:creationId xmlns:a16="http://schemas.microsoft.com/office/drawing/2014/main" id="{DC0EC366-0E63-0226-90F6-7AB9F4E291E2}"/>
+            </a:ext>
+          </a:extLst>
+        </p:cNvPr>
+        <p:cNvGrpSpPr/>
+        <p:nvPr/>
+      </p:nvGrpSpPr>
+      <p:grpSpPr>
+        <a:xfrm>
+          <a:off x="0" y="0"/>
+          <a:ext cx="0" cy="0"/>
+          <a:chOff x="0" y="0"/>
+          <a:chExt cx="0" cy="0"/>
+        </a:xfrm>
+      </p:grpSpPr>
+      <p:sp>
+        <p:nvSpPr>
+          <p:cNvPr id="2" name="Title 1">
+            <a:extLst>
+              <a:ext uri="{FF2B5EF4-FFF2-40B4-BE49-F238E27FC236}">
+                <a16:creationId xmlns:a16="http://schemas.microsoft.com/office/drawing/2014/main" id="{91CFAFF6-9471-259A-C9E2-199EB796D16D}"/>
+              </a:ext>
+            </a:extLst>
+          </p:cNvPr>
+          <p:cNvSpPr>
+            <a:spLocks noGrp="1"/>
+          </p:cNvSpPr>
+          <p:nvPr>
+            <p:ph type="title"/>
+          </p:nvPr>
+        </p:nvSpPr>
+        <p:spPr/>
+        <p:txBody>
+          <a:bodyPr/>
+          <a:lstStyle/>
+          <a:p>
+            <a:r>
+              <a:rPr lang="en-US" dirty="0" err="1"/>
+              <a:t>xai</a:t>
+            </a:r>
+            <a:r>
+              <a:rPr lang="en-US" dirty="0"/>
+              <a:t> and Visualization: hyperparameter tuning </a:t>
+            </a:r>
+          </a:p>
+        </p:txBody>
+      </p:sp>
+      <p:sp>
+        <p:nvSpPr>
+          <p:cNvPr id="8" name="TextBox 7">
+            <a:extLst>
+              <a:ext uri="{FF2B5EF4-FFF2-40B4-BE49-F238E27FC236}">
+                <a16:creationId xmlns:a16="http://schemas.microsoft.com/office/drawing/2014/main" id="{668BF00C-D5A3-BC34-1DB1-39C41D76FAEB}"/>
+              </a:ext>
+            </a:extLst>
+          </p:cNvPr>
+          <p:cNvSpPr txBox="1"/>
+          <p:nvPr/>
+        </p:nvSpPr>
+        <p:spPr>
+          <a:xfrm>
+            <a:off x="6248400" y="6155844"/>
+            <a:ext cx="6294120" cy="584775"/>
+          </a:xfrm>
+          <a:prstGeom prst="rect">
+            <a:avLst/>
+          </a:prstGeom>
+          <a:noFill/>
+        </p:spPr>
+        <p:txBody>
+          <a:bodyPr wrap="square">
+            <a:spAutoFit/>
+          </a:bodyPr>
+          <a:lstStyle/>
+          <a:p>
+            <a:r>
+              <a:rPr lang="en-US" sz="1600" b="0" i="0" dirty="0">
+                <a:solidFill>
+                  <a:srgbClr val="333333"/>
+                </a:solidFill>
+                <a:effectLst/>
+                <a:latin typeface="+mj-lt"/>
+              </a:rPr>
+              <a:t>A. </a:t>
+            </a:r>
+            <a:r>
+              <a:rPr lang="en-US" sz="1600" b="0" i="0" dirty="0" err="1">
+                <a:solidFill>
+                  <a:srgbClr val="333333"/>
+                </a:solidFill>
+                <a:effectLst/>
+                <a:latin typeface="+mj-lt"/>
+              </a:rPr>
+              <a:t>Chatzimparmpas</a:t>
+            </a:r>
+            <a:r>
+              <a:rPr lang="en-US" sz="1600" b="0" i="0" dirty="0">
+                <a:solidFill>
+                  <a:srgbClr val="333333"/>
+                </a:solidFill>
+                <a:effectLst/>
+                <a:latin typeface="+mj-lt"/>
+              </a:rPr>
+              <a:t>, "Visual Analytics for Explainable and Trustworthy Artificial Intelligence,” 2025, </a:t>
+            </a:r>
+            <a:r>
+              <a:rPr lang="en-US" sz="1600" b="0" i="0" dirty="0" err="1">
+                <a:solidFill>
+                  <a:srgbClr val="333333"/>
+                </a:solidFill>
+                <a:effectLst/>
+                <a:latin typeface="+mj-lt"/>
+              </a:rPr>
+              <a:t>doi</a:t>
+            </a:r>
+            <a:r>
+              <a:rPr lang="en-US" sz="1600" b="0" i="0" dirty="0">
+                <a:solidFill>
+                  <a:srgbClr val="333333"/>
+                </a:solidFill>
+                <a:effectLst/>
+                <a:latin typeface="+mj-lt"/>
+              </a:rPr>
+              <a:t>: 10.1109/MCG.2025.3533806</a:t>
+            </a:r>
+            <a:r>
+              <a:rPr lang="en-US" sz="1600" dirty="0">
+                <a:solidFill>
+                  <a:srgbClr val="333333"/>
+                </a:solidFill>
+                <a:latin typeface="+mj-lt"/>
+              </a:rPr>
+              <a:t> </a:t>
+            </a:r>
+            <a:endParaRPr lang="en-US" sz="1600" dirty="0">
+              <a:latin typeface="+mj-lt"/>
+            </a:endParaRPr>
+          </a:p>
+        </p:txBody>
+      </p:sp>
+      <p:sp>
+        <p:nvSpPr>
+          <p:cNvPr id="4" name="Content Placeholder 3">
+            <a:extLst>
+              <a:ext uri="{FF2B5EF4-FFF2-40B4-BE49-F238E27FC236}">
+                <a16:creationId xmlns:a16="http://schemas.microsoft.com/office/drawing/2014/main" id="{8EA5B275-9013-B931-6245-000025B81A5D}"/>
+              </a:ext>
+            </a:extLst>
+          </p:cNvPr>
+          <p:cNvSpPr>
+            <a:spLocks noGrp="1"/>
+          </p:cNvSpPr>
+          <p:nvPr>
+            <p:ph idx="1"/>
+          </p:nvPr>
+        </p:nvSpPr>
+        <p:spPr/>
+        <p:txBody>
+          <a:bodyPr/>
+          <a:lstStyle/>
+          <a:p>
+            <a:r>
+              <a:rPr lang="en-US" dirty="0"/>
+              <a:t>VisEvol14</a:t>
+            </a:r>
+          </a:p>
+        </p:txBody>
+      </p:sp>
+    </p:spTree>
+    <p:extLst>
+      <p:ext uri="{BB962C8B-B14F-4D97-AF65-F5344CB8AC3E}">
+        <p14:creationId xmlns:p14="http://schemas.microsoft.com/office/powerpoint/2010/main" val="67198111"/>
+      </p:ext>
+    </p:extLst>
+  </p:cSld>
+  <p:clrMapOvr>
+    <a:masterClrMapping/>
+  </p:clrMapOvr>
+</p:sld>
+</file>
+
+<file path=ppt/slides/slide11.xml><?xml version="1.0" encoding="utf-8"?>
+<p:sld xmlns:a="http://schemas.openxmlformats.org/drawingml/2006/main" xmlns:r="http://schemas.openxmlformats.org/officeDocument/2006/relationships" xmlns:p="http://schemas.openxmlformats.org/presentationml/2006/main">
+  <p:cSld>
+    <p:spTree>
+      <p:nvGrpSpPr>
+        <p:cNvPr id="1" name="">
+          <a:extLst>
+            <a:ext uri="{FF2B5EF4-FFF2-40B4-BE49-F238E27FC236}">
+              <a16:creationId xmlns:a16="http://schemas.microsoft.com/office/drawing/2014/main" id="{09844DFF-AAC7-17B8-9165-1B91858B5CDA}"/>
+            </a:ext>
+          </a:extLst>
+        </p:cNvPr>
+        <p:cNvGrpSpPr/>
+        <p:nvPr/>
+      </p:nvGrpSpPr>
+      <p:grpSpPr>
+        <a:xfrm>
+          <a:off x="0" y="0"/>
+          <a:ext cx="0" cy="0"/>
+          <a:chOff x="0" y="0"/>
+          <a:chExt cx="0" cy="0"/>
+        </a:xfrm>
+      </p:grpSpPr>
+      <p:sp>
+        <p:nvSpPr>
+          <p:cNvPr id="2" name="Title 1">
+            <a:extLst>
+              <a:ext uri="{FF2B5EF4-FFF2-40B4-BE49-F238E27FC236}">
+                <a16:creationId xmlns:a16="http://schemas.microsoft.com/office/drawing/2014/main" id="{C8A0C865-9280-14E3-BE28-760D884F9860}"/>
+              </a:ext>
+            </a:extLst>
+          </p:cNvPr>
+          <p:cNvSpPr>
+            <a:spLocks noGrp="1"/>
+          </p:cNvSpPr>
+          <p:nvPr>
+            <p:ph type="title"/>
+          </p:nvPr>
+        </p:nvSpPr>
+        <p:spPr/>
+        <p:txBody>
+          <a:bodyPr/>
+          <a:lstStyle/>
+          <a:p>
+            <a:r>
+              <a:rPr lang="en-US" dirty="0" err="1"/>
+              <a:t>xai</a:t>
+            </a:r>
+            <a:r>
+              <a:rPr lang="en-US" dirty="0"/>
+              <a:t> and Visualization: model understanding</a:t>
+            </a:r>
+          </a:p>
+        </p:txBody>
+      </p:sp>
+      <p:sp>
+        <p:nvSpPr>
+          <p:cNvPr id="8" name="TextBox 7">
+            <a:extLst>
+              <a:ext uri="{FF2B5EF4-FFF2-40B4-BE49-F238E27FC236}">
+                <a16:creationId xmlns:a16="http://schemas.microsoft.com/office/drawing/2014/main" id="{CFD54D96-0173-081A-6A7C-10166FBF235D}"/>
+              </a:ext>
+            </a:extLst>
+          </p:cNvPr>
+          <p:cNvSpPr txBox="1"/>
+          <p:nvPr/>
+        </p:nvSpPr>
+        <p:spPr>
+          <a:xfrm>
+            <a:off x="6248400" y="6155844"/>
+            <a:ext cx="6294120" cy="584775"/>
+          </a:xfrm>
+          <a:prstGeom prst="rect">
+            <a:avLst/>
+          </a:prstGeom>
+          <a:noFill/>
+        </p:spPr>
+        <p:txBody>
+          <a:bodyPr wrap="square">
+            <a:spAutoFit/>
+          </a:bodyPr>
+          <a:lstStyle/>
+          <a:p>
+            <a:r>
+              <a:rPr lang="en-US" sz="1600" b="0" i="0" dirty="0">
+                <a:solidFill>
+                  <a:srgbClr val="333333"/>
+                </a:solidFill>
+                <a:effectLst/>
+                <a:latin typeface="+mj-lt"/>
+              </a:rPr>
+              <a:t>A. </a:t>
+            </a:r>
+            <a:r>
+              <a:rPr lang="en-US" sz="1600" b="0" i="0" dirty="0" err="1">
+                <a:solidFill>
+                  <a:srgbClr val="333333"/>
+                </a:solidFill>
+                <a:effectLst/>
+                <a:latin typeface="+mj-lt"/>
+              </a:rPr>
+              <a:t>Chatzimparmpas</a:t>
+            </a:r>
+            <a:r>
+              <a:rPr lang="en-US" sz="1600" b="0" i="0" dirty="0">
+                <a:solidFill>
+                  <a:srgbClr val="333333"/>
+                </a:solidFill>
+                <a:effectLst/>
+                <a:latin typeface="+mj-lt"/>
+              </a:rPr>
+              <a:t>, "Visual Analytics for Explainable and Trustworthy Artificial Intelligence,” 2025, </a:t>
+            </a:r>
+            <a:r>
+              <a:rPr lang="en-US" sz="1600" b="0" i="0" dirty="0" err="1">
+                <a:solidFill>
+                  <a:srgbClr val="333333"/>
+                </a:solidFill>
+                <a:effectLst/>
+                <a:latin typeface="+mj-lt"/>
+              </a:rPr>
+              <a:t>doi</a:t>
+            </a:r>
+            <a:r>
+              <a:rPr lang="en-US" sz="1600" b="0" i="0" dirty="0">
+                <a:solidFill>
+                  <a:srgbClr val="333333"/>
+                </a:solidFill>
+                <a:effectLst/>
+                <a:latin typeface="+mj-lt"/>
+              </a:rPr>
+              <a:t>: 10.1109/MCG.2025.3533806</a:t>
+            </a:r>
+            <a:r>
+              <a:rPr lang="en-US" sz="1600" dirty="0">
+                <a:solidFill>
+                  <a:srgbClr val="333333"/>
+                </a:solidFill>
+                <a:latin typeface="+mj-lt"/>
+              </a:rPr>
+              <a:t> </a:t>
+            </a:r>
+            <a:endParaRPr lang="en-US" sz="1600" dirty="0">
+              <a:latin typeface="+mj-lt"/>
+            </a:endParaRPr>
+          </a:p>
+        </p:txBody>
+      </p:sp>
+      <p:sp>
+        <p:nvSpPr>
+          <p:cNvPr id="4" name="Content Placeholder 3">
+            <a:extLst>
+              <a:ext uri="{FF2B5EF4-FFF2-40B4-BE49-F238E27FC236}">
+                <a16:creationId xmlns:a16="http://schemas.microsoft.com/office/drawing/2014/main" id="{A1215712-F255-3CC2-AD30-5953E436D8BE}"/>
+              </a:ext>
+            </a:extLst>
+          </p:cNvPr>
+          <p:cNvSpPr>
+            <a:spLocks noGrp="1"/>
+          </p:cNvSpPr>
+          <p:nvPr>
+            <p:ph idx="1"/>
+          </p:nvPr>
+        </p:nvSpPr>
+        <p:spPr/>
+        <p:txBody>
+          <a:bodyPr/>
+          <a:lstStyle/>
+          <a:p>
+            <a:r>
+              <a:rPr lang="en-US" dirty="0"/>
+              <a:t>t-viSNE15</a:t>
+            </a:r>
+          </a:p>
+          <a:p>
+            <a:r>
+              <a:rPr lang="en-US" dirty="0"/>
+              <a:t>DeforestVis16</a:t>
+            </a:r>
+          </a:p>
+        </p:txBody>
+      </p:sp>
+    </p:spTree>
+    <p:extLst>
+      <p:ext uri="{BB962C8B-B14F-4D97-AF65-F5344CB8AC3E}">
+        <p14:creationId xmlns:p14="http://schemas.microsoft.com/office/powerpoint/2010/main" val="2676015833"/>
+      </p:ext>
+    </p:extLst>
+  </p:cSld>
+  <p:clrMapOvr>
+    <a:masterClrMapping/>
+  </p:clrMapOvr>
+</p:sld>
+</file>
+
+<file path=ppt/slides/slide12.xml><?xml version="1.0" encoding="utf-8"?>
+<p:sld xmlns:a="http://schemas.openxmlformats.org/drawingml/2006/main" xmlns:r="http://schemas.openxmlformats.org/officeDocument/2006/relationships" xmlns:p="http://schemas.openxmlformats.org/presentationml/2006/main">
+  <p:cSld>
+    <p:spTree>
+      <p:nvGrpSpPr>
+        <p:cNvPr id="1" name="">
+          <a:extLst>
+            <a:ext uri="{FF2B5EF4-FFF2-40B4-BE49-F238E27FC236}">
+              <a16:creationId xmlns:a16="http://schemas.microsoft.com/office/drawing/2014/main" id="{3F582120-04D4-0D05-1AB7-27B96A255604}"/>
+            </a:ext>
+          </a:extLst>
+        </p:cNvPr>
+        <p:cNvGrpSpPr/>
+        <p:nvPr/>
+      </p:nvGrpSpPr>
+      <p:grpSpPr>
+        <a:xfrm>
+          <a:off x="0" y="0"/>
+          <a:ext cx="0" cy="0"/>
+          <a:chOff x="0" y="0"/>
+          <a:chExt cx="0" cy="0"/>
+        </a:xfrm>
+      </p:grpSpPr>
+      <p:sp>
+        <p:nvSpPr>
+          <p:cNvPr id="2" name="Title 1">
+            <a:extLst>
+              <a:ext uri="{FF2B5EF4-FFF2-40B4-BE49-F238E27FC236}">
+                <a16:creationId xmlns:a16="http://schemas.microsoft.com/office/drawing/2014/main" id="{20CB7677-5E2F-F2DB-F73A-E2967A39A333}"/>
+              </a:ext>
+            </a:extLst>
+          </p:cNvPr>
+          <p:cNvSpPr>
+            <a:spLocks noGrp="1"/>
+          </p:cNvSpPr>
+          <p:nvPr>
+            <p:ph type="title"/>
+          </p:nvPr>
+        </p:nvSpPr>
+        <p:spPr/>
+        <p:txBody>
+          <a:bodyPr/>
+          <a:lstStyle/>
+          <a:p>
+            <a:r>
+              <a:rPr lang="en-US" dirty="0" err="1"/>
+              <a:t>xai</a:t>
+            </a:r>
+            <a:r>
+              <a:rPr lang="en-US" dirty="0"/>
+              <a:t> and Visualization: model debugging</a:t>
+            </a:r>
+          </a:p>
+        </p:txBody>
+      </p:sp>
+      <p:sp>
+        <p:nvSpPr>
+          <p:cNvPr id="8" name="TextBox 7">
+            <a:extLst>
+              <a:ext uri="{FF2B5EF4-FFF2-40B4-BE49-F238E27FC236}">
+                <a16:creationId xmlns:a16="http://schemas.microsoft.com/office/drawing/2014/main" id="{8D517C81-872F-ED81-843C-E7929F344AB8}"/>
+              </a:ext>
+            </a:extLst>
+          </p:cNvPr>
+          <p:cNvSpPr txBox="1"/>
+          <p:nvPr/>
+        </p:nvSpPr>
+        <p:spPr>
+          <a:xfrm>
+            <a:off x="6248400" y="6155844"/>
+            <a:ext cx="6294120" cy="584775"/>
+          </a:xfrm>
+          <a:prstGeom prst="rect">
+            <a:avLst/>
+          </a:prstGeom>
+          <a:noFill/>
+        </p:spPr>
+        <p:txBody>
+          <a:bodyPr wrap="square">
+            <a:spAutoFit/>
+          </a:bodyPr>
+          <a:lstStyle/>
+          <a:p>
+            <a:r>
+              <a:rPr lang="en-US" sz="1600" b="0" i="0" dirty="0">
+                <a:solidFill>
+                  <a:srgbClr val="333333"/>
+                </a:solidFill>
+                <a:effectLst/>
+                <a:latin typeface="+mj-lt"/>
+              </a:rPr>
+              <a:t>A. </a:t>
+            </a:r>
+            <a:r>
+              <a:rPr lang="en-US" sz="1600" b="0" i="0" dirty="0" err="1">
+                <a:solidFill>
+                  <a:srgbClr val="333333"/>
+                </a:solidFill>
+                <a:effectLst/>
+                <a:latin typeface="+mj-lt"/>
+              </a:rPr>
+              <a:t>Chatzimparmpas</a:t>
+            </a:r>
+            <a:r>
+              <a:rPr lang="en-US" sz="1600" b="0" i="0" dirty="0">
+                <a:solidFill>
+                  <a:srgbClr val="333333"/>
+                </a:solidFill>
+                <a:effectLst/>
+                <a:latin typeface="+mj-lt"/>
+              </a:rPr>
+              <a:t>, "Visual Analytics for Explainable and Trustworthy Artificial Intelligence,” 2025, </a:t>
+            </a:r>
+            <a:r>
+              <a:rPr lang="en-US" sz="1600" b="0" i="0" dirty="0" err="1">
+                <a:solidFill>
+                  <a:srgbClr val="333333"/>
+                </a:solidFill>
+                <a:effectLst/>
+                <a:latin typeface="+mj-lt"/>
+              </a:rPr>
+              <a:t>doi</a:t>
+            </a:r>
+            <a:r>
+              <a:rPr lang="en-US" sz="1600" b="0" i="0" dirty="0">
+                <a:solidFill>
+                  <a:srgbClr val="333333"/>
+                </a:solidFill>
+                <a:effectLst/>
+                <a:latin typeface="+mj-lt"/>
+              </a:rPr>
+              <a:t>: 10.1109/MCG.2025.3533806</a:t>
+            </a:r>
+            <a:r>
+              <a:rPr lang="en-US" sz="1600" dirty="0">
+                <a:solidFill>
+                  <a:srgbClr val="333333"/>
+                </a:solidFill>
+                <a:latin typeface="+mj-lt"/>
+              </a:rPr>
+              <a:t> </a:t>
+            </a:r>
+            <a:endParaRPr lang="en-US" sz="1600" dirty="0">
+              <a:latin typeface="+mj-lt"/>
+            </a:endParaRPr>
+          </a:p>
+        </p:txBody>
+      </p:sp>
+      <p:sp>
+        <p:nvSpPr>
+          <p:cNvPr id="4" name="Content Placeholder 3">
+            <a:extLst>
+              <a:ext uri="{FF2B5EF4-FFF2-40B4-BE49-F238E27FC236}">
+                <a16:creationId xmlns:a16="http://schemas.microsoft.com/office/drawing/2014/main" id="{3DA5D462-3FEC-28E7-875D-86487C33D1A8}"/>
+              </a:ext>
+            </a:extLst>
+          </p:cNvPr>
+          <p:cNvSpPr>
+            <a:spLocks noGrp="1"/>
+          </p:cNvSpPr>
+          <p:nvPr>
+            <p:ph idx="1"/>
+          </p:nvPr>
+        </p:nvSpPr>
+        <p:spPr/>
+        <p:txBody>
+          <a:bodyPr/>
+          <a:lstStyle/>
+          <a:p>
+            <a:r>
+              <a:rPr lang="en-US" dirty="0"/>
+              <a:t>VisRuler17</a:t>
+            </a:r>
+          </a:p>
+        </p:txBody>
+      </p:sp>
+    </p:spTree>
+    <p:extLst>
+      <p:ext uri="{BB962C8B-B14F-4D97-AF65-F5344CB8AC3E}">
+        <p14:creationId xmlns:p14="http://schemas.microsoft.com/office/powerpoint/2010/main" val="3826474010"/>
+      </p:ext>
+    </p:extLst>
+  </p:cSld>
+  <p:clrMapOvr>
+    <a:masterClrMapping/>
+  </p:clrMapOvr>
+</p:sld>
+</file>
+
+<file path=ppt/slides/slide13.xml><?xml version="1.0" encoding="utf-8"?>
+<p:sld xmlns:a="http://schemas.openxmlformats.org/drawingml/2006/main" xmlns:r="http://schemas.openxmlformats.org/officeDocument/2006/relationships" xmlns:p="http://schemas.openxmlformats.org/presentationml/2006/main">
+  <p:cSld>
+    <p:spTree>
+      <p:nvGrpSpPr>
+        <p:cNvPr id="1" name="">
+          <a:extLst>
+            <a:ext uri="{FF2B5EF4-FFF2-40B4-BE49-F238E27FC236}">
+              <a16:creationId xmlns:a16="http://schemas.microsoft.com/office/drawing/2014/main" id="{C22EBC8F-A860-1C97-185E-3518558CFC6A}"/>
+            </a:ext>
+          </a:extLst>
+        </p:cNvPr>
+        <p:cNvGrpSpPr/>
+        <p:nvPr/>
+      </p:nvGrpSpPr>
+      <p:grpSpPr>
+        <a:xfrm>
+          <a:off x="0" y="0"/>
+          <a:ext cx="0" cy="0"/>
+          <a:chOff x="0" y="0"/>
+          <a:chExt cx="0" cy="0"/>
+        </a:xfrm>
+      </p:grpSpPr>
+      <p:sp>
+        <p:nvSpPr>
+          <p:cNvPr id="2" name="Title 1">
+            <a:extLst>
+              <a:ext uri="{FF2B5EF4-FFF2-40B4-BE49-F238E27FC236}">
+                <a16:creationId xmlns:a16="http://schemas.microsoft.com/office/drawing/2014/main" id="{FBEABFCC-2C9E-5700-6AFB-C8A7E5CEA4BA}"/>
+              </a:ext>
+            </a:extLst>
+          </p:cNvPr>
+          <p:cNvSpPr>
+            <a:spLocks noGrp="1"/>
+          </p:cNvSpPr>
+          <p:nvPr>
+            <p:ph type="title"/>
+          </p:nvPr>
+        </p:nvSpPr>
+        <p:spPr/>
+        <p:txBody>
+          <a:bodyPr/>
+          <a:lstStyle/>
+          <a:p>
+            <a:r>
+              <a:rPr lang="en-US" dirty="0" err="1"/>
+              <a:t>xai</a:t>
+            </a:r>
+            <a:r>
+              <a:rPr lang="en-US" dirty="0"/>
+              <a:t> and Visualization: model comparisons</a:t>
+            </a:r>
+          </a:p>
+        </p:txBody>
+      </p:sp>
+      <p:sp>
+        <p:nvSpPr>
+          <p:cNvPr id="8" name="TextBox 7">
+            <a:extLst>
+              <a:ext uri="{FF2B5EF4-FFF2-40B4-BE49-F238E27FC236}">
+                <a16:creationId xmlns:a16="http://schemas.microsoft.com/office/drawing/2014/main" id="{3D4C4681-444D-E81D-594C-9174BC30FC43}"/>
+              </a:ext>
+            </a:extLst>
+          </p:cNvPr>
+          <p:cNvSpPr txBox="1"/>
+          <p:nvPr/>
+        </p:nvSpPr>
+        <p:spPr>
+          <a:xfrm>
+            <a:off x="6248400" y="6155844"/>
+            <a:ext cx="6294120" cy="584775"/>
+          </a:xfrm>
+          <a:prstGeom prst="rect">
+            <a:avLst/>
+          </a:prstGeom>
+          <a:noFill/>
+        </p:spPr>
+        <p:txBody>
+          <a:bodyPr wrap="square">
+            <a:spAutoFit/>
+          </a:bodyPr>
+          <a:lstStyle/>
+          <a:p>
+            <a:r>
+              <a:rPr lang="en-US" sz="1600" b="0" i="0" dirty="0">
+                <a:solidFill>
+                  <a:srgbClr val="333333"/>
+                </a:solidFill>
+                <a:effectLst/>
+                <a:latin typeface="+mj-lt"/>
+              </a:rPr>
+              <a:t>A. </a:t>
+            </a:r>
+            <a:r>
+              <a:rPr lang="en-US" sz="1600" b="0" i="0" dirty="0" err="1">
+                <a:solidFill>
+                  <a:srgbClr val="333333"/>
+                </a:solidFill>
+                <a:effectLst/>
+                <a:latin typeface="+mj-lt"/>
+              </a:rPr>
+              <a:t>Chatzimparmpas</a:t>
+            </a:r>
+            <a:r>
+              <a:rPr lang="en-US" sz="1600" b="0" i="0" dirty="0">
+                <a:solidFill>
+                  <a:srgbClr val="333333"/>
+                </a:solidFill>
+                <a:effectLst/>
+                <a:latin typeface="+mj-lt"/>
+              </a:rPr>
+              <a:t>, "Visual Analytics for Explainable and Trustworthy Artificial Intelligence,” 2025, </a:t>
+            </a:r>
+            <a:r>
+              <a:rPr lang="en-US" sz="1600" b="0" i="0" dirty="0" err="1">
+                <a:solidFill>
+                  <a:srgbClr val="333333"/>
+                </a:solidFill>
+                <a:effectLst/>
+                <a:latin typeface="+mj-lt"/>
+              </a:rPr>
+              <a:t>doi</a:t>
+            </a:r>
+            <a:r>
+              <a:rPr lang="en-US" sz="1600" b="0" i="0" dirty="0">
+                <a:solidFill>
+                  <a:srgbClr val="333333"/>
+                </a:solidFill>
+                <a:effectLst/>
+                <a:latin typeface="+mj-lt"/>
+              </a:rPr>
+              <a:t>: 10.1109/MCG.2025.3533806</a:t>
+            </a:r>
+            <a:r>
+              <a:rPr lang="en-US" sz="1600" dirty="0">
+                <a:solidFill>
+                  <a:srgbClr val="333333"/>
+                </a:solidFill>
+                <a:latin typeface="+mj-lt"/>
+              </a:rPr>
+              <a:t> </a:t>
+            </a:r>
+            <a:endParaRPr lang="en-US" sz="1600" dirty="0">
+              <a:latin typeface="+mj-lt"/>
+            </a:endParaRPr>
+          </a:p>
+        </p:txBody>
+      </p:sp>
+      <p:sp>
+        <p:nvSpPr>
+          <p:cNvPr id="4" name="Content Placeholder 3">
+            <a:extLst>
+              <a:ext uri="{FF2B5EF4-FFF2-40B4-BE49-F238E27FC236}">
+                <a16:creationId xmlns:a16="http://schemas.microsoft.com/office/drawing/2014/main" id="{41C89E79-8E8B-F5AA-737F-98E55EF181B1}"/>
+              </a:ext>
+            </a:extLst>
+          </p:cNvPr>
+          <p:cNvSpPr>
+            <a:spLocks noGrp="1"/>
+          </p:cNvSpPr>
+          <p:nvPr>
+            <p:ph idx="1"/>
+          </p:nvPr>
+        </p:nvSpPr>
+        <p:spPr/>
+        <p:txBody>
+          <a:bodyPr/>
+          <a:lstStyle/>
+          <a:p>
+            <a:r>
+              <a:rPr lang="en-US" dirty="0"/>
+              <a:t>StackGenVis18</a:t>
+            </a:r>
+          </a:p>
+        </p:txBody>
+      </p:sp>
+    </p:spTree>
+    <p:extLst>
+      <p:ext uri="{BB962C8B-B14F-4D97-AF65-F5344CB8AC3E}">
+        <p14:creationId xmlns:p14="http://schemas.microsoft.com/office/powerpoint/2010/main" val="278618253"/>
+      </p:ext>
+    </p:extLst>
+  </p:cSld>
+  <p:clrMapOvr>
+    <a:masterClrMapping/>
+  </p:clrMapOvr>
+</p:sld>
+</file>
+
+<file path=ppt/slides/slide14.xml><?xml version="1.0" encoding="utf-8"?>
+<p:sld xmlns:a="http://schemas.openxmlformats.org/drawingml/2006/main" xmlns:r="http://schemas.openxmlformats.org/officeDocument/2006/relationships" xmlns:p="http://schemas.openxmlformats.org/presentationml/2006/main">
+  <p:cSld>
+    <p:spTree>
+      <p:nvGrpSpPr>
+        <p:cNvPr id="1" name="">
+          <a:extLst>
+            <a:ext uri="{FF2B5EF4-FFF2-40B4-BE49-F238E27FC236}">
+              <a16:creationId xmlns:a16="http://schemas.microsoft.com/office/drawing/2014/main" id="{E06761A0-0957-77EE-34D9-8B157EF06BE5}"/>
+            </a:ext>
+          </a:extLst>
+        </p:cNvPr>
+        <p:cNvGrpSpPr/>
+        <p:nvPr/>
+      </p:nvGrpSpPr>
+      <p:grpSpPr>
+        <a:xfrm>
+          <a:off x="0" y="0"/>
+          <a:ext cx="0" cy="0"/>
+          <a:chOff x="0" y="0"/>
+          <a:chExt cx="0" cy="0"/>
+        </a:xfrm>
+      </p:grpSpPr>
+      <p:sp>
+        <p:nvSpPr>
+          <p:cNvPr id="2" name="Title 1">
+            <a:extLst>
+              <a:ext uri="{FF2B5EF4-FFF2-40B4-BE49-F238E27FC236}">
+                <a16:creationId xmlns:a16="http://schemas.microsoft.com/office/drawing/2014/main" id="{3CDAB4DC-A7B1-C360-0DA6-10BFE7E0CFD5}"/>
+              </a:ext>
+            </a:extLst>
+          </p:cNvPr>
+          <p:cNvSpPr>
+            <a:spLocks noGrp="1"/>
+          </p:cNvSpPr>
+          <p:nvPr>
+            <p:ph type="title"/>
+          </p:nvPr>
+        </p:nvSpPr>
+        <p:spPr/>
+        <p:txBody>
+          <a:bodyPr/>
+          <a:lstStyle/>
+          <a:p>
+            <a:r>
+              <a:rPr lang="en-US" dirty="0"/>
+              <a:t>open areas </a:t>
+            </a:r>
+          </a:p>
+        </p:txBody>
+      </p:sp>
+      <p:sp>
+        <p:nvSpPr>
+          <p:cNvPr id="8" name="TextBox 7">
+            <a:extLst>
+              <a:ext uri="{FF2B5EF4-FFF2-40B4-BE49-F238E27FC236}">
+                <a16:creationId xmlns:a16="http://schemas.microsoft.com/office/drawing/2014/main" id="{754CEA08-3D03-58AF-916D-D12A7D0D74A3}"/>
+              </a:ext>
+            </a:extLst>
+          </p:cNvPr>
+          <p:cNvSpPr txBox="1"/>
+          <p:nvPr/>
+        </p:nvSpPr>
+        <p:spPr>
+          <a:xfrm>
+            <a:off x="6248400" y="6155844"/>
+            <a:ext cx="6294120" cy="584775"/>
+          </a:xfrm>
+          <a:prstGeom prst="rect">
+            <a:avLst/>
+          </a:prstGeom>
+          <a:noFill/>
+        </p:spPr>
+        <p:txBody>
+          <a:bodyPr wrap="square">
+            <a:spAutoFit/>
+          </a:bodyPr>
+          <a:lstStyle/>
+          <a:p>
+            <a:r>
+              <a:rPr lang="en-US" sz="1600" b="0" i="0" dirty="0">
+                <a:solidFill>
+                  <a:srgbClr val="333333"/>
+                </a:solidFill>
+                <a:effectLst/>
+                <a:latin typeface="+mj-lt"/>
+              </a:rPr>
+              <a:t>A. </a:t>
+            </a:r>
+            <a:r>
+              <a:rPr lang="en-US" sz="1600" b="0" i="0" dirty="0" err="1">
+                <a:solidFill>
+                  <a:srgbClr val="333333"/>
+                </a:solidFill>
+                <a:effectLst/>
+                <a:latin typeface="+mj-lt"/>
+              </a:rPr>
+              <a:t>Chatzimparmpas</a:t>
+            </a:r>
+            <a:r>
+              <a:rPr lang="en-US" sz="1600" b="0" i="0" dirty="0">
+                <a:solidFill>
+                  <a:srgbClr val="333333"/>
+                </a:solidFill>
+                <a:effectLst/>
+                <a:latin typeface="+mj-lt"/>
+              </a:rPr>
+              <a:t>, "Visual Analytics for Explainable and Trustworthy Artificial Intelligence,” 2025, </a:t>
+            </a:r>
+            <a:r>
+              <a:rPr lang="en-US" sz="1600" b="0" i="0" dirty="0" err="1">
+                <a:solidFill>
+                  <a:srgbClr val="333333"/>
+                </a:solidFill>
+                <a:effectLst/>
+                <a:latin typeface="+mj-lt"/>
+              </a:rPr>
+              <a:t>doi</a:t>
+            </a:r>
+            <a:r>
+              <a:rPr lang="en-US" sz="1600" b="0" i="0" dirty="0">
+                <a:solidFill>
+                  <a:srgbClr val="333333"/>
+                </a:solidFill>
+                <a:effectLst/>
+                <a:latin typeface="+mj-lt"/>
+              </a:rPr>
+              <a:t>: 10.1109/MCG.2025.3533806</a:t>
+            </a:r>
+            <a:r>
+              <a:rPr lang="en-US" sz="1600" dirty="0">
+                <a:solidFill>
+                  <a:srgbClr val="333333"/>
+                </a:solidFill>
+                <a:latin typeface="+mj-lt"/>
+              </a:rPr>
+              <a:t> </a:t>
+            </a:r>
+            <a:endParaRPr lang="en-US" sz="1600" dirty="0">
+              <a:latin typeface="+mj-lt"/>
+            </a:endParaRPr>
+          </a:p>
+        </p:txBody>
+      </p:sp>
+      <p:sp>
+        <p:nvSpPr>
+          <p:cNvPr id="4" name="Content Placeholder 3">
+            <a:extLst>
+              <a:ext uri="{FF2B5EF4-FFF2-40B4-BE49-F238E27FC236}">
+                <a16:creationId xmlns:a16="http://schemas.microsoft.com/office/drawing/2014/main" id="{C77153C6-0A00-E16D-B432-E450B5A8FD55}"/>
+              </a:ext>
+            </a:extLst>
+          </p:cNvPr>
+          <p:cNvSpPr>
+            <a:spLocks noGrp="1"/>
+          </p:cNvSpPr>
+          <p:nvPr>
+            <p:ph idx="1"/>
+          </p:nvPr>
+        </p:nvSpPr>
+        <p:spPr/>
+        <p:txBody>
+          <a:bodyPr>
+            <a:normAutofit fontScale="92500" lnSpcReduction="10000"/>
+          </a:bodyPr>
+          <a:lstStyle/>
+          <a:p>
+            <a:r>
+              <a:rPr lang="en-US" dirty="0"/>
+              <a:t>The VA community has devoted significant attention to XAI in recent years, yet much of the focus remains on NNs for image data. Out of 542 visualization papers surveyed on enhancing trust in AI, 345 primarily addressed NN models, while only 114 concentrated on ensembles. Although image analysis is undeniably an important research domain—especially in fields, such as medicine, where NNs excel with high-dimensional data—other application areas should not be overlooked Tabular data still represent the majority of datasets employed in AI workflows, where ensemble learning models often surpass NNs in performance</a:t>
+            </a:r>
+          </a:p>
+          <a:p>
+            <a:endParaRPr lang="en-US" dirty="0"/>
+          </a:p>
+          <a:p>
+            <a:r>
+              <a:rPr lang="en-US" dirty="0"/>
+              <a:t>By analyzing the categorization of the 542 visualization techniques, it becomes evident that the underrepresented categories have the potential to inspire new research directions for non-TL areas, indirectly impacting trust in AI. For example, VA dashboards for boosting and stacking ensemble learning methods are notably scarce. Similarly, multilabel and regression problems are less explored compared to classification. In the realm of unsupervised learning, association and pattern mining remain underrepresented in VA. Reinforcement learning also receives minimal attention. Lastly, more emphasis is needed on addressing the needs of beginners and users with varying levels of experience who aim to analyze their data broadly</a:t>
+            </a:r>
+          </a:p>
+        </p:txBody>
+      </p:sp>
+    </p:spTree>
+    <p:extLst>
+      <p:ext uri="{BB962C8B-B14F-4D97-AF65-F5344CB8AC3E}">
+        <p14:creationId xmlns:p14="http://schemas.microsoft.com/office/powerpoint/2010/main" val="4077406360"/>
+      </p:ext>
+    </p:extLst>
+  </p:cSld>
+  <p:clrMapOvr>
+    <a:masterClrMapping/>
+  </p:clrMapOvr>
+</p:sld>
+</file>
+
+<file path=ppt/slides/slide15.xml><?xml version="1.0" encoding="utf-8"?>
+<p:sld xmlns:a="http://schemas.openxmlformats.org/drawingml/2006/main" xmlns:r="http://schemas.openxmlformats.org/officeDocument/2006/relationships" xmlns:p="http://schemas.openxmlformats.org/presentationml/2006/main">
+  <p:cSld>
+    <p:spTree>
+      <p:nvGrpSpPr>
+        <p:cNvPr id="1" name="">
+          <a:extLst>
+            <a:ext uri="{FF2B5EF4-FFF2-40B4-BE49-F238E27FC236}">
+              <a16:creationId xmlns:a16="http://schemas.microsoft.com/office/drawing/2014/main" id="{0F3E4939-5D13-847C-B6AE-7C1FACD93188}"/>
+            </a:ext>
+          </a:extLst>
+        </p:cNvPr>
+        <p:cNvGrpSpPr/>
+        <p:nvPr/>
+      </p:nvGrpSpPr>
+      <p:grpSpPr>
+        <a:xfrm>
+          <a:off x="0" y="0"/>
+          <a:ext cx="0" cy="0"/>
+          <a:chOff x="0" y="0"/>
+          <a:chExt cx="0" cy="0"/>
+        </a:xfrm>
+      </p:grpSpPr>
+      <p:sp>
+        <p:nvSpPr>
+          <p:cNvPr id="2" name="Title 1">
+            <a:extLst>
+              <a:ext uri="{FF2B5EF4-FFF2-40B4-BE49-F238E27FC236}">
+                <a16:creationId xmlns:a16="http://schemas.microsoft.com/office/drawing/2014/main" id="{B117B824-1AE2-2082-FA0F-5502CBEC4338}"/>
+              </a:ext>
+            </a:extLst>
+          </p:cNvPr>
+          <p:cNvSpPr>
+            <a:spLocks noGrp="1"/>
+          </p:cNvSpPr>
+          <p:nvPr>
+            <p:ph type="title"/>
+          </p:nvPr>
+        </p:nvSpPr>
+        <p:spPr/>
+        <p:txBody>
+          <a:bodyPr/>
+          <a:lstStyle/>
+          <a:p>
+            <a:r>
+              <a:rPr lang="en-US" dirty="0"/>
+              <a:t>your turn</a:t>
+            </a:r>
+          </a:p>
+        </p:txBody>
+      </p:sp>
+      <p:sp>
+        <p:nvSpPr>
+          <p:cNvPr id="8" name="TextBox 7">
+            <a:extLst>
+              <a:ext uri="{FF2B5EF4-FFF2-40B4-BE49-F238E27FC236}">
+                <a16:creationId xmlns:a16="http://schemas.microsoft.com/office/drawing/2014/main" id="{24B09EC6-2B60-6382-C065-C87896A82CE0}"/>
+              </a:ext>
+            </a:extLst>
+          </p:cNvPr>
+          <p:cNvSpPr txBox="1"/>
+          <p:nvPr/>
+        </p:nvSpPr>
+        <p:spPr>
+          <a:xfrm>
+            <a:off x="6248400" y="6155844"/>
+            <a:ext cx="6294120" cy="584775"/>
+          </a:xfrm>
+          <a:prstGeom prst="rect">
+            <a:avLst/>
+          </a:prstGeom>
+          <a:noFill/>
+        </p:spPr>
+        <p:txBody>
+          <a:bodyPr wrap="square">
+            <a:spAutoFit/>
+          </a:bodyPr>
+          <a:lstStyle/>
+          <a:p>
+            <a:r>
+              <a:rPr lang="en-US" sz="1600" b="0" i="0" dirty="0">
+                <a:solidFill>
+                  <a:srgbClr val="333333"/>
+                </a:solidFill>
+                <a:effectLst/>
+                <a:latin typeface="+mj-lt"/>
+              </a:rPr>
+              <a:t>A. </a:t>
+            </a:r>
+            <a:r>
+              <a:rPr lang="en-US" sz="1600" b="0" i="0" dirty="0" err="1">
+                <a:solidFill>
+                  <a:srgbClr val="333333"/>
+                </a:solidFill>
+                <a:effectLst/>
+                <a:latin typeface="+mj-lt"/>
+              </a:rPr>
+              <a:t>Chatzimparmpas</a:t>
+            </a:r>
+            <a:r>
+              <a:rPr lang="en-US" sz="1600" b="0" i="0" dirty="0">
+                <a:solidFill>
+                  <a:srgbClr val="333333"/>
+                </a:solidFill>
+                <a:effectLst/>
+                <a:latin typeface="+mj-lt"/>
+              </a:rPr>
+              <a:t>, "Visual Analytics for Explainable and Trustworthy Artificial Intelligence,” 2025, </a:t>
+            </a:r>
+            <a:r>
+              <a:rPr lang="en-US" sz="1600" b="0" i="0" dirty="0" err="1">
+                <a:solidFill>
+                  <a:srgbClr val="333333"/>
+                </a:solidFill>
+                <a:effectLst/>
+                <a:latin typeface="+mj-lt"/>
+              </a:rPr>
+              <a:t>doi</a:t>
+            </a:r>
+            <a:r>
+              <a:rPr lang="en-US" sz="1600" b="0" i="0" dirty="0">
+                <a:solidFill>
+                  <a:srgbClr val="333333"/>
+                </a:solidFill>
+                <a:effectLst/>
+                <a:latin typeface="+mj-lt"/>
+              </a:rPr>
+              <a:t>: 10.1109/MCG.2025.3533806</a:t>
+            </a:r>
+            <a:r>
+              <a:rPr lang="en-US" sz="1600" dirty="0">
+                <a:solidFill>
+                  <a:srgbClr val="333333"/>
+                </a:solidFill>
+                <a:latin typeface="+mj-lt"/>
+              </a:rPr>
+              <a:t> </a:t>
+            </a:r>
+            <a:endParaRPr lang="en-US" sz="1600" dirty="0">
+              <a:latin typeface="+mj-lt"/>
+            </a:endParaRPr>
+          </a:p>
+        </p:txBody>
+      </p:sp>
+      <p:sp>
+        <p:nvSpPr>
+          <p:cNvPr id="4" name="Content Placeholder 3">
+            <a:extLst>
+              <a:ext uri="{FF2B5EF4-FFF2-40B4-BE49-F238E27FC236}">
+                <a16:creationId xmlns:a16="http://schemas.microsoft.com/office/drawing/2014/main" id="{89406C78-3075-DD1F-189B-32136EB2E867}"/>
+              </a:ext>
+            </a:extLst>
+          </p:cNvPr>
+          <p:cNvSpPr>
+            <a:spLocks noGrp="1"/>
+          </p:cNvSpPr>
+          <p:nvPr>
+            <p:ph idx="1"/>
+          </p:nvPr>
+        </p:nvSpPr>
+        <p:spPr/>
+        <p:txBody>
+          <a:bodyPr vert="horz" lIns="91440" tIns="45720" rIns="91440" bIns="45720" rtlCol="0" anchor="ctr">
+            <a:normAutofit/>
+          </a:bodyPr>
+          <a:lstStyle/>
+          <a:p>
+            <a:r>
+              <a:rPr lang="en-US" sz="2200" dirty="0"/>
+              <a:t>Navigate to: </a:t>
+            </a:r>
+            <a:r>
+              <a:rPr lang="en-US" sz="2200" dirty="0">
+                <a:hlinkClick r:id="rId3"/>
+              </a:rPr>
+              <a:t>https://trustmlvis.lnu.se/</a:t>
+            </a:r>
+            <a:r>
+              <a:rPr lang="en-US" sz="2200" dirty="0"/>
+              <a:t> </a:t>
+            </a:r>
+          </a:p>
+          <a:p>
+            <a:r>
+              <a:rPr lang="en-US" sz="2200" dirty="0"/>
+              <a:t>Notice the “Target Group” filter option at the bottom of the page</a:t>
+            </a:r>
+          </a:p>
+          <a:p>
+            <a:r>
+              <a:rPr lang="en-US" sz="2200" dirty="0"/>
+              <a:t>Inspect some tools for Beginners, Practitioners, and Developers</a:t>
+            </a:r>
+          </a:p>
+          <a:p>
+            <a:pPr lvl="1"/>
+            <a:r>
+              <a:rPr lang="en-US" sz="2200" dirty="0"/>
+              <a:t>What similarities and differences do you see? </a:t>
+            </a:r>
+          </a:p>
+          <a:p>
+            <a:pPr lvl="1"/>
+            <a:r>
+              <a:rPr lang="en-US" sz="2200" dirty="0"/>
+              <a:t>Do the tools you seem seem appropriate for the target group? </a:t>
+            </a:r>
+          </a:p>
+          <a:p>
+            <a:pPr lvl="1"/>
+            <a:r>
+              <a:rPr lang="en-US" sz="2200" dirty="0"/>
+              <a:t>Sketch out how you would redesign a beginner tool for a practitioner and vice versa </a:t>
+            </a:r>
+            <a:endParaRPr lang="en-US" sz="2200" dirty="0">
+              <a:hlinkClick r:id="rId3"/>
+            </a:endParaRPr>
+          </a:p>
+        </p:txBody>
+      </p:sp>
+    </p:spTree>
+    <p:extLst>
+      <p:ext uri="{BB962C8B-B14F-4D97-AF65-F5344CB8AC3E}">
+        <p14:creationId xmlns:p14="http://schemas.microsoft.com/office/powerpoint/2010/main" val="2076957158"/>
+      </p:ext>
+    </p:extLst>
+  </p:cSld>
+  <p:clrMapOvr>
+    <a:masterClrMapping/>
+  </p:clrMapOvr>
+</p:sld>
+</file>
+
 <file path=ppt/slides/slide2.xml><?xml version="1.0" encoding="utf-8"?>
 <p:sld xmlns:a="http://schemas.openxmlformats.org/drawingml/2006/main" xmlns:r="http://schemas.openxmlformats.org/officeDocument/2006/relationships" xmlns:p="http://schemas.openxmlformats.org/presentationml/2006/main">
   <p:cSld>
@@ -4588,25 +7314,24 @@
           <a:lstStyle/>
           <a:p>
             <a:r>
-              <a:rPr lang="en-US" sz="2200" dirty="0"/>
-              <a:t>XX</a:t>
-            </a:r>
-          </a:p>
-          <a:p>
-            <a:r>
-              <a:rPr lang="en-US" sz="2200" dirty="0"/>
-              <a:t>YY</a:t>
-            </a:r>
-          </a:p>
-          <a:p>
-            <a:r>
-              <a:rPr lang="en-US" sz="2200"/>
-              <a:t>ZZ</a:t>
-            </a:r>
-            <a:endParaRPr lang="en-US" sz="2200" dirty="0"/>
-          </a:p>
-          <a:p>
-            <a:endParaRPr lang="en-US" sz="2000" dirty="0"/>
+              <a:rPr lang="en-US" sz="2400" dirty="0"/>
+              <a:t>Why XAI Matters </a:t>
+            </a:r>
+          </a:p>
+          <a:p>
+            <a:r>
+              <a:rPr lang="en-US" sz="2400" dirty="0"/>
+              <a:t>XAI and Visualization</a:t>
+            </a:r>
+          </a:p>
+          <a:p>
+            <a:r>
+              <a:rPr lang="en-US" sz="2400" dirty="0"/>
+              <a:t>Open Areas</a:t>
+            </a:r>
+          </a:p>
+          <a:p>
+            <a:endParaRPr lang="en-US" sz="2400" dirty="0"/>
           </a:p>
         </p:txBody>
       </p:sp>
@@ -4614,6 +7339,1546 @@
     <p:extLst>
       <p:ext uri="{BB962C8B-B14F-4D97-AF65-F5344CB8AC3E}">
         <p14:creationId xmlns:p14="http://schemas.microsoft.com/office/powerpoint/2010/main" val="2057560901"/>
+      </p:ext>
+    </p:extLst>
+  </p:cSld>
+  <p:clrMapOvr>
+    <a:masterClrMapping/>
+  </p:clrMapOvr>
+</p:sld>
+</file>
+
+<file path=ppt/slides/slide3.xml><?xml version="1.0" encoding="utf-8"?>
+<p:sld xmlns:a="http://schemas.openxmlformats.org/drawingml/2006/main" xmlns:r="http://schemas.openxmlformats.org/officeDocument/2006/relationships" xmlns:p="http://schemas.openxmlformats.org/presentationml/2006/main">
+  <p:cSld>
+    <p:spTree>
+      <p:nvGrpSpPr>
+        <p:cNvPr id="1" name="">
+          <a:extLst>
+            <a:ext uri="{FF2B5EF4-FFF2-40B4-BE49-F238E27FC236}">
+              <a16:creationId xmlns:a16="http://schemas.microsoft.com/office/drawing/2014/main" id="{4E620C02-D315-09A1-5BA2-FAC91B81B16E}"/>
+            </a:ext>
+          </a:extLst>
+        </p:cNvPr>
+        <p:cNvGrpSpPr/>
+        <p:nvPr/>
+      </p:nvGrpSpPr>
+      <p:grpSpPr>
+        <a:xfrm>
+          <a:off x="0" y="0"/>
+          <a:ext cx="0" cy="0"/>
+          <a:chOff x="0" y="0"/>
+          <a:chExt cx="0" cy="0"/>
+        </a:xfrm>
+      </p:grpSpPr>
+      <p:sp>
+        <p:nvSpPr>
+          <p:cNvPr id="2" name="Title 1">
+            <a:extLst>
+              <a:ext uri="{FF2B5EF4-FFF2-40B4-BE49-F238E27FC236}">
+                <a16:creationId xmlns:a16="http://schemas.microsoft.com/office/drawing/2014/main" id="{3CACCC7D-C0E0-D3F5-F617-9BC3AC2FEAAA}"/>
+              </a:ext>
+            </a:extLst>
+          </p:cNvPr>
+          <p:cNvSpPr>
+            <a:spLocks noGrp="1"/>
+          </p:cNvSpPr>
+          <p:nvPr>
+            <p:ph type="title"/>
+          </p:nvPr>
+        </p:nvSpPr>
+        <p:spPr/>
+        <p:txBody>
+          <a:bodyPr/>
+          <a:lstStyle/>
+          <a:p>
+            <a:r>
+              <a:rPr lang="en-US" dirty="0"/>
+              <a:t>why </a:t>
+            </a:r>
+            <a:r>
+              <a:rPr lang="en-US" dirty="0" err="1"/>
+              <a:t>xai</a:t>
+            </a:r>
+            <a:r>
+              <a:rPr lang="en-US" dirty="0"/>
+              <a:t> matters</a:t>
+            </a:r>
+          </a:p>
+        </p:txBody>
+      </p:sp>
+      <p:sp>
+        <p:nvSpPr>
+          <p:cNvPr id="3" name="Content Placeholder 2">
+            <a:extLst>
+              <a:ext uri="{FF2B5EF4-FFF2-40B4-BE49-F238E27FC236}">
+                <a16:creationId xmlns:a16="http://schemas.microsoft.com/office/drawing/2014/main" id="{36BCB9C1-6099-977B-F8C4-66275F8E7D93}"/>
+              </a:ext>
+            </a:extLst>
+          </p:cNvPr>
+          <p:cNvSpPr>
+            <a:spLocks noGrp="1"/>
+          </p:cNvSpPr>
+          <p:nvPr>
+            <p:ph idx="1"/>
+          </p:nvPr>
+        </p:nvSpPr>
+        <p:spPr/>
+        <p:txBody>
+          <a:bodyPr anchor="t">
+            <a:noAutofit/>
+          </a:bodyPr>
+          <a:lstStyle/>
+          <a:p>
+            <a:r>
+              <a:rPr lang="en-US" sz="2400" dirty="0">
+                <a:effectLst>
+                  <a:glow rad="228600">
+                    <a:schemeClr val="accent5">
+                      <a:satMod val="175000"/>
+                      <a:alpha val="40000"/>
+                    </a:schemeClr>
+                  </a:glow>
+                </a:effectLst>
+              </a:rPr>
+              <a:t>Power </a:t>
+            </a:r>
+            <a:r>
+              <a:rPr lang="en-US" sz="2400" dirty="0"/>
+              <a:t>describes the current configuration of structural privilege and structural oppression, in which some groups experience unearned advantages—because various systems have been designed by people like them and work for people them—and other groups experience systematic disadvantages—because those same systems were not designed by them or with people like them in mind</a:t>
+            </a:r>
+          </a:p>
+          <a:p>
+            <a:endParaRPr lang="en-US" sz="2400" dirty="0"/>
+          </a:p>
+          <a:p>
+            <a:r>
+              <a:rPr lang="en-US" sz="2400" dirty="0"/>
+              <a:t>Who has structural privilege in data science / computer science? </a:t>
+            </a:r>
+          </a:p>
+          <a:p>
+            <a:r>
+              <a:rPr lang="en-US" sz="2400" dirty="0"/>
+              <a:t>Who is structurally oppressed by data science / computer science? </a:t>
+            </a:r>
+          </a:p>
+        </p:txBody>
+      </p:sp>
+      <p:sp>
+        <p:nvSpPr>
+          <p:cNvPr id="5" name="TextBox 4">
+            <a:extLst>
+              <a:ext uri="{FF2B5EF4-FFF2-40B4-BE49-F238E27FC236}">
+                <a16:creationId xmlns:a16="http://schemas.microsoft.com/office/drawing/2014/main" id="{B76EFC03-485C-A725-22FD-B1B0E4E255B0}"/>
+              </a:ext>
+            </a:extLst>
+          </p:cNvPr>
+          <p:cNvSpPr txBox="1"/>
+          <p:nvPr/>
+        </p:nvSpPr>
+        <p:spPr>
+          <a:xfrm>
+            <a:off x="5288280" y="6155844"/>
+            <a:ext cx="7452360" cy="646331"/>
+          </a:xfrm>
+          <a:prstGeom prst="rect">
+            <a:avLst/>
+          </a:prstGeom>
+          <a:noFill/>
+        </p:spPr>
+        <p:txBody>
+          <a:bodyPr wrap="square">
+            <a:spAutoFit/>
+          </a:bodyPr>
+          <a:lstStyle/>
+          <a:p>
+            <a:r>
+              <a:rPr lang="en-US" dirty="0" err="1"/>
+              <a:t>D’Ignazio</a:t>
+            </a:r>
+            <a:r>
+              <a:rPr lang="en-US" dirty="0"/>
+              <a:t>, C., &amp; Klein, L. (2020). 1. The Power Chapter. In Data Feminism. Retrieved from </a:t>
+            </a:r>
+            <a:r>
+              <a:rPr lang="en-US" dirty="0">
+                <a:hlinkClick r:id="rId3"/>
+              </a:rPr>
+              <a:t>https://data-feminism.mitpress.mit.edu/pub/vi8obxh7</a:t>
+            </a:r>
+            <a:r>
+              <a:rPr lang="en-US" dirty="0"/>
+              <a:t> </a:t>
+            </a:r>
+          </a:p>
+        </p:txBody>
+      </p:sp>
+    </p:spTree>
+    <p:extLst>
+      <p:ext uri="{BB962C8B-B14F-4D97-AF65-F5344CB8AC3E}">
+        <p14:creationId xmlns:p14="http://schemas.microsoft.com/office/powerpoint/2010/main" val="3820908027"/>
+      </p:ext>
+    </p:extLst>
+  </p:cSld>
+  <p:clrMapOvr>
+    <a:masterClrMapping/>
+  </p:clrMapOvr>
+  <p:timing>
+    <p:tnLst>
+      <p:par>
+        <p:cTn id="1" dur="indefinite" restart="never" nodeType="tmRoot">
+          <p:childTnLst>
+            <p:seq concurrent="1" nextAc="seek">
+              <p:cTn id="2" dur="indefinite" nodeType="mainSeq">
+                <p:childTnLst>
+                  <p:par>
+                    <p:cTn id="3" fill="hold">
+                      <p:stCondLst>
+                        <p:cond delay="indefinite"/>
+                      </p:stCondLst>
+                      <p:childTnLst>
+                        <p:par>
+                          <p:cTn id="4" fill="hold">
+                            <p:stCondLst>
+                              <p:cond delay="0"/>
+                            </p:stCondLst>
+                            <p:childTnLst>
+                              <p:par>
+                                <p:cTn id="5" presetID="1" presetClass="entr" presetSubtype="0" fill="hold" nodeType="clickEffect">
+                                  <p:stCondLst>
+                                    <p:cond delay="0"/>
+                                  </p:stCondLst>
+                                  <p:childTnLst>
+                                    <p:set>
+                                      <p:cBhvr>
+                                        <p:cTn id="6" dur="1" fill="hold">
+                                          <p:stCondLst>
+                                            <p:cond delay="0"/>
+                                          </p:stCondLst>
+                                        </p:cTn>
+                                        <p:tgtEl>
+                                          <p:spTgt spid="3">
+                                            <p:txEl>
+                                              <p:pRg st="2" end="2"/>
+                                            </p:txEl>
+                                          </p:spTgt>
+                                        </p:tgtEl>
+                                        <p:attrNameLst>
+                                          <p:attrName>style.visibility</p:attrName>
+                                        </p:attrNameLst>
+                                      </p:cBhvr>
+                                      <p:to>
+                                        <p:strVal val="visible"/>
+                                      </p:to>
+                                    </p:set>
+                                  </p:childTnLst>
+                                </p:cTn>
+                              </p:par>
+                              <p:par>
+                                <p:cTn id="7" presetID="1" presetClass="entr" presetSubtype="0" fill="hold" nodeType="withEffect">
+                                  <p:stCondLst>
+                                    <p:cond delay="0"/>
+                                  </p:stCondLst>
+                                  <p:childTnLst>
+                                    <p:set>
+                                      <p:cBhvr>
+                                        <p:cTn id="8" dur="1" fill="hold">
+                                          <p:stCondLst>
+                                            <p:cond delay="0"/>
+                                          </p:stCondLst>
+                                        </p:cTn>
+                                        <p:tgtEl>
+                                          <p:spTgt spid="3">
+                                            <p:txEl>
+                                              <p:pRg st="3" end="3"/>
+                                            </p:txEl>
+                                          </p:spTgt>
+                                        </p:tgtEl>
+                                        <p:attrNameLst>
+                                          <p:attrName>style.visibility</p:attrName>
+                                        </p:attrNameLst>
+                                      </p:cBhvr>
+                                      <p:to>
+                                        <p:strVal val="visible"/>
+                                      </p:to>
+                                    </p:set>
+                                  </p:childTnLst>
+                                </p:cTn>
+                              </p:par>
+                            </p:childTnLst>
+                          </p:cTn>
+                        </p:par>
+                      </p:childTnLst>
+                    </p:cTn>
+                  </p:par>
+                </p:childTnLst>
+              </p:cTn>
+              <p:prevCondLst>
+                <p:cond evt="onPrev" delay="0">
+                  <p:tgtEl>
+                    <p:sldTgt/>
+                  </p:tgtEl>
+                </p:cond>
+              </p:prevCondLst>
+              <p:nextCondLst>
+                <p:cond evt="onNext" delay="0">
+                  <p:tgtEl>
+                    <p:sldTgt/>
+                  </p:tgtEl>
+                </p:cond>
+              </p:nextCondLst>
+            </p:seq>
+          </p:childTnLst>
+        </p:cTn>
+      </p:par>
+    </p:tnLst>
+  </p:timing>
+</p:sld>
+</file>
+
+<file path=ppt/slides/slide4.xml><?xml version="1.0" encoding="utf-8"?>
+<p:sld xmlns:a="http://schemas.openxmlformats.org/drawingml/2006/main" xmlns:r="http://schemas.openxmlformats.org/officeDocument/2006/relationships" xmlns:p="http://schemas.openxmlformats.org/presentationml/2006/main">
+  <p:cSld>
+    <p:spTree>
+      <p:nvGrpSpPr>
+        <p:cNvPr id="1" name="">
+          <a:extLst>
+            <a:ext uri="{FF2B5EF4-FFF2-40B4-BE49-F238E27FC236}">
+              <a16:creationId xmlns:a16="http://schemas.microsoft.com/office/drawing/2014/main" id="{9F64BA41-34BA-8838-A457-1281080AAB77}"/>
+            </a:ext>
+          </a:extLst>
+        </p:cNvPr>
+        <p:cNvGrpSpPr/>
+        <p:nvPr/>
+      </p:nvGrpSpPr>
+      <p:grpSpPr>
+        <a:xfrm>
+          <a:off x="0" y="0"/>
+          <a:ext cx="0" cy="0"/>
+          <a:chOff x="0" y="0"/>
+          <a:chExt cx="0" cy="0"/>
+        </a:xfrm>
+      </p:grpSpPr>
+      <p:sp>
+        <p:nvSpPr>
+          <p:cNvPr id="2" name="Title 1">
+            <a:extLst>
+              <a:ext uri="{FF2B5EF4-FFF2-40B4-BE49-F238E27FC236}">
+                <a16:creationId xmlns:a16="http://schemas.microsoft.com/office/drawing/2014/main" id="{6493ABF1-F625-FCB6-99F3-9C623F46FA73}"/>
+              </a:ext>
+            </a:extLst>
+          </p:cNvPr>
+          <p:cNvSpPr>
+            <a:spLocks noGrp="1"/>
+          </p:cNvSpPr>
+          <p:nvPr>
+            <p:ph type="title"/>
+          </p:nvPr>
+        </p:nvSpPr>
+        <p:spPr/>
+        <p:txBody>
+          <a:bodyPr/>
+          <a:lstStyle/>
+          <a:p>
+            <a:r>
+              <a:rPr lang="en-US" dirty="0"/>
+              <a:t>why </a:t>
+            </a:r>
+            <a:r>
+              <a:rPr lang="en-US" dirty="0" err="1"/>
+              <a:t>xai</a:t>
+            </a:r>
+            <a:r>
+              <a:rPr lang="en-US" dirty="0"/>
+              <a:t> matters</a:t>
+            </a:r>
+          </a:p>
+        </p:txBody>
+      </p:sp>
+      <p:sp>
+        <p:nvSpPr>
+          <p:cNvPr id="3" name="Content Placeholder 2">
+            <a:extLst>
+              <a:ext uri="{FF2B5EF4-FFF2-40B4-BE49-F238E27FC236}">
+                <a16:creationId xmlns:a16="http://schemas.microsoft.com/office/drawing/2014/main" id="{0878BD1E-7A47-D4D6-E303-8B14BE4D961C}"/>
+              </a:ext>
+            </a:extLst>
+          </p:cNvPr>
+          <p:cNvSpPr>
+            <a:spLocks noGrp="1"/>
+          </p:cNvSpPr>
+          <p:nvPr>
+            <p:ph idx="1"/>
+          </p:nvPr>
+        </p:nvSpPr>
+        <p:spPr/>
+        <p:txBody>
+          <a:bodyPr anchor="t">
+            <a:noAutofit/>
+          </a:bodyPr>
+          <a:lstStyle/>
+          <a:p>
+            <a:r>
+              <a:rPr lang="en-US" sz="2400" dirty="0">
+                <a:effectLst/>
+              </a:rPr>
+              <a:t>Name three examples of how AI is used for decision making</a:t>
+            </a:r>
+          </a:p>
+          <a:p>
+            <a:endParaRPr lang="en-US" sz="2400" dirty="0">
+              <a:effectLst/>
+            </a:endParaRPr>
+          </a:p>
+          <a:p>
+            <a:endParaRPr lang="en-US" sz="2400" dirty="0">
+              <a:effectLst/>
+            </a:endParaRPr>
+          </a:p>
+          <a:p>
+            <a:r>
+              <a:rPr lang="en-US" sz="2400" dirty="0">
+                <a:effectLst/>
+              </a:rPr>
+              <a:t>What recourse do the people impacted by these decisions have if they disagree? </a:t>
+            </a:r>
+          </a:p>
+        </p:txBody>
+      </p:sp>
+    </p:spTree>
+    <p:extLst>
+      <p:ext uri="{BB962C8B-B14F-4D97-AF65-F5344CB8AC3E}">
+        <p14:creationId xmlns:p14="http://schemas.microsoft.com/office/powerpoint/2010/main" val="1999072092"/>
+      </p:ext>
+    </p:extLst>
+  </p:cSld>
+  <p:clrMapOvr>
+    <a:masterClrMapping/>
+  </p:clrMapOvr>
+  <p:timing>
+    <p:tnLst>
+      <p:par>
+        <p:cTn id="1" dur="indefinite" restart="never" nodeType="tmRoot">
+          <p:childTnLst>
+            <p:seq concurrent="1" nextAc="seek">
+              <p:cTn id="2" dur="indefinite" nodeType="mainSeq">
+                <p:childTnLst>
+                  <p:par>
+                    <p:cTn id="3" fill="hold">
+                      <p:stCondLst>
+                        <p:cond delay="indefinite"/>
+                      </p:stCondLst>
+                      <p:childTnLst>
+                        <p:par>
+                          <p:cTn id="4" fill="hold">
+                            <p:stCondLst>
+                              <p:cond delay="0"/>
+                            </p:stCondLst>
+                            <p:childTnLst>
+                              <p:par>
+                                <p:cTn id="5" presetID="1" presetClass="entr" presetSubtype="0" fill="hold" nodeType="clickEffect">
+                                  <p:stCondLst>
+                                    <p:cond delay="0"/>
+                                  </p:stCondLst>
+                                  <p:childTnLst>
+                                    <p:set>
+                                      <p:cBhvr>
+                                        <p:cTn id="6" dur="1" fill="hold">
+                                          <p:stCondLst>
+                                            <p:cond delay="0"/>
+                                          </p:stCondLst>
+                                        </p:cTn>
+                                        <p:tgtEl>
+                                          <p:spTgt spid="3">
+                                            <p:txEl>
+                                              <p:pRg st="3" end="3"/>
+                                            </p:txEl>
+                                          </p:spTgt>
+                                        </p:tgtEl>
+                                        <p:attrNameLst>
+                                          <p:attrName>style.visibility</p:attrName>
+                                        </p:attrNameLst>
+                                      </p:cBhvr>
+                                      <p:to>
+                                        <p:strVal val="visible"/>
+                                      </p:to>
+                                    </p:set>
+                                  </p:childTnLst>
+                                </p:cTn>
+                              </p:par>
+                            </p:childTnLst>
+                          </p:cTn>
+                        </p:par>
+                      </p:childTnLst>
+                    </p:cTn>
+                  </p:par>
+                </p:childTnLst>
+              </p:cTn>
+              <p:prevCondLst>
+                <p:cond evt="onPrev" delay="0">
+                  <p:tgtEl>
+                    <p:sldTgt/>
+                  </p:tgtEl>
+                </p:cond>
+              </p:prevCondLst>
+              <p:nextCondLst>
+                <p:cond evt="onNext" delay="0">
+                  <p:tgtEl>
+                    <p:sldTgt/>
+                  </p:tgtEl>
+                </p:cond>
+              </p:nextCondLst>
+            </p:seq>
+          </p:childTnLst>
+        </p:cTn>
+      </p:par>
+    </p:tnLst>
+  </p:timing>
+</p:sld>
+</file>
+
+<file path=ppt/slides/slide5.xml><?xml version="1.0" encoding="utf-8"?>
+<p:sld xmlns:a="http://schemas.openxmlformats.org/drawingml/2006/main" xmlns:r="http://schemas.openxmlformats.org/officeDocument/2006/relationships" xmlns:p="http://schemas.openxmlformats.org/presentationml/2006/main">
+  <p:cSld>
+    <p:spTree>
+      <p:nvGrpSpPr>
+        <p:cNvPr id="1" name="">
+          <a:extLst>
+            <a:ext uri="{FF2B5EF4-FFF2-40B4-BE49-F238E27FC236}">
+              <a16:creationId xmlns:a16="http://schemas.microsoft.com/office/drawing/2014/main" id="{7BC2FC27-CB76-18B3-66BE-67A99476EB4F}"/>
+            </a:ext>
+          </a:extLst>
+        </p:cNvPr>
+        <p:cNvGrpSpPr/>
+        <p:nvPr/>
+      </p:nvGrpSpPr>
+      <p:grpSpPr>
+        <a:xfrm>
+          <a:off x="0" y="0"/>
+          <a:ext cx="0" cy="0"/>
+          <a:chOff x="0" y="0"/>
+          <a:chExt cx="0" cy="0"/>
+        </a:xfrm>
+      </p:grpSpPr>
+      <p:sp>
+        <p:nvSpPr>
+          <p:cNvPr id="2" name="Title 1">
+            <a:extLst>
+              <a:ext uri="{FF2B5EF4-FFF2-40B4-BE49-F238E27FC236}">
+                <a16:creationId xmlns:a16="http://schemas.microsoft.com/office/drawing/2014/main" id="{42F97C9F-836D-6E8A-C625-DABE2544F7DD}"/>
+              </a:ext>
+            </a:extLst>
+          </p:cNvPr>
+          <p:cNvSpPr>
+            <a:spLocks noGrp="1"/>
+          </p:cNvSpPr>
+          <p:nvPr>
+            <p:ph type="title"/>
+          </p:nvPr>
+        </p:nvSpPr>
+        <p:spPr/>
+        <p:txBody>
+          <a:bodyPr/>
+          <a:lstStyle/>
+          <a:p>
+            <a:r>
+              <a:rPr lang="en-US" dirty="0"/>
+              <a:t>why </a:t>
+            </a:r>
+            <a:r>
+              <a:rPr lang="en-US" dirty="0" err="1"/>
+              <a:t>xai</a:t>
+            </a:r>
+            <a:r>
+              <a:rPr lang="en-US" dirty="0"/>
+              <a:t> matters</a:t>
+            </a:r>
+          </a:p>
+        </p:txBody>
+      </p:sp>
+      <p:sp>
+        <p:nvSpPr>
+          <p:cNvPr id="3" name="Content Placeholder 2">
+            <a:extLst>
+              <a:ext uri="{FF2B5EF4-FFF2-40B4-BE49-F238E27FC236}">
+                <a16:creationId xmlns:a16="http://schemas.microsoft.com/office/drawing/2014/main" id="{45E83257-187B-2D18-9B65-A4971792FDDB}"/>
+              </a:ext>
+            </a:extLst>
+          </p:cNvPr>
+          <p:cNvSpPr>
+            <a:spLocks noGrp="1"/>
+          </p:cNvSpPr>
+          <p:nvPr>
+            <p:ph idx="1"/>
+          </p:nvPr>
+        </p:nvSpPr>
+        <p:spPr/>
+        <p:txBody>
+          <a:bodyPr anchor="t">
+            <a:noAutofit/>
+          </a:bodyPr>
+          <a:lstStyle/>
+          <a:p>
+            <a:r>
+              <a:rPr lang="en-US" sz="2400" dirty="0">
+                <a:effectLst/>
+              </a:rPr>
+              <a:t>One method by which we can reduce the power discrepancies in AI decision making is by revealing the algorithmic process behind the decisions, or in other words developing </a:t>
+            </a:r>
+            <a:r>
+              <a:rPr lang="en-US" sz="2400" dirty="0">
+                <a:effectLst>
+                  <a:glow rad="228600">
+                    <a:schemeClr val="accent5">
+                      <a:satMod val="175000"/>
+                      <a:alpha val="40000"/>
+                    </a:schemeClr>
+                  </a:glow>
+                </a:effectLst>
+              </a:rPr>
+              <a:t>methods to explain AI output (Explainable AI) </a:t>
+            </a:r>
+          </a:p>
+          <a:p>
+            <a:r>
+              <a:rPr lang="en-US" sz="2400" dirty="0">
+                <a:effectLst/>
+              </a:rPr>
+              <a:t>XAI focuses on topics including:</a:t>
+            </a:r>
+          </a:p>
+          <a:p>
+            <a:pPr lvl="1"/>
+            <a:r>
+              <a:rPr lang="en-US" sz="2200" dirty="0">
+                <a:effectLst/>
+              </a:rPr>
+              <a:t>Trust </a:t>
+            </a:r>
+          </a:p>
+          <a:p>
+            <a:pPr lvl="1"/>
+            <a:r>
+              <a:rPr lang="en-US" sz="2200" dirty="0">
+                <a:effectLst/>
+              </a:rPr>
+              <a:t>Interpretability </a:t>
+            </a:r>
+          </a:p>
+          <a:p>
+            <a:pPr lvl="1"/>
+            <a:r>
+              <a:rPr lang="en-US" sz="2200" dirty="0">
+                <a:effectLst/>
+              </a:rPr>
+              <a:t>Explainability </a:t>
+            </a:r>
+          </a:p>
+        </p:txBody>
+      </p:sp>
+      <p:sp>
+        <p:nvSpPr>
+          <p:cNvPr id="5" name="TextBox 4">
+            <a:extLst>
+              <a:ext uri="{FF2B5EF4-FFF2-40B4-BE49-F238E27FC236}">
+                <a16:creationId xmlns:a16="http://schemas.microsoft.com/office/drawing/2014/main" id="{882F3655-2385-2023-CA0C-36531DA70838}"/>
+              </a:ext>
+            </a:extLst>
+          </p:cNvPr>
+          <p:cNvSpPr txBox="1"/>
+          <p:nvPr/>
+        </p:nvSpPr>
+        <p:spPr>
+          <a:xfrm>
+            <a:off x="6248400" y="6155844"/>
+            <a:ext cx="6294120" cy="584775"/>
+          </a:xfrm>
+          <a:prstGeom prst="rect">
+            <a:avLst/>
+          </a:prstGeom>
+          <a:noFill/>
+        </p:spPr>
+        <p:txBody>
+          <a:bodyPr wrap="square">
+            <a:spAutoFit/>
+          </a:bodyPr>
+          <a:lstStyle/>
+          <a:p>
+            <a:r>
+              <a:rPr lang="en-US" sz="1600" b="0" i="0" dirty="0">
+                <a:solidFill>
+                  <a:srgbClr val="333333"/>
+                </a:solidFill>
+                <a:effectLst/>
+                <a:latin typeface="+mj-lt"/>
+              </a:rPr>
+              <a:t>A. </a:t>
+            </a:r>
+            <a:r>
+              <a:rPr lang="en-US" sz="1600" b="0" i="0" dirty="0" err="1">
+                <a:solidFill>
+                  <a:srgbClr val="333333"/>
+                </a:solidFill>
+                <a:effectLst/>
+                <a:latin typeface="+mj-lt"/>
+              </a:rPr>
+              <a:t>Chatzimparmpas</a:t>
+            </a:r>
+            <a:r>
+              <a:rPr lang="en-US" sz="1600" b="0" i="0" dirty="0">
+                <a:solidFill>
+                  <a:srgbClr val="333333"/>
+                </a:solidFill>
+                <a:effectLst/>
+                <a:latin typeface="+mj-lt"/>
+              </a:rPr>
+              <a:t>, "Visual Analytics for Explainable and Trustworthy Artificial Intelligence,” 2025, </a:t>
+            </a:r>
+            <a:r>
+              <a:rPr lang="en-US" sz="1600" b="0" i="0" dirty="0" err="1">
+                <a:solidFill>
+                  <a:srgbClr val="333333"/>
+                </a:solidFill>
+                <a:effectLst/>
+                <a:latin typeface="+mj-lt"/>
+              </a:rPr>
+              <a:t>doi</a:t>
+            </a:r>
+            <a:r>
+              <a:rPr lang="en-US" sz="1600" b="0" i="0" dirty="0">
+                <a:solidFill>
+                  <a:srgbClr val="333333"/>
+                </a:solidFill>
+                <a:effectLst/>
+                <a:latin typeface="+mj-lt"/>
+              </a:rPr>
+              <a:t>: 10.1109/MCG.2025.3533806</a:t>
+            </a:r>
+            <a:r>
+              <a:rPr lang="en-US" sz="1600" dirty="0">
+                <a:solidFill>
+                  <a:srgbClr val="333333"/>
+                </a:solidFill>
+                <a:latin typeface="+mj-lt"/>
+              </a:rPr>
+              <a:t> </a:t>
+            </a:r>
+            <a:endParaRPr lang="en-US" sz="1600" dirty="0">
+              <a:latin typeface="+mj-lt"/>
+            </a:endParaRPr>
+          </a:p>
+        </p:txBody>
+      </p:sp>
+    </p:spTree>
+    <p:extLst>
+      <p:ext uri="{BB962C8B-B14F-4D97-AF65-F5344CB8AC3E}">
+        <p14:creationId xmlns:p14="http://schemas.microsoft.com/office/powerpoint/2010/main" val="3565607105"/>
+      </p:ext>
+    </p:extLst>
+  </p:cSld>
+  <p:clrMapOvr>
+    <a:masterClrMapping/>
+  </p:clrMapOvr>
+</p:sld>
+</file>
+
+<file path=ppt/slides/slide6.xml><?xml version="1.0" encoding="utf-8"?>
+<p:sld xmlns:a="http://schemas.openxmlformats.org/drawingml/2006/main" xmlns:r="http://schemas.openxmlformats.org/officeDocument/2006/relationships" xmlns:p="http://schemas.openxmlformats.org/presentationml/2006/main">
+  <p:cSld>
+    <p:spTree>
+      <p:nvGrpSpPr>
+        <p:cNvPr id="1" name="">
+          <a:extLst>
+            <a:ext uri="{FF2B5EF4-FFF2-40B4-BE49-F238E27FC236}">
+              <a16:creationId xmlns:a16="http://schemas.microsoft.com/office/drawing/2014/main" id="{F6DAE32D-A06B-551E-3C79-A2777FB9893E}"/>
+            </a:ext>
+          </a:extLst>
+        </p:cNvPr>
+        <p:cNvGrpSpPr/>
+        <p:nvPr/>
+      </p:nvGrpSpPr>
+      <p:grpSpPr>
+        <a:xfrm>
+          <a:off x="0" y="0"/>
+          <a:ext cx="0" cy="0"/>
+          <a:chOff x="0" y="0"/>
+          <a:chExt cx="0" cy="0"/>
+        </a:xfrm>
+      </p:grpSpPr>
+      <p:sp>
+        <p:nvSpPr>
+          <p:cNvPr id="2" name="Title 1">
+            <a:extLst>
+              <a:ext uri="{FF2B5EF4-FFF2-40B4-BE49-F238E27FC236}">
+                <a16:creationId xmlns:a16="http://schemas.microsoft.com/office/drawing/2014/main" id="{FE120BBB-B7E2-0E88-7252-C78BB70E22CE}"/>
+              </a:ext>
+            </a:extLst>
+          </p:cNvPr>
+          <p:cNvSpPr>
+            <a:spLocks noGrp="1"/>
+          </p:cNvSpPr>
+          <p:nvPr>
+            <p:ph type="title"/>
+          </p:nvPr>
+        </p:nvSpPr>
+        <p:spPr/>
+        <p:txBody>
+          <a:bodyPr/>
+          <a:lstStyle/>
+          <a:p>
+            <a:r>
+              <a:rPr lang="en-US" dirty="0" err="1"/>
+              <a:t>xai</a:t>
+            </a:r>
+            <a:r>
+              <a:rPr lang="en-US" dirty="0"/>
+              <a:t> and Visualization</a:t>
+            </a:r>
+          </a:p>
+        </p:txBody>
+      </p:sp>
+      <p:sp>
+        <p:nvSpPr>
+          <p:cNvPr id="5" name="TextBox 4">
+            <a:extLst>
+              <a:ext uri="{FF2B5EF4-FFF2-40B4-BE49-F238E27FC236}">
+                <a16:creationId xmlns:a16="http://schemas.microsoft.com/office/drawing/2014/main" id="{EA1658A4-3B9A-8C14-3C1B-64291F203579}"/>
+              </a:ext>
+            </a:extLst>
+          </p:cNvPr>
+          <p:cNvSpPr txBox="1"/>
+          <p:nvPr/>
+        </p:nvSpPr>
+        <p:spPr>
+          <a:xfrm>
+            <a:off x="838200" y="6554793"/>
+            <a:ext cx="13030200" cy="307777"/>
+          </a:xfrm>
+          <a:prstGeom prst="rect">
+            <a:avLst/>
+          </a:prstGeom>
+          <a:noFill/>
+        </p:spPr>
+        <p:txBody>
+          <a:bodyPr wrap="square">
+            <a:spAutoFit/>
+          </a:bodyPr>
+          <a:lstStyle/>
+          <a:p>
+            <a:r>
+              <a:rPr lang="en-US" sz="1400" b="0" i="0" dirty="0">
+                <a:solidFill>
+                  <a:srgbClr val="333333"/>
+                </a:solidFill>
+                <a:effectLst/>
+                <a:latin typeface="+mj-lt"/>
+              </a:rPr>
+              <a:t>A. </a:t>
+            </a:r>
+            <a:r>
+              <a:rPr lang="en-US" sz="1400" b="0" i="0" dirty="0" err="1">
+                <a:solidFill>
+                  <a:srgbClr val="333333"/>
+                </a:solidFill>
+                <a:effectLst/>
+                <a:latin typeface="+mj-lt"/>
+              </a:rPr>
+              <a:t>Chatzimparmpas</a:t>
+            </a:r>
+            <a:r>
+              <a:rPr lang="en-US" sz="1400" b="0" i="0" dirty="0">
+                <a:solidFill>
+                  <a:srgbClr val="333333"/>
+                </a:solidFill>
+                <a:effectLst/>
+                <a:latin typeface="+mj-lt"/>
+              </a:rPr>
+              <a:t> et al</a:t>
+            </a:r>
+            <a:r>
+              <a:rPr lang="en-US" sz="1400" dirty="0">
+                <a:solidFill>
+                  <a:srgbClr val="333333"/>
+                </a:solidFill>
+                <a:latin typeface="+mj-lt"/>
+              </a:rPr>
+              <a:t>., "</a:t>
+            </a:r>
+            <a:r>
+              <a:rPr lang="en-US" sz="1400" dirty="0">
+                <a:latin typeface="+mj-lt"/>
+              </a:rPr>
+              <a:t> A survey of surveys on the use of visualization for interpreting machine learning models</a:t>
+            </a:r>
+            <a:r>
+              <a:rPr lang="en-US" sz="1400" dirty="0">
+                <a:solidFill>
+                  <a:srgbClr val="333333"/>
+                </a:solidFill>
+                <a:latin typeface="+mj-lt"/>
+              </a:rPr>
+              <a:t>,” </a:t>
+            </a:r>
+            <a:r>
+              <a:rPr lang="en-US" sz="1400" b="0" i="0" dirty="0">
+                <a:solidFill>
+                  <a:srgbClr val="333333"/>
+                </a:solidFill>
+                <a:effectLst/>
+                <a:latin typeface="+mj-lt"/>
+              </a:rPr>
+              <a:t>2020, </a:t>
+            </a:r>
+            <a:r>
+              <a:rPr lang="en-US" sz="1400" b="0" i="0" dirty="0" err="1">
+                <a:solidFill>
+                  <a:srgbClr val="333333"/>
+                </a:solidFill>
+                <a:effectLst/>
+                <a:latin typeface="+mj-lt"/>
+              </a:rPr>
+              <a:t>doi</a:t>
+            </a:r>
+            <a:r>
+              <a:rPr lang="en-US" sz="1400" b="0" i="0" dirty="0">
+                <a:solidFill>
+                  <a:srgbClr val="333333"/>
+                </a:solidFill>
+                <a:effectLst/>
+                <a:latin typeface="+mj-lt"/>
+              </a:rPr>
+              <a:t>: </a:t>
+            </a:r>
+            <a:r>
+              <a:rPr lang="en-US" sz="1400" dirty="0">
+                <a:solidFill>
+                  <a:srgbClr val="333333"/>
+                </a:solidFill>
+                <a:latin typeface="+mj-lt"/>
+              </a:rPr>
+              <a:t>10.1177/1473871620904671 </a:t>
+            </a:r>
+            <a:endParaRPr lang="en-US" sz="1400" dirty="0">
+              <a:latin typeface="+mj-lt"/>
+            </a:endParaRPr>
+          </a:p>
+        </p:txBody>
+      </p:sp>
+      <p:pic>
+        <p:nvPicPr>
+          <p:cNvPr id="18" name="Content Placeholder 17" descr="A graph with blue squares&#10;&#10;AI-generated content may be incorrect.">
+            <a:extLst>
+              <a:ext uri="{FF2B5EF4-FFF2-40B4-BE49-F238E27FC236}">
+                <a16:creationId xmlns:a16="http://schemas.microsoft.com/office/drawing/2014/main" id="{9701B955-8CEF-8BE3-E779-98402B72B296}"/>
+              </a:ext>
+            </a:extLst>
+          </p:cNvPr>
+          <p:cNvPicPr>
+            <a:picLocks noGrp="1" noChangeAspect="1"/>
+          </p:cNvPicPr>
+          <p:nvPr>
+            <p:ph idx="1"/>
+          </p:nvPr>
+        </p:nvPicPr>
+        <p:blipFill>
+          <a:blip r:embed="rId3"/>
+          <a:stretch>
+            <a:fillRect/>
+          </a:stretch>
+        </p:blipFill>
+        <p:spPr>
+          <a:xfrm rot="5400000">
+            <a:off x="3301070" y="-1070802"/>
+            <a:ext cx="4756581" cy="10566241"/>
+          </a:xfrm>
+          <a:prstGeom prst="rect">
+            <a:avLst/>
+          </a:prstGeom>
+        </p:spPr>
+      </p:pic>
+    </p:spTree>
+    <p:extLst>
+      <p:ext uri="{BB962C8B-B14F-4D97-AF65-F5344CB8AC3E}">
+        <p14:creationId xmlns:p14="http://schemas.microsoft.com/office/powerpoint/2010/main" val="243507596"/>
+      </p:ext>
+    </p:extLst>
+  </p:cSld>
+  <p:clrMapOvr>
+    <a:masterClrMapping/>
+  </p:clrMapOvr>
+</p:sld>
+</file>
+
+<file path=ppt/slides/slide7.xml><?xml version="1.0" encoding="utf-8"?>
+<p:sld xmlns:a="http://schemas.openxmlformats.org/drawingml/2006/main" xmlns:r="http://schemas.openxmlformats.org/officeDocument/2006/relationships" xmlns:p="http://schemas.openxmlformats.org/presentationml/2006/main">
+  <p:cSld>
+    <p:spTree>
+      <p:nvGrpSpPr>
+        <p:cNvPr id="1" name="">
+          <a:extLst>
+            <a:ext uri="{FF2B5EF4-FFF2-40B4-BE49-F238E27FC236}">
+              <a16:creationId xmlns:a16="http://schemas.microsoft.com/office/drawing/2014/main" id="{FD1751E0-B042-C3D8-E9C5-A228E6DE8BD0}"/>
+            </a:ext>
+          </a:extLst>
+        </p:cNvPr>
+        <p:cNvGrpSpPr/>
+        <p:nvPr/>
+      </p:nvGrpSpPr>
+      <p:grpSpPr>
+        <a:xfrm>
+          <a:off x="0" y="0"/>
+          <a:ext cx="0" cy="0"/>
+          <a:chOff x="0" y="0"/>
+          <a:chExt cx="0" cy="0"/>
+        </a:xfrm>
+      </p:grpSpPr>
+      <p:sp>
+        <p:nvSpPr>
+          <p:cNvPr id="2" name="Title 1">
+            <a:extLst>
+              <a:ext uri="{FF2B5EF4-FFF2-40B4-BE49-F238E27FC236}">
+                <a16:creationId xmlns:a16="http://schemas.microsoft.com/office/drawing/2014/main" id="{E98B831B-A422-10BC-6F2F-3FCA2C81FEB8}"/>
+              </a:ext>
+            </a:extLst>
+          </p:cNvPr>
+          <p:cNvSpPr>
+            <a:spLocks noGrp="1"/>
+          </p:cNvSpPr>
+          <p:nvPr>
+            <p:ph type="title"/>
+          </p:nvPr>
+        </p:nvSpPr>
+        <p:spPr/>
+        <p:txBody>
+          <a:bodyPr/>
+          <a:lstStyle/>
+          <a:p>
+            <a:r>
+              <a:rPr lang="en-US" dirty="0" err="1"/>
+              <a:t>xai</a:t>
+            </a:r>
+            <a:r>
+              <a:rPr lang="en-US" dirty="0"/>
+              <a:t> and Visualization: design space</a:t>
+            </a:r>
+          </a:p>
+        </p:txBody>
+      </p:sp>
+      <p:pic>
+        <p:nvPicPr>
+          <p:cNvPr id="7" name="Content Placeholder 6" descr="A diagram of a software development&#10;&#10;AI-generated content may be incorrect.">
+            <a:extLst>
+              <a:ext uri="{FF2B5EF4-FFF2-40B4-BE49-F238E27FC236}">
+                <a16:creationId xmlns:a16="http://schemas.microsoft.com/office/drawing/2014/main" id="{79643AEE-38C7-50A0-8BAE-D834D9D8DBD9}"/>
+              </a:ext>
+            </a:extLst>
+          </p:cNvPr>
+          <p:cNvPicPr>
+            <a:picLocks noGrp="1" noChangeAspect="1"/>
+          </p:cNvPicPr>
+          <p:nvPr>
+            <p:ph idx="1"/>
+          </p:nvPr>
+        </p:nvPicPr>
+        <p:blipFill>
+          <a:blip r:embed="rId3"/>
+          <a:stretch>
+            <a:fillRect/>
+          </a:stretch>
+        </p:blipFill>
+        <p:spPr>
+          <a:xfrm>
+            <a:off x="1399670" y="1879421"/>
+            <a:ext cx="9392660" cy="4276423"/>
+          </a:xfrm>
+          <a:prstGeom prst="rect">
+            <a:avLst/>
+          </a:prstGeom>
+        </p:spPr>
+      </p:pic>
+      <p:sp>
+        <p:nvSpPr>
+          <p:cNvPr id="8" name="TextBox 7">
+            <a:extLst>
+              <a:ext uri="{FF2B5EF4-FFF2-40B4-BE49-F238E27FC236}">
+                <a16:creationId xmlns:a16="http://schemas.microsoft.com/office/drawing/2014/main" id="{6121A214-7C26-4495-6247-8ECBAF744113}"/>
+              </a:ext>
+            </a:extLst>
+          </p:cNvPr>
+          <p:cNvSpPr txBox="1"/>
+          <p:nvPr/>
+        </p:nvSpPr>
+        <p:spPr>
+          <a:xfrm>
+            <a:off x="6248400" y="6155844"/>
+            <a:ext cx="6294120" cy="584775"/>
+          </a:xfrm>
+          <a:prstGeom prst="rect">
+            <a:avLst/>
+          </a:prstGeom>
+          <a:noFill/>
+        </p:spPr>
+        <p:txBody>
+          <a:bodyPr wrap="square">
+            <a:spAutoFit/>
+          </a:bodyPr>
+          <a:lstStyle/>
+          <a:p>
+            <a:r>
+              <a:rPr lang="en-US" sz="1600" b="0" i="0" dirty="0">
+                <a:solidFill>
+                  <a:srgbClr val="333333"/>
+                </a:solidFill>
+                <a:effectLst/>
+                <a:latin typeface="+mj-lt"/>
+              </a:rPr>
+              <a:t>A. </a:t>
+            </a:r>
+            <a:r>
+              <a:rPr lang="en-US" sz="1600" b="0" i="0" dirty="0" err="1">
+                <a:solidFill>
+                  <a:srgbClr val="333333"/>
+                </a:solidFill>
+                <a:effectLst/>
+                <a:latin typeface="+mj-lt"/>
+              </a:rPr>
+              <a:t>Chatzimparmpas</a:t>
+            </a:r>
+            <a:r>
+              <a:rPr lang="en-US" sz="1600" b="0" i="0" dirty="0">
+                <a:solidFill>
+                  <a:srgbClr val="333333"/>
+                </a:solidFill>
+                <a:effectLst/>
+                <a:latin typeface="+mj-lt"/>
+              </a:rPr>
+              <a:t>, "Visual Analytics for Explainable and Trustworthy Artificial Intelligence,” 2025, </a:t>
+            </a:r>
+            <a:r>
+              <a:rPr lang="en-US" sz="1600" b="0" i="0" dirty="0" err="1">
+                <a:solidFill>
+                  <a:srgbClr val="333333"/>
+                </a:solidFill>
+                <a:effectLst/>
+                <a:latin typeface="+mj-lt"/>
+              </a:rPr>
+              <a:t>doi</a:t>
+            </a:r>
+            <a:r>
+              <a:rPr lang="en-US" sz="1600" b="0" i="0" dirty="0">
+                <a:solidFill>
+                  <a:srgbClr val="333333"/>
+                </a:solidFill>
+                <a:effectLst/>
+                <a:latin typeface="+mj-lt"/>
+              </a:rPr>
+              <a:t>: 10.1109/MCG.2025.3533806</a:t>
+            </a:r>
+            <a:r>
+              <a:rPr lang="en-US" sz="1600" dirty="0">
+                <a:solidFill>
+                  <a:srgbClr val="333333"/>
+                </a:solidFill>
+                <a:latin typeface="+mj-lt"/>
+              </a:rPr>
+              <a:t> </a:t>
+            </a:r>
+            <a:endParaRPr lang="en-US" sz="1600" dirty="0">
+              <a:latin typeface="+mj-lt"/>
+            </a:endParaRPr>
+          </a:p>
+        </p:txBody>
+      </p:sp>
+    </p:spTree>
+    <p:extLst>
+      <p:ext uri="{BB962C8B-B14F-4D97-AF65-F5344CB8AC3E}">
+        <p14:creationId xmlns:p14="http://schemas.microsoft.com/office/powerpoint/2010/main" val="3078089745"/>
+      </p:ext>
+    </p:extLst>
+  </p:cSld>
+  <p:clrMapOvr>
+    <a:masterClrMapping/>
+  </p:clrMapOvr>
+</p:sld>
+</file>
+
+<file path=ppt/slides/slide8.xml><?xml version="1.0" encoding="utf-8"?>
+<p:sld xmlns:a="http://schemas.openxmlformats.org/drawingml/2006/main" xmlns:r="http://schemas.openxmlformats.org/officeDocument/2006/relationships" xmlns:p="http://schemas.openxmlformats.org/presentationml/2006/main">
+  <p:cSld>
+    <p:spTree>
+      <p:nvGrpSpPr>
+        <p:cNvPr id="1" name="">
+          <a:extLst>
+            <a:ext uri="{FF2B5EF4-FFF2-40B4-BE49-F238E27FC236}">
+              <a16:creationId xmlns:a16="http://schemas.microsoft.com/office/drawing/2014/main" id="{BC266046-2275-5889-E1C4-8F11E6AA0F89}"/>
+            </a:ext>
+          </a:extLst>
+        </p:cNvPr>
+        <p:cNvGrpSpPr/>
+        <p:nvPr/>
+      </p:nvGrpSpPr>
+      <p:grpSpPr>
+        <a:xfrm>
+          <a:off x="0" y="0"/>
+          <a:ext cx="0" cy="0"/>
+          <a:chOff x="0" y="0"/>
+          <a:chExt cx="0" cy="0"/>
+        </a:xfrm>
+      </p:grpSpPr>
+      <p:sp>
+        <p:nvSpPr>
+          <p:cNvPr id="2" name="Title 1">
+            <a:extLst>
+              <a:ext uri="{FF2B5EF4-FFF2-40B4-BE49-F238E27FC236}">
+                <a16:creationId xmlns:a16="http://schemas.microsoft.com/office/drawing/2014/main" id="{AED991B0-B933-231F-134D-AC91E47B067E}"/>
+              </a:ext>
+            </a:extLst>
+          </p:cNvPr>
+          <p:cNvSpPr>
+            <a:spLocks noGrp="1"/>
+          </p:cNvSpPr>
+          <p:nvPr>
+            <p:ph type="title"/>
+          </p:nvPr>
+        </p:nvSpPr>
+        <p:spPr/>
+        <p:txBody>
+          <a:bodyPr/>
+          <a:lstStyle/>
+          <a:p>
+            <a:r>
+              <a:rPr lang="en-US" dirty="0" err="1"/>
+              <a:t>xai</a:t>
+            </a:r>
+            <a:r>
+              <a:rPr lang="en-US" dirty="0"/>
+              <a:t> and Visualization: data processing </a:t>
+            </a:r>
+          </a:p>
+        </p:txBody>
+      </p:sp>
+      <p:sp>
+        <p:nvSpPr>
+          <p:cNvPr id="8" name="TextBox 7">
+            <a:extLst>
+              <a:ext uri="{FF2B5EF4-FFF2-40B4-BE49-F238E27FC236}">
+                <a16:creationId xmlns:a16="http://schemas.microsoft.com/office/drawing/2014/main" id="{4E14EF2B-D06F-6F9E-EDE5-2E72F0366AF1}"/>
+              </a:ext>
+            </a:extLst>
+          </p:cNvPr>
+          <p:cNvSpPr txBox="1"/>
+          <p:nvPr/>
+        </p:nvSpPr>
+        <p:spPr>
+          <a:xfrm>
+            <a:off x="6248400" y="6155844"/>
+            <a:ext cx="6294120" cy="584775"/>
+          </a:xfrm>
+          <a:prstGeom prst="rect">
+            <a:avLst/>
+          </a:prstGeom>
+          <a:noFill/>
+        </p:spPr>
+        <p:txBody>
+          <a:bodyPr wrap="square">
+            <a:spAutoFit/>
+          </a:bodyPr>
+          <a:lstStyle/>
+          <a:p>
+            <a:r>
+              <a:rPr lang="en-US" sz="1600" b="0" i="0" dirty="0">
+                <a:solidFill>
+                  <a:srgbClr val="333333"/>
+                </a:solidFill>
+                <a:effectLst/>
+                <a:latin typeface="+mj-lt"/>
+              </a:rPr>
+              <a:t>A. </a:t>
+            </a:r>
+            <a:r>
+              <a:rPr lang="en-US" sz="1600" b="0" i="0" dirty="0" err="1">
+                <a:solidFill>
+                  <a:srgbClr val="333333"/>
+                </a:solidFill>
+                <a:effectLst/>
+                <a:latin typeface="+mj-lt"/>
+              </a:rPr>
+              <a:t>Chatzimparmpas</a:t>
+            </a:r>
+            <a:r>
+              <a:rPr lang="en-US" sz="1600" b="0" i="0" dirty="0">
+                <a:solidFill>
+                  <a:srgbClr val="333333"/>
+                </a:solidFill>
+                <a:effectLst/>
+                <a:latin typeface="+mj-lt"/>
+              </a:rPr>
+              <a:t>, "Visual Analytics for Explainable and Trustworthy Artificial Intelligence,” 2025, </a:t>
+            </a:r>
+            <a:r>
+              <a:rPr lang="en-US" sz="1600" b="0" i="0" dirty="0" err="1">
+                <a:solidFill>
+                  <a:srgbClr val="333333"/>
+                </a:solidFill>
+                <a:effectLst/>
+                <a:latin typeface="+mj-lt"/>
+              </a:rPr>
+              <a:t>doi</a:t>
+            </a:r>
+            <a:r>
+              <a:rPr lang="en-US" sz="1600" b="0" i="0" dirty="0">
+                <a:solidFill>
+                  <a:srgbClr val="333333"/>
+                </a:solidFill>
+                <a:effectLst/>
+                <a:latin typeface="+mj-lt"/>
+              </a:rPr>
+              <a:t>: 10.1109/MCG.2025.3533806</a:t>
+            </a:r>
+            <a:r>
+              <a:rPr lang="en-US" sz="1600" dirty="0">
+                <a:solidFill>
+                  <a:srgbClr val="333333"/>
+                </a:solidFill>
+                <a:latin typeface="+mj-lt"/>
+              </a:rPr>
+              <a:t> </a:t>
+            </a:r>
+            <a:endParaRPr lang="en-US" sz="1600" dirty="0">
+              <a:latin typeface="+mj-lt"/>
+            </a:endParaRPr>
+          </a:p>
+        </p:txBody>
+      </p:sp>
+      <p:sp>
+        <p:nvSpPr>
+          <p:cNvPr id="4" name="Content Placeholder 3">
+            <a:extLst>
+              <a:ext uri="{FF2B5EF4-FFF2-40B4-BE49-F238E27FC236}">
+                <a16:creationId xmlns:a16="http://schemas.microsoft.com/office/drawing/2014/main" id="{E90FD46A-8B05-6366-A2CB-C4AA63BBE281}"/>
+              </a:ext>
+            </a:extLst>
+          </p:cNvPr>
+          <p:cNvSpPr>
+            <a:spLocks noGrp="1"/>
+          </p:cNvSpPr>
+          <p:nvPr>
+            <p:ph idx="1"/>
+          </p:nvPr>
+        </p:nvSpPr>
+        <p:spPr/>
+        <p:txBody>
+          <a:bodyPr/>
+          <a:lstStyle/>
+          <a:p>
+            <a:r>
+              <a:rPr lang="en-US" dirty="0" err="1"/>
+              <a:t>HardVis</a:t>
+            </a:r>
+            <a:r>
+              <a:rPr lang="en-US" dirty="0"/>
+              <a:t> [12] </a:t>
+            </a:r>
+          </a:p>
+          <a:p>
+            <a:endParaRPr lang="en-US" dirty="0"/>
+          </a:p>
+        </p:txBody>
+      </p:sp>
+    </p:spTree>
+    <p:extLst>
+      <p:ext uri="{BB962C8B-B14F-4D97-AF65-F5344CB8AC3E}">
+        <p14:creationId xmlns:p14="http://schemas.microsoft.com/office/powerpoint/2010/main" val="2122876248"/>
+      </p:ext>
+    </p:extLst>
+  </p:cSld>
+  <p:clrMapOvr>
+    <a:masterClrMapping/>
+  </p:clrMapOvr>
+</p:sld>
+</file>
+
+<file path=ppt/slides/slide9.xml><?xml version="1.0" encoding="utf-8"?>
+<p:sld xmlns:a="http://schemas.openxmlformats.org/drawingml/2006/main" xmlns:r="http://schemas.openxmlformats.org/officeDocument/2006/relationships" xmlns:p="http://schemas.openxmlformats.org/presentationml/2006/main">
+  <p:cSld>
+    <p:spTree>
+      <p:nvGrpSpPr>
+        <p:cNvPr id="1" name="">
+          <a:extLst>
+            <a:ext uri="{FF2B5EF4-FFF2-40B4-BE49-F238E27FC236}">
+              <a16:creationId xmlns:a16="http://schemas.microsoft.com/office/drawing/2014/main" id="{8E5EB96E-25CC-A2B2-5CB0-4E1AE00D8E78}"/>
+            </a:ext>
+          </a:extLst>
+        </p:cNvPr>
+        <p:cNvGrpSpPr/>
+        <p:nvPr/>
+      </p:nvGrpSpPr>
+      <p:grpSpPr>
+        <a:xfrm>
+          <a:off x="0" y="0"/>
+          <a:ext cx="0" cy="0"/>
+          <a:chOff x="0" y="0"/>
+          <a:chExt cx="0" cy="0"/>
+        </a:xfrm>
+      </p:grpSpPr>
+      <p:sp>
+        <p:nvSpPr>
+          <p:cNvPr id="2" name="Title 1">
+            <a:extLst>
+              <a:ext uri="{FF2B5EF4-FFF2-40B4-BE49-F238E27FC236}">
+                <a16:creationId xmlns:a16="http://schemas.microsoft.com/office/drawing/2014/main" id="{CB49EE9C-8642-A260-45AD-515022DBD896}"/>
+              </a:ext>
+            </a:extLst>
+          </p:cNvPr>
+          <p:cNvSpPr>
+            <a:spLocks noGrp="1"/>
+          </p:cNvSpPr>
+          <p:nvPr>
+            <p:ph type="title"/>
+          </p:nvPr>
+        </p:nvSpPr>
+        <p:spPr/>
+        <p:txBody>
+          <a:bodyPr/>
+          <a:lstStyle/>
+          <a:p>
+            <a:r>
+              <a:rPr lang="en-US" dirty="0" err="1"/>
+              <a:t>xai</a:t>
+            </a:r>
+            <a:r>
+              <a:rPr lang="en-US" dirty="0"/>
+              <a:t> and Visualization: feature engineering </a:t>
+            </a:r>
+          </a:p>
+        </p:txBody>
+      </p:sp>
+      <p:sp>
+        <p:nvSpPr>
+          <p:cNvPr id="8" name="TextBox 7">
+            <a:extLst>
+              <a:ext uri="{FF2B5EF4-FFF2-40B4-BE49-F238E27FC236}">
+                <a16:creationId xmlns:a16="http://schemas.microsoft.com/office/drawing/2014/main" id="{EAAE7C8F-49D7-E7C7-CE07-2DF9F5848243}"/>
+              </a:ext>
+            </a:extLst>
+          </p:cNvPr>
+          <p:cNvSpPr txBox="1"/>
+          <p:nvPr/>
+        </p:nvSpPr>
+        <p:spPr>
+          <a:xfrm>
+            <a:off x="6248400" y="6155844"/>
+            <a:ext cx="6294120" cy="584775"/>
+          </a:xfrm>
+          <a:prstGeom prst="rect">
+            <a:avLst/>
+          </a:prstGeom>
+          <a:noFill/>
+        </p:spPr>
+        <p:txBody>
+          <a:bodyPr wrap="square">
+            <a:spAutoFit/>
+          </a:bodyPr>
+          <a:lstStyle/>
+          <a:p>
+            <a:r>
+              <a:rPr lang="en-US" sz="1600" b="0" i="0" dirty="0">
+                <a:solidFill>
+                  <a:srgbClr val="333333"/>
+                </a:solidFill>
+                <a:effectLst/>
+                <a:latin typeface="+mj-lt"/>
+              </a:rPr>
+              <a:t>A. </a:t>
+            </a:r>
+            <a:r>
+              <a:rPr lang="en-US" sz="1600" b="0" i="0" dirty="0" err="1">
+                <a:solidFill>
+                  <a:srgbClr val="333333"/>
+                </a:solidFill>
+                <a:effectLst/>
+                <a:latin typeface="+mj-lt"/>
+              </a:rPr>
+              <a:t>Chatzimparmpas</a:t>
+            </a:r>
+            <a:r>
+              <a:rPr lang="en-US" sz="1600" b="0" i="0" dirty="0">
+                <a:solidFill>
+                  <a:srgbClr val="333333"/>
+                </a:solidFill>
+                <a:effectLst/>
+                <a:latin typeface="+mj-lt"/>
+              </a:rPr>
+              <a:t>, "Visual Analytics for Explainable and Trustworthy Artificial Intelligence,” 2025, </a:t>
+            </a:r>
+            <a:r>
+              <a:rPr lang="en-US" sz="1600" b="0" i="0" dirty="0" err="1">
+                <a:solidFill>
+                  <a:srgbClr val="333333"/>
+                </a:solidFill>
+                <a:effectLst/>
+                <a:latin typeface="+mj-lt"/>
+              </a:rPr>
+              <a:t>doi</a:t>
+            </a:r>
+            <a:r>
+              <a:rPr lang="en-US" sz="1600" b="0" i="0" dirty="0">
+                <a:solidFill>
+                  <a:srgbClr val="333333"/>
+                </a:solidFill>
+                <a:effectLst/>
+                <a:latin typeface="+mj-lt"/>
+              </a:rPr>
+              <a:t>: 10.1109/MCG.2025.3533806</a:t>
+            </a:r>
+            <a:r>
+              <a:rPr lang="en-US" sz="1600" dirty="0">
+                <a:solidFill>
+                  <a:srgbClr val="333333"/>
+                </a:solidFill>
+                <a:latin typeface="+mj-lt"/>
+              </a:rPr>
+              <a:t> </a:t>
+            </a:r>
+            <a:endParaRPr lang="en-US" sz="1600" dirty="0">
+              <a:latin typeface="+mj-lt"/>
+            </a:endParaRPr>
+          </a:p>
+        </p:txBody>
+      </p:sp>
+      <p:sp>
+        <p:nvSpPr>
+          <p:cNvPr id="4" name="Content Placeholder 3">
+            <a:extLst>
+              <a:ext uri="{FF2B5EF4-FFF2-40B4-BE49-F238E27FC236}">
+                <a16:creationId xmlns:a16="http://schemas.microsoft.com/office/drawing/2014/main" id="{7D9ED6DA-A577-D992-2126-0B1A1FA63B9D}"/>
+              </a:ext>
+            </a:extLst>
+          </p:cNvPr>
+          <p:cNvSpPr>
+            <a:spLocks noGrp="1"/>
+          </p:cNvSpPr>
+          <p:nvPr>
+            <p:ph idx="1"/>
+          </p:nvPr>
+        </p:nvSpPr>
+        <p:spPr/>
+        <p:txBody>
+          <a:bodyPr/>
+          <a:lstStyle/>
+          <a:p>
+            <a:r>
+              <a:rPr lang="en-US" dirty="0"/>
+              <a:t>FeatureEnVi13</a:t>
+            </a:r>
+          </a:p>
+        </p:txBody>
+      </p:sp>
+    </p:spTree>
+    <p:extLst>
+      <p:ext uri="{BB962C8B-B14F-4D97-AF65-F5344CB8AC3E}">
+        <p14:creationId xmlns:p14="http://schemas.microsoft.com/office/powerpoint/2010/main" val="558480613"/>
       </p:ext>
     </p:extLst>
   </p:cSld>

--- a/slides/17-XAI.pptx
+++ b/slides/17-XAI.pptx
@@ -5,7 +5,7 @@
     <p:sldMasterId id="2147483660" r:id="rId1"/>
   </p:sldMasterIdLst>
   <p:notesMasterIdLst>
-    <p:notesMasterId r:id="rId17"/>
+    <p:notesMasterId r:id="rId18"/>
   </p:notesMasterIdLst>
   <p:sldIdLst>
     <p:sldId id="256" r:id="rId2"/>
@@ -21,8 +21,9 @@
     <p:sldId id="266" r:id="rId12"/>
     <p:sldId id="267" r:id="rId13"/>
     <p:sldId id="268" r:id="rId14"/>
-    <p:sldId id="270" r:id="rId15"/>
-    <p:sldId id="271" r:id="rId16"/>
+    <p:sldId id="272" r:id="rId15"/>
+    <p:sldId id="270" r:id="rId16"/>
+    <p:sldId id="271" r:id="rId17"/>
   </p:sldIdLst>
   <p:sldSz cx="12192000" cy="6858000"/>
   <p:notesSz cx="6858000" cy="9144000"/>
@@ -626,7 +627,37 @@
           <a:p>
             <a:r>
               <a:rPr lang="en-US" dirty="0"/>
-              <a:t>VisEvol14 is a VA dashboard designed to facilitate hyperparameter search using evolutionary optimization [cf., Figure 3(3)]. By using multiple coordinated views, the dashboard enables users to create new hyperparameter sets and preserve robust ones within a majority-voting ensemble. Examining the effects of adding or removing algorithms and models in a majority-voting ensemble from various perspectives, along with monitoring the crossover and mutation processes, provides users with clarity on selecting hyperparameters for a single model or complex ensembles that require a balance of performance and diversity</a:t>
+              <a:t>VisEvol14 is </a:t>
+            </a:r>
+          </a:p>
+          <a:p>
+            <a:pPr marL="171450" indent="-171450">
+              <a:buFont typeface="Arial" panose="020B0604020202020204" pitchFamily="34" charset="0"/>
+              <a:buChar char="•"/>
+            </a:pPr>
+            <a:r>
+              <a:rPr lang="en-US" dirty="0"/>
+              <a:t>VA dashboard designed to facilitate hyperparameter search using evolutionary optimization </a:t>
+            </a:r>
+          </a:p>
+          <a:p>
+            <a:pPr marL="171450" indent="-171450">
+              <a:buFont typeface="Arial" panose="020B0604020202020204" pitchFamily="34" charset="0"/>
+              <a:buChar char="•"/>
+            </a:pPr>
+            <a:r>
+              <a:rPr lang="en-US" dirty="0"/>
+              <a:t>By using multiple coordinated views, the dashboard enables users to create new hyperparameter sets and preserve robust ones within a majority-voting ensemble. </a:t>
+            </a:r>
+          </a:p>
+          <a:p>
+            <a:pPr marL="171450" indent="-171450">
+              <a:buFont typeface="Arial" panose="020B0604020202020204" pitchFamily="34" charset="0"/>
+              <a:buChar char="•"/>
+            </a:pPr>
+            <a:r>
+              <a:rPr lang="en-US" dirty="0"/>
+              <a:t>Examining the effects of adding or removing algorithms and models in a majority-voting ensemble from various perspectives, along with monitoring the crossover and mutation processes, provides users with clarity on selecting hyperparameters for a single model or complex ensembles that require a balance of performance and diversity</a:t>
             </a:r>
           </a:p>
         </p:txBody>
@@ -1058,6 +1089,114 @@
         <p:cNvPr id="1" name="">
           <a:extLst>
             <a:ext uri="{FF2B5EF4-FFF2-40B4-BE49-F238E27FC236}">
+              <a16:creationId xmlns:a16="http://schemas.microsoft.com/office/drawing/2014/main" id="{3474E5B1-04CD-0AF4-5633-76AFDA6DFD8C}"/>
+            </a:ext>
+          </a:extLst>
+        </p:cNvPr>
+        <p:cNvGrpSpPr/>
+        <p:nvPr/>
+      </p:nvGrpSpPr>
+      <p:grpSpPr>
+        <a:xfrm>
+          <a:off x="0" y="0"/>
+          <a:ext cx="0" cy="0"/>
+          <a:chOff x="0" y="0"/>
+          <a:chExt cx="0" cy="0"/>
+        </a:xfrm>
+      </p:grpSpPr>
+      <p:sp>
+        <p:nvSpPr>
+          <p:cNvPr id="2" name="Slide Image Placeholder 1">
+            <a:extLst>
+              <a:ext uri="{FF2B5EF4-FFF2-40B4-BE49-F238E27FC236}">
+                <a16:creationId xmlns:a16="http://schemas.microsoft.com/office/drawing/2014/main" id="{DF53844C-A5F5-2C52-2CFF-B9D04B27683B}"/>
+              </a:ext>
+            </a:extLst>
+          </p:cNvPr>
+          <p:cNvSpPr>
+            <a:spLocks noGrp="1" noRot="1" noChangeAspect="1"/>
+          </p:cNvSpPr>
+          <p:nvPr>
+            <p:ph type="sldImg"/>
+          </p:nvPr>
+        </p:nvSpPr>
+        <p:spPr/>
+      </p:sp>
+      <p:sp>
+        <p:nvSpPr>
+          <p:cNvPr id="3" name="Notes Placeholder 2">
+            <a:extLst>
+              <a:ext uri="{FF2B5EF4-FFF2-40B4-BE49-F238E27FC236}">
+                <a16:creationId xmlns:a16="http://schemas.microsoft.com/office/drawing/2014/main" id="{70260A87-6E38-D3A1-536F-58E2220B46B8}"/>
+              </a:ext>
+            </a:extLst>
+          </p:cNvPr>
+          <p:cNvSpPr>
+            <a:spLocks noGrp="1"/>
+          </p:cNvSpPr>
+          <p:nvPr>
+            <p:ph type="body" idx="1"/>
+          </p:nvPr>
+        </p:nvSpPr>
+        <p:spPr/>
+        <p:txBody>
+          <a:bodyPr/>
+          <a:lstStyle/>
+          <a:p>
+            <a:endParaRPr lang="en-US" dirty="0"/>
+          </a:p>
+        </p:txBody>
+      </p:sp>
+      <p:sp>
+        <p:nvSpPr>
+          <p:cNvPr id="4" name="Slide Number Placeholder 3">
+            <a:extLst>
+              <a:ext uri="{FF2B5EF4-FFF2-40B4-BE49-F238E27FC236}">
+                <a16:creationId xmlns:a16="http://schemas.microsoft.com/office/drawing/2014/main" id="{1650AE7F-110A-0EB4-2195-102AA4298AB4}"/>
+              </a:ext>
+            </a:extLst>
+          </p:cNvPr>
+          <p:cNvSpPr>
+            <a:spLocks noGrp="1"/>
+          </p:cNvSpPr>
+          <p:nvPr>
+            <p:ph type="sldNum" sz="quarter" idx="5"/>
+          </p:nvPr>
+        </p:nvSpPr>
+        <p:spPr/>
+        <p:txBody>
+          <a:bodyPr/>
+          <a:lstStyle/>
+          <a:p>
+            <a:fld id="{362CD335-F0CB-D347-B8A5-7AB70F34C34F}" type="slidenum">
+              <a:rPr lang="en-US" smtClean="0"/>
+              <a:t>14</a:t>
+            </a:fld>
+            <a:endParaRPr lang="en-US"/>
+          </a:p>
+        </p:txBody>
+      </p:sp>
+    </p:spTree>
+    <p:extLst>
+      <p:ext uri="{BB962C8B-B14F-4D97-AF65-F5344CB8AC3E}">
+        <p14:creationId xmlns:p14="http://schemas.microsoft.com/office/powerpoint/2010/main" val="1334900817"/>
+      </p:ext>
+    </p:extLst>
+  </p:cSld>
+  <p:clrMapOvr>
+    <a:masterClrMapping/>
+  </p:clrMapOvr>
+</p:notes>
+</file>
+
+<file path=ppt/notesSlides/notesSlide15.xml><?xml version="1.0" encoding="utf-8"?>
+<p:notes xmlns:a="http://schemas.openxmlformats.org/drawingml/2006/main" xmlns:r="http://schemas.openxmlformats.org/officeDocument/2006/relationships" xmlns:p="http://schemas.openxmlformats.org/presentationml/2006/main">
+  <p:cSld>
+    <p:spTree>
+      <p:nvGrpSpPr>
+        <p:cNvPr id="1" name="">
+          <a:extLst>
+            <a:ext uri="{FF2B5EF4-FFF2-40B4-BE49-F238E27FC236}">
               <a16:creationId xmlns:a16="http://schemas.microsoft.com/office/drawing/2014/main" id="{8F3B6A4A-44CF-9A43-AD3E-F7298149DD53}"/>
             </a:ext>
           </a:extLst>
@@ -1139,7 +1278,7 @@
           <a:p>
             <a:fld id="{362CD335-F0CB-D347-B8A5-7AB70F34C34F}" type="slidenum">
               <a:rPr lang="en-US" smtClean="0"/>
-              <a:t>14</a:t>
+              <a:t>15</a:t>
             </a:fld>
             <a:endParaRPr lang="en-US"/>
           </a:p>
@@ -1158,7 +1297,7 @@
 </p:notes>
 </file>
 
-<file path=ppt/notesSlides/notesSlide15.xml><?xml version="1.0" encoding="utf-8"?>
+<file path=ppt/notesSlides/notesSlide16.xml><?xml version="1.0" encoding="utf-8"?>
 <p:notes xmlns:a="http://schemas.openxmlformats.org/drawingml/2006/main" xmlns:r="http://schemas.openxmlformats.org/officeDocument/2006/relationships" xmlns:p="http://schemas.openxmlformats.org/presentationml/2006/main">
   <p:cSld>
     <p:spTree>
@@ -1247,7 +1386,7 @@
           <a:p>
             <a:fld id="{362CD335-F0CB-D347-B8A5-7AB70F34C34F}" type="slidenum">
               <a:rPr lang="en-US" smtClean="0"/>
-              <a:t>15</a:t>
+              <a:t>16</a:t>
             </a:fld>
             <a:endParaRPr lang="en-US"/>
           </a:p>
@@ -2000,9 +2139,13 @@
           <a:bodyPr/>
           <a:lstStyle/>
           <a:p>
+            <a:pPr marL="171450" indent="-171450">
+              <a:buFont typeface="Arial" panose="020B0604020202020204" pitchFamily="34" charset="0"/>
+              <a:buChar char="•"/>
+            </a:pPr>
             <a:r>
               <a:rPr lang="en-US" dirty="0"/>
-              <a:t>HardVis12 is a VA dashboard designed to address instance hardness by employing highly configurable </a:t>
+              <a:t>VA dashboard designed to address instance hardness by employing highly configurable </a:t>
             </a:r>
             <a:r>
               <a:rPr lang="en-US" dirty="0" err="1"/>
@@ -2010,7 +2153,37 @@
             </a:r>
             <a:r>
               <a:rPr lang="en-US" dirty="0"/>
-              <a:t> and oversampling methods [cf., Figure 3(1)]. The dashboard provides multiple coordinated views, enabling users to determine the optimal distribution of data types iteratively, selectively remove safe-to-discard samples, and interactively oversample others as needed. It also supports the analysis of algorithmic recommendations by using diverse visual cues to validate the safety of proposed removals or additions. This VA approach makes the entire process transparent by being effective in tackling instance hardness and class imbalance problems</a:t>
+              <a:t> and oversampling methods </a:t>
+            </a:r>
+          </a:p>
+          <a:p>
+            <a:pPr marL="171450" indent="-171450">
+              <a:buFont typeface="Arial" panose="020B0604020202020204" pitchFamily="34" charset="0"/>
+              <a:buChar char="•"/>
+            </a:pPr>
+            <a:r>
+              <a:rPr lang="en-US" dirty="0"/>
+              <a:t>dashboard provides multiple coordinated views, enabling users to determine the optimal distribution of data types iteratively, selectively remove safe-to-discard samples, and interactively oversample others as needed. </a:t>
+            </a:r>
+          </a:p>
+          <a:p>
+            <a:pPr marL="171450" indent="-171450">
+              <a:buFont typeface="Arial" panose="020B0604020202020204" pitchFamily="34" charset="0"/>
+              <a:buChar char="•"/>
+            </a:pPr>
+            <a:r>
+              <a:rPr lang="en-US" dirty="0"/>
+              <a:t>It also supports the analysis of algorithmic recommendations by using diverse visual cues to validate the safety of proposed removals or additions. </a:t>
+            </a:r>
+          </a:p>
+          <a:p>
+            <a:pPr marL="171450" indent="-171450">
+              <a:buFont typeface="Arial" panose="020B0604020202020204" pitchFamily="34" charset="0"/>
+              <a:buChar char="•"/>
+            </a:pPr>
+            <a:r>
+              <a:rPr lang="en-US" dirty="0"/>
+              <a:t>This VA approach makes the entire process transparent by being effective in tackling instance hardness and class imbalance problems</a:t>
             </a:r>
           </a:p>
         </p:txBody>
@@ -2121,7 +2294,47 @@
           <a:p>
             <a:r>
               <a:rPr lang="en-US" dirty="0"/>
-              <a:t>FeatureEnVi13 is a VA dashboard designed to support users in engineering features through stepwise feature selection and semiautomatic feature extraction methods [cf., Figure 3(2)]. The dashboard employs multiple coordinated views to assist users in selecting, transforming, and creating new features as part of a highly iterative workflow. By examining the impact of features using various statistical metrics and automated feature selection techniques, users can enhance predictive performance, minimize computational resource requirements, and shorten training time. This VA approach increases adaptability and transparency by improving the feature engineering process.</a:t>
+              <a:t>FeatureEnVi13 is a</a:t>
+            </a:r>
+          </a:p>
+          <a:p>
+            <a:pPr marL="171450" indent="-171450">
+              <a:buFont typeface="Arial" panose="020B0604020202020204" pitchFamily="34" charset="0"/>
+              <a:buChar char="•"/>
+            </a:pPr>
+            <a:r>
+              <a:rPr lang="en-US" dirty="0"/>
+              <a:t>VA dashboard designed to support users in engineering features through stepwise feature selection and semiautomatic feature extraction methods  </a:t>
+            </a:r>
+          </a:p>
+          <a:p>
+            <a:pPr marL="171450" indent="-171450">
+              <a:buFont typeface="Arial" panose="020B0604020202020204" pitchFamily="34" charset="0"/>
+              <a:buChar char="•"/>
+            </a:pPr>
+            <a:r>
+              <a:rPr lang="en-US" dirty="0"/>
+              <a:t>The dashboard employs multiple coordinated views to assist users in selecting, transforming, and creating new features as part of a highly iterative workflow. </a:t>
+            </a:r>
+          </a:p>
+          <a:p>
+            <a:pPr marL="171450" indent="-171450">
+              <a:buFont typeface="Arial" panose="020B0604020202020204" pitchFamily="34" charset="0"/>
+              <a:buChar char="•"/>
+            </a:pPr>
+            <a:r>
+              <a:rPr lang="en-US" dirty="0"/>
+              <a:t>By examining the impact of features using various statistical metrics and automated feature selection techniques, users can enhance predictive performance, minimize computational resource requirements, and shorten training time. </a:t>
+            </a:r>
+          </a:p>
+          <a:p>
+            <a:pPr marL="171450" indent="-171450">
+              <a:buFont typeface="Arial" panose="020B0604020202020204" pitchFamily="34" charset="0"/>
+              <a:buChar char="•"/>
+            </a:pPr>
+            <a:r>
+              <a:rPr lang="en-US" dirty="0"/>
+              <a:t>This VA approach increases adaptability and transparency by improving the feature engineering process.</a:t>
             </a:r>
           </a:p>
         </p:txBody>
@@ -6218,18 +6431,68 @@
             <p:ph idx="1"/>
           </p:nvPr>
         </p:nvSpPr>
-        <p:spPr/>
-        <p:txBody>
-          <a:bodyPr/>
-          <a:lstStyle/>
-          <a:p>
-            <a:r>
-              <a:rPr lang="en-US" dirty="0"/>
-              <a:t>VisEvol14</a:t>
-            </a:r>
-          </a:p>
-        </p:txBody>
-      </p:sp>
+        <p:spPr>
+          <a:xfrm>
+            <a:off x="581193" y="2180496"/>
+            <a:ext cx="2710648" cy="3678303"/>
+          </a:xfrm>
+        </p:spPr>
+        <p:txBody>
+          <a:bodyPr>
+            <a:normAutofit/>
+          </a:bodyPr>
+          <a:lstStyle/>
+          <a:p>
+            <a:r>
+              <a:rPr lang="en-US" sz="2400" dirty="0" err="1"/>
+              <a:t>VisEvol</a:t>
+            </a:r>
+            <a:endParaRPr lang="en-US" sz="2400" dirty="0"/>
+          </a:p>
+          <a:p>
+            <a:r>
+              <a:rPr lang="en-US" sz="2400" dirty="0">
+                <a:hlinkClick r:id="rId3"/>
+              </a:rPr>
+              <a:t>https://diglib.eg.org/items/df6b539d-af1e-4a1a-b507-35a6d23c2d6f</a:t>
+            </a:r>
+            <a:r>
+              <a:rPr lang="en-US" sz="2400" dirty="0"/>
+              <a:t> </a:t>
+            </a:r>
+          </a:p>
+        </p:txBody>
+      </p:sp>
+      <p:pic>
+        <p:nvPicPr>
+          <p:cNvPr id="5" name="Picture 4" descr="A screenshot of a computer&#10;&#10;AI-generated content may be incorrect.">
+            <a:extLst>
+              <a:ext uri="{FF2B5EF4-FFF2-40B4-BE49-F238E27FC236}">
+                <a16:creationId xmlns:a16="http://schemas.microsoft.com/office/drawing/2014/main" id="{31F4177D-5EA1-D369-8C1F-E1699A0F2777}"/>
+              </a:ext>
+            </a:extLst>
+          </p:cNvPr>
+          <p:cNvPicPr>
+            <a:picLocks noChangeAspect="1"/>
+          </p:cNvPicPr>
+          <p:nvPr/>
+        </p:nvPicPr>
+        <p:blipFill>
+          <a:blip r:embed="rId4"/>
+          <a:stretch>
+            <a:fillRect/>
+          </a:stretch>
+        </p:blipFill>
+        <p:spPr>
+          <a:xfrm>
+            <a:off x="3481003" y="1822336"/>
+            <a:ext cx="8129804" cy="4333508"/>
+          </a:xfrm>
+          <a:prstGeom prst="rect">
+            <a:avLst/>
+          </a:prstGeom>
+        </p:spPr>
+      </p:pic>
     </p:spTree>
     <p:extLst>
       <p:ext uri="{BB962C8B-B14F-4D97-AF65-F5344CB8AC3E}">
@@ -6824,6 +7087,211 @@
         <p:cNvPr id="1" name="">
           <a:extLst>
             <a:ext uri="{FF2B5EF4-FFF2-40B4-BE49-F238E27FC236}">
+              <a16:creationId xmlns:a16="http://schemas.microsoft.com/office/drawing/2014/main" id="{23F7AEAB-2A9B-FB15-E76C-AEC97502E355}"/>
+            </a:ext>
+          </a:extLst>
+        </p:cNvPr>
+        <p:cNvGrpSpPr/>
+        <p:nvPr/>
+      </p:nvGrpSpPr>
+      <p:grpSpPr>
+        <a:xfrm>
+          <a:off x="0" y="0"/>
+          <a:ext cx="0" cy="0"/>
+          <a:chOff x="0" y="0"/>
+          <a:chExt cx="0" cy="0"/>
+        </a:xfrm>
+      </p:grpSpPr>
+      <p:sp>
+        <p:nvSpPr>
+          <p:cNvPr id="2" name="Title 1">
+            <a:extLst>
+              <a:ext uri="{FF2B5EF4-FFF2-40B4-BE49-F238E27FC236}">
+                <a16:creationId xmlns:a16="http://schemas.microsoft.com/office/drawing/2014/main" id="{5E5F11EB-4594-3015-6B0F-E1050AF0F24C}"/>
+              </a:ext>
+            </a:extLst>
+          </p:cNvPr>
+          <p:cNvSpPr>
+            <a:spLocks noGrp="1"/>
+          </p:cNvSpPr>
+          <p:nvPr>
+            <p:ph type="title"/>
+          </p:nvPr>
+        </p:nvSpPr>
+        <p:spPr/>
+        <p:txBody>
+          <a:bodyPr/>
+          <a:lstStyle/>
+          <a:p>
+            <a:r>
+              <a:rPr lang="en-US" dirty="0"/>
+              <a:t>open areas: over focus on Neural nets </a:t>
+            </a:r>
+          </a:p>
+        </p:txBody>
+      </p:sp>
+      <p:sp>
+        <p:nvSpPr>
+          <p:cNvPr id="8" name="TextBox 7">
+            <a:extLst>
+              <a:ext uri="{FF2B5EF4-FFF2-40B4-BE49-F238E27FC236}">
+                <a16:creationId xmlns:a16="http://schemas.microsoft.com/office/drawing/2014/main" id="{143DE536-5BAD-4707-9F32-C0D08F5C8B1A}"/>
+              </a:ext>
+            </a:extLst>
+          </p:cNvPr>
+          <p:cNvSpPr txBox="1"/>
+          <p:nvPr/>
+        </p:nvSpPr>
+        <p:spPr>
+          <a:xfrm>
+            <a:off x="6248400" y="6155844"/>
+            <a:ext cx="6294120" cy="584775"/>
+          </a:xfrm>
+          <a:prstGeom prst="rect">
+            <a:avLst/>
+          </a:prstGeom>
+          <a:noFill/>
+        </p:spPr>
+        <p:txBody>
+          <a:bodyPr wrap="square">
+            <a:spAutoFit/>
+          </a:bodyPr>
+          <a:lstStyle/>
+          <a:p>
+            <a:r>
+              <a:rPr lang="en-US" sz="1600" b="0" i="0" dirty="0">
+                <a:solidFill>
+                  <a:srgbClr val="333333"/>
+                </a:solidFill>
+                <a:effectLst/>
+                <a:latin typeface="+mj-lt"/>
+              </a:rPr>
+              <a:t>A. </a:t>
+            </a:r>
+            <a:r>
+              <a:rPr lang="en-US" sz="1600" b="0" i="0" dirty="0" err="1">
+                <a:solidFill>
+                  <a:srgbClr val="333333"/>
+                </a:solidFill>
+                <a:effectLst/>
+                <a:latin typeface="+mj-lt"/>
+              </a:rPr>
+              <a:t>Chatzimparmpas</a:t>
+            </a:r>
+            <a:r>
+              <a:rPr lang="en-US" sz="1600" b="0" i="0" dirty="0">
+                <a:solidFill>
+                  <a:srgbClr val="333333"/>
+                </a:solidFill>
+                <a:effectLst/>
+                <a:latin typeface="+mj-lt"/>
+              </a:rPr>
+              <a:t>, "Visual Analytics for Explainable and Trustworthy Artificial Intelligence,” 2025, </a:t>
+            </a:r>
+            <a:r>
+              <a:rPr lang="en-US" sz="1600" b="0" i="0" dirty="0" err="1">
+                <a:solidFill>
+                  <a:srgbClr val="333333"/>
+                </a:solidFill>
+                <a:effectLst/>
+                <a:latin typeface="+mj-lt"/>
+              </a:rPr>
+              <a:t>doi</a:t>
+            </a:r>
+            <a:r>
+              <a:rPr lang="en-US" sz="1600" b="0" i="0" dirty="0">
+                <a:solidFill>
+                  <a:srgbClr val="333333"/>
+                </a:solidFill>
+                <a:effectLst/>
+                <a:latin typeface="+mj-lt"/>
+              </a:rPr>
+              <a:t>: 10.1109/MCG.2025.3533806</a:t>
+            </a:r>
+            <a:r>
+              <a:rPr lang="en-US" sz="1600" dirty="0">
+                <a:solidFill>
+                  <a:srgbClr val="333333"/>
+                </a:solidFill>
+                <a:latin typeface="+mj-lt"/>
+              </a:rPr>
+              <a:t> </a:t>
+            </a:r>
+            <a:endParaRPr lang="en-US" sz="1600" dirty="0">
+              <a:latin typeface="+mj-lt"/>
+            </a:endParaRPr>
+          </a:p>
+        </p:txBody>
+      </p:sp>
+      <p:sp>
+        <p:nvSpPr>
+          <p:cNvPr id="4" name="Content Placeholder 3">
+            <a:extLst>
+              <a:ext uri="{FF2B5EF4-FFF2-40B4-BE49-F238E27FC236}">
+                <a16:creationId xmlns:a16="http://schemas.microsoft.com/office/drawing/2014/main" id="{F2A9FB0E-7128-98BD-74B0-AFC5366B8283}"/>
+              </a:ext>
+            </a:extLst>
+          </p:cNvPr>
+          <p:cNvSpPr>
+            <a:spLocks noGrp="1"/>
+          </p:cNvSpPr>
+          <p:nvPr>
+            <p:ph idx="1"/>
+          </p:nvPr>
+        </p:nvSpPr>
+        <p:spPr/>
+        <p:txBody>
+          <a:bodyPr>
+            <a:normAutofit/>
+          </a:bodyPr>
+          <a:lstStyle/>
+          <a:p>
+            <a:r>
+              <a:rPr lang="en-US" sz="2200" dirty="0"/>
+              <a:t>The majority of XAI work in the VA community focuses on NNs for image data</a:t>
+            </a:r>
+          </a:p>
+          <a:p>
+            <a:r>
+              <a:rPr lang="en-US" sz="2200" dirty="0"/>
+              <a:t>Out of 542 visualization papers surveyed on enhancing trust in AI, 345 primarily addressed NN models, while only 114 concentrated on ensembles. </a:t>
+            </a:r>
+          </a:p>
+          <a:p>
+            <a:r>
+              <a:rPr lang="en-US" sz="2200" dirty="0"/>
+              <a:t>Although image analysis is undeniably an important research domain—especially in fields, such as medicine, where NNs excel with high-dimensional data—other application areas should not be overlooked </a:t>
+            </a:r>
+          </a:p>
+          <a:p>
+            <a:r>
+              <a:rPr lang="en-US" sz="2200" dirty="0"/>
+              <a:t>Tabular data still represent the majority of datasets employed in AI workflows, where ensemble learning models often surpass NNs in performance</a:t>
+            </a:r>
+          </a:p>
+        </p:txBody>
+      </p:sp>
+    </p:spTree>
+    <p:extLst>
+      <p:ext uri="{BB962C8B-B14F-4D97-AF65-F5344CB8AC3E}">
+        <p14:creationId xmlns:p14="http://schemas.microsoft.com/office/powerpoint/2010/main" val="3335810153"/>
+      </p:ext>
+    </p:extLst>
+  </p:cSld>
+  <p:clrMapOvr>
+    <a:masterClrMapping/>
+  </p:clrMapOvr>
+</p:sld>
+</file>
+
+<file path=ppt/slides/slide15.xml><?xml version="1.0" encoding="utf-8"?>
+<p:sld xmlns:a="http://schemas.openxmlformats.org/drawingml/2006/main" xmlns:r="http://schemas.openxmlformats.org/officeDocument/2006/relationships" xmlns:p="http://schemas.openxmlformats.org/presentationml/2006/main">
+  <p:cSld>
+    <p:spTree>
+      <p:nvGrpSpPr>
+        <p:cNvPr id="1" name="">
+          <a:extLst>
+            <a:ext uri="{FF2B5EF4-FFF2-40B4-BE49-F238E27FC236}">
               <a16:creationId xmlns:a16="http://schemas.microsoft.com/office/drawing/2014/main" id="{E06761A0-0957-77EE-34D9-8B157EF06BE5}"/>
             </a:ext>
           </a:extLst>
@@ -6862,7 +7330,7 @@
           <a:p>
             <a:r>
               <a:rPr lang="en-US" dirty="0"/>
-              <a:t>open areas </a:t>
+              <a:t>open areas: Underexplored opportunities </a:t>
             </a:r>
           </a:p>
         </p:txBody>
@@ -6979,22 +7447,37 @@
         <p:spPr/>
         <p:txBody>
           <a:bodyPr>
-            <a:normAutofit fontScale="92500" lnSpcReduction="10000"/>
+            <a:normAutofit/>
           </a:bodyPr>
           <a:lstStyle/>
           <a:p>
             <a:r>
-              <a:rPr lang="en-US" dirty="0"/>
-              <a:t>The VA community has devoted significant attention to XAI in recent years, yet much of the focus remains on NNs for image data. Out of 542 visualization papers surveyed on enhancing trust in AI, 345 primarily addressed NN models, while only 114 concentrated on ensembles. Although image analysis is undeniably an important research domain—especially in fields, such as medicine, where NNs excel with high-dimensional data—other application areas should not be overlooked Tabular data still represent the majority of datasets employed in AI workflows, where ensemble learning models often surpass NNs in performance</a:t>
-            </a:r>
-          </a:p>
-          <a:p>
-            <a:endParaRPr lang="en-US" dirty="0"/>
-          </a:p>
-          <a:p>
-            <a:r>
-              <a:rPr lang="en-US" dirty="0"/>
-              <a:t>By analyzing the categorization of the 542 visualization techniques, it becomes evident that the underrepresented categories have the potential to inspire new research directions for non-TL areas, indirectly impacting trust in AI. For example, VA dashboards for boosting and stacking ensemble learning methods are notably scarce. Similarly, multilabel and regression problems are less explored compared to classification. In the realm of unsupervised learning, association and pattern mining remain underrepresented in VA. Reinforcement learning also receives minimal attention. Lastly, more emphasis is needed on addressing the needs of beginners and users with varying levels of experience who aim to analyze their data broadly</a:t>
+              <a:rPr lang="en-US" sz="2200" dirty="0"/>
+              <a:t>VA dashboards for boosting and stacking ensemble learning methods are notably scarce</a:t>
+            </a:r>
+          </a:p>
+          <a:p>
+            <a:r>
+              <a:rPr lang="en-US" sz="2200" dirty="0"/>
+              <a:t>Multilabel and regression problems are less explored compared to classification</a:t>
+            </a:r>
+          </a:p>
+          <a:p>
+            <a:r>
+              <a:rPr lang="en-US" sz="2200" dirty="0"/>
+              <a:t>In the realm of unsupervised learning, association and pattern mining remain underrepresented </a:t>
+            </a:r>
+          </a:p>
+          <a:p>
+            <a:r>
+              <a:rPr lang="en-US" sz="2200" dirty="0"/>
+              <a:t>Reinforcement learning also receives minimal attention</a:t>
+            </a:r>
+          </a:p>
+          <a:p>
+            <a:r>
+              <a:rPr lang="en-US" sz="2200" dirty="0"/>
+              <a:t>Lastly, more emphasis is needed on addressing the needs of beginners and users with varying levels of experience who aim to analyze their data broadly</a:t>
             </a:r>
           </a:p>
         </p:txBody>
@@ -7012,7 +7495,7 @@
 </p:sld>
 </file>
 
-<file path=ppt/slides/slide15.xml><?xml version="1.0" encoding="utf-8"?>
+<file path=ppt/slides/slide16.xml><?xml version="1.0" encoding="utf-8"?>
 <p:sld xmlns:a="http://schemas.openxmlformats.org/drawingml/2006/main" xmlns:r="http://schemas.openxmlformats.org/officeDocument/2006/relationships" xmlns:p="http://schemas.openxmlformats.org/presentationml/2006/main">
   <p:cSld>
     <p:spTree>
@@ -7058,7 +7541,7 @@
           <a:p>
             <a:r>
               <a:rPr lang="en-US" dirty="0"/>
-              <a:t>your turn</a:t>
+              <a:t>your turn!</a:t>
             </a:r>
           </a:p>
         </p:txBody>
@@ -8572,8 +9055,8 @@
         </p:nvSpPr>
         <p:spPr>
           <a:xfrm>
-            <a:off x="6248400" y="6155844"/>
-            <a:ext cx="6294120" cy="584775"/>
+            <a:off x="5013960" y="6030951"/>
+            <a:ext cx="7437120" cy="584775"/>
           </a:xfrm>
           <a:prstGeom prst="rect">
             <a:avLst/>
@@ -8587,63 +9070,58 @@
           <a:lstStyle/>
           <a:p>
             <a:r>
-              <a:rPr lang="en-US" sz="1600" b="0" i="0" dirty="0">
+              <a:rPr lang="en-US" sz="1600" dirty="0" err="1">
                 <a:solidFill>
                   <a:srgbClr val="333333"/>
                 </a:solidFill>
-                <a:effectLst/>
-                <a:latin typeface="+mj-lt"/>
-              </a:rPr>
-              <a:t>A. </a:t>
-            </a:r>
-            <a:r>
-              <a:rPr lang="en-US" sz="1600" b="0" i="0" dirty="0" err="1">
-                <a:solidFill>
-                  <a:srgbClr val="333333"/>
-                </a:solidFill>
-                <a:effectLst/>
                 <a:latin typeface="+mj-lt"/>
               </a:rPr>
               <a:t>Chatzimparmpas</a:t>
             </a:r>
             <a:r>
-              <a:rPr lang="en-US" sz="1600" b="0" i="0" dirty="0">
+              <a:rPr lang="en-US" sz="1600" dirty="0">
                 <a:solidFill>
                   <a:srgbClr val="333333"/>
                 </a:solidFill>
-                <a:effectLst/>
                 <a:latin typeface="+mj-lt"/>
               </a:rPr>
-              <a:t>, "Visual Analytics for Explainable and Trustworthy Artificial Intelligence,” 2025, </a:t>
-            </a:r>
-            <a:r>
-              <a:rPr lang="en-US" sz="1600" b="0" i="0" dirty="0" err="1">
+              <a:t>, et al. (2022). </a:t>
+            </a:r>
+            <a:r>
+              <a:rPr lang="en-US" sz="1600" dirty="0" err="1">
                 <a:solidFill>
                   <a:srgbClr val="333333"/>
                 </a:solidFill>
-                <a:effectLst/>
                 <a:latin typeface="+mj-lt"/>
               </a:rPr>
-              <a:t>doi</a:t>
-            </a:r>
-            <a:r>
-              <a:rPr lang="en-US" sz="1600" b="0" i="0" dirty="0">
+              <a:t>HardVis</a:t>
+            </a:r>
+            <a:r>
+              <a:rPr lang="en-US" sz="1600" dirty="0">
                 <a:solidFill>
                   <a:srgbClr val="333333"/>
                 </a:solidFill>
-                <a:effectLst/>
                 <a:latin typeface="+mj-lt"/>
               </a:rPr>
-              <a:t>: 10.1109/MCG.2025.3533806</a:t>
-            </a:r>
-            <a:r>
-              <a:rPr lang="en-US" sz="1600" dirty="0">
+              <a:t>: Visual Analytics to Handle Instance Hardness Using </a:t>
+            </a:r>
+            <a:r>
+              <a:rPr lang="en-US" sz="1600" dirty="0" err="1">
                 <a:solidFill>
                   <a:srgbClr val="333333"/>
                 </a:solidFill>
                 <a:latin typeface="+mj-lt"/>
               </a:rPr>
-              <a:t> </a:t>
+              <a:t>Undersampling</a:t>
+            </a:r>
+            <a:r>
+              <a:rPr lang="en-US" sz="1600" dirty="0">
+                <a:solidFill>
+                  <a:srgbClr val="333333"/>
+                </a:solidFill>
+                <a:latin typeface="+mj-lt"/>
+              </a:rPr>
+              <a:t> and Oversampling Techniques. 42. 10.1111/cgf.14726.</a:t>
             </a:r>
             <a:endParaRPr lang="en-US" sz="1600" dirty="0">
               <a:latin typeface="+mj-lt"/>
@@ -8667,25 +9145,71 @@
             <p:ph idx="1"/>
           </p:nvPr>
         </p:nvSpPr>
-        <p:spPr/>
-        <p:txBody>
-          <a:bodyPr/>
-          <a:lstStyle/>
-          <a:p>
-            <a:r>
-              <a:rPr lang="en-US" dirty="0" err="1"/>
+        <p:spPr>
+          <a:xfrm>
+            <a:off x="581193" y="2180496"/>
+            <a:ext cx="2558248" cy="3678303"/>
+          </a:xfrm>
+        </p:spPr>
+        <p:txBody>
+          <a:bodyPr>
+            <a:normAutofit/>
+          </a:bodyPr>
+          <a:lstStyle/>
+          <a:p>
+            <a:r>
+              <a:rPr lang="en-US" sz="2400" dirty="0" err="1"/>
               <a:t>HardVis</a:t>
             </a:r>
-            <a:r>
-              <a:rPr lang="en-US" dirty="0"/>
-              <a:t> [12] </a:t>
-            </a:r>
-          </a:p>
-          <a:p>
-            <a:endParaRPr lang="en-US" dirty="0"/>
-          </a:p>
-        </p:txBody>
-      </p:sp>
+            <a:endParaRPr lang="en-US" sz="2400" dirty="0"/>
+          </a:p>
+          <a:p>
+            <a:r>
+              <a:rPr lang="en-US" sz="2400" dirty="0">
+                <a:hlinkClick r:id="rId3"/>
+              </a:rPr>
+              <a:t>https://vimeo.com/772796696</a:t>
+            </a:r>
+            <a:r>
+              <a:rPr lang="en-US" sz="2400" dirty="0"/>
+              <a:t>  </a:t>
+            </a:r>
+          </a:p>
+          <a:p>
+            <a:endParaRPr lang="en-US" sz="2400" dirty="0"/>
+          </a:p>
+        </p:txBody>
+      </p:sp>
+      <p:pic>
+        <p:nvPicPr>
+          <p:cNvPr id="6" name="Picture 5" descr="A screenshot of a computer&#10;&#10;AI-generated content may be incorrect.">
+            <a:extLst>
+              <a:ext uri="{FF2B5EF4-FFF2-40B4-BE49-F238E27FC236}">
+                <a16:creationId xmlns:a16="http://schemas.microsoft.com/office/drawing/2014/main" id="{3FA859C1-91D4-1413-65C5-8548934360C9}"/>
+              </a:ext>
+            </a:extLst>
+          </p:cNvPr>
+          <p:cNvPicPr>
+            <a:picLocks noChangeAspect="1"/>
+          </p:cNvPicPr>
+          <p:nvPr/>
+        </p:nvPicPr>
+        <p:blipFill>
+          <a:blip r:embed="rId4"/>
+          <a:stretch>
+            <a:fillRect/>
+          </a:stretch>
+        </p:blipFill>
+        <p:spPr>
+          <a:xfrm>
+            <a:off x="3976023" y="1677067"/>
+            <a:ext cx="7772400" cy="4392774"/>
+          </a:xfrm>
+          <a:prstGeom prst="rect">
+            <a:avLst/>
+          </a:prstGeom>
+        </p:spPr>
+      </p:pic>
     </p:spTree>
     <p:extLst>
       <p:ext uri="{BB962C8B-B14F-4D97-AF65-F5344CB8AC3E}">
@@ -8768,8 +9292,8 @@
         </p:nvSpPr>
         <p:spPr>
           <a:xfrm>
-            <a:off x="6248400" y="6155844"/>
-            <a:ext cx="6294120" cy="584775"/>
+            <a:off x="3002280" y="6155844"/>
+            <a:ext cx="9540240" cy="646331"/>
           </a:xfrm>
           <a:prstGeom prst="rect">
             <a:avLst/>
@@ -8783,63 +9307,32 @@
           <a:lstStyle/>
           <a:p>
             <a:r>
-              <a:rPr lang="en-US" sz="1600" b="0" i="0" dirty="0">
-                <a:solidFill>
-                  <a:srgbClr val="333333"/>
-                </a:solidFill>
-                <a:effectLst/>
-                <a:latin typeface="+mj-lt"/>
-              </a:rPr>
+              <a:rPr lang="en-US" dirty="0"/>
               <a:t>A. </a:t>
             </a:r>
             <a:r>
-              <a:rPr lang="en-US" sz="1600" b="0" i="0" dirty="0" err="1">
-                <a:solidFill>
-                  <a:srgbClr val="333333"/>
-                </a:solidFill>
-                <a:effectLst/>
-                <a:latin typeface="+mj-lt"/>
-              </a:rPr>
+              <a:rPr lang="en-US" dirty="0" err="1"/>
               <a:t>Chatzimparmpas</a:t>
             </a:r>
             <a:r>
-              <a:rPr lang="en-US" sz="1600" b="0" i="0" dirty="0">
-                <a:solidFill>
-                  <a:srgbClr val="333333"/>
-                </a:solidFill>
-                <a:effectLst/>
-                <a:latin typeface="+mj-lt"/>
-              </a:rPr>
-              <a:t>, "Visual Analytics for Explainable and Trustworthy Artificial Intelligence,” 2025, </a:t>
-            </a:r>
-            <a:r>
-              <a:rPr lang="en-US" sz="1600" b="0" i="0" dirty="0" err="1">
-                <a:solidFill>
-                  <a:srgbClr val="333333"/>
-                </a:solidFill>
-                <a:effectLst/>
-                <a:latin typeface="+mj-lt"/>
-              </a:rPr>
+              <a:rPr lang="en-US" dirty="0"/>
+              <a:t>, et al., "</a:t>
+            </a:r>
+            <a:r>
+              <a:rPr lang="en-US" dirty="0" err="1"/>
+              <a:t>FeatureEnVi</a:t>
+            </a:r>
+            <a:r>
+              <a:rPr lang="en-US" dirty="0"/>
+              <a:t>: Visual Analytics for Feature Engineering Using Stepwise Selection and Semi-Automatic Extraction Approaches," 2022, </a:t>
+            </a:r>
+            <a:r>
+              <a:rPr lang="en-US" dirty="0" err="1"/>
               <a:t>doi</a:t>
             </a:r>
             <a:r>
-              <a:rPr lang="en-US" sz="1600" b="0" i="0" dirty="0">
-                <a:solidFill>
-                  <a:srgbClr val="333333"/>
-                </a:solidFill>
-                <a:effectLst/>
-                <a:latin typeface="+mj-lt"/>
-              </a:rPr>
-              <a:t>: 10.1109/MCG.2025.3533806</a:t>
-            </a:r>
-            <a:r>
-              <a:rPr lang="en-US" sz="1600" dirty="0">
-                <a:solidFill>
-                  <a:srgbClr val="333333"/>
-                </a:solidFill>
-                <a:latin typeface="+mj-lt"/>
-              </a:rPr>
-              <a:t> </a:t>
+              <a:rPr lang="en-US" dirty="0"/>
+              <a:t>: 10.1109/TVCG.2022.3141040</a:t>
             </a:r>
             <a:endParaRPr lang="en-US" sz="1600" dirty="0">
               <a:latin typeface="+mj-lt"/>
@@ -8863,18 +9356,68 @@
             <p:ph idx="1"/>
           </p:nvPr>
         </p:nvSpPr>
-        <p:spPr/>
-        <p:txBody>
-          <a:bodyPr/>
-          <a:lstStyle/>
-          <a:p>
-            <a:r>
-              <a:rPr lang="en-US" dirty="0"/>
-              <a:t>FeatureEnVi13</a:t>
-            </a:r>
-          </a:p>
-        </p:txBody>
-      </p:sp>
+        <p:spPr>
+          <a:xfrm>
+            <a:off x="581193" y="2180496"/>
+            <a:ext cx="2253448" cy="3678303"/>
+          </a:xfrm>
+        </p:spPr>
+        <p:txBody>
+          <a:bodyPr>
+            <a:normAutofit/>
+          </a:bodyPr>
+          <a:lstStyle/>
+          <a:p>
+            <a:r>
+              <a:rPr lang="en-US" sz="2400" dirty="0" err="1"/>
+              <a:t>FeatureEnVi</a:t>
+            </a:r>
+            <a:endParaRPr lang="en-US" sz="2400" dirty="0"/>
+          </a:p>
+          <a:p>
+            <a:r>
+              <a:rPr lang="en-US" sz="2400" dirty="0">
+                <a:hlinkClick r:id="rId3"/>
+              </a:rPr>
+              <a:t>https://vimeo.com/662536366</a:t>
+            </a:r>
+            <a:r>
+              <a:rPr lang="en-US" sz="2400" dirty="0"/>
+              <a:t> </a:t>
+            </a:r>
+          </a:p>
+        </p:txBody>
+      </p:sp>
+      <p:pic>
+        <p:nvPicPr>
+          <p:cNvPr id="5" name="Picture 4" descr="A screenshot of a computer&#10;&#10;AI-generated content may be incorrect.">
+            <a:extLst>
+              <a:ext uri="{FF2B5EF4-FFF2-40B4-BE49-F238E27FC236}">
+                <a16:creationId xmlns:a16="http://schemas.microsoft.com/office/drawing/2014/main" id="{3D2DF1EF-83F7-0E68-B489-DEF80CB6D3CB}"/>
+              </a:ext>
+            </a:extLst>
+          </p:cNvPr>
+          <p:cNvPicPr>
+            <a:picLocks noChangeAspect="1"/>
+          </p:cNvPicPr>
+          <p:nvPr/>
+        </p:nvPicPr>
+        <p:blipFill>
+          <a:blip r:embed="rId4"/>
+          <a:stretch>
+            <a:fillRect/>
+          </a:stretch>
+        </p:blipFill>
+        <p:spPr>
+          <a:xfrm>
+            <a:off x="3350727" y="1715956"/>
+            <a:ext cx="8260080" cy="4372984"/>
+          </a:xfrm>
+          <a:prstGeom prst="rect">
+            <a:avLst/>
+          </a:prstGeom>
+        </p:spPr>
+      </p:pic>
     </p:spTree>
     <p:extLst>
       <p:ext uri="{BB962C8B-B14F-4D97-AF65-F5344CB8AC3E}">
